--- a/assets/docs/Presentation_projet_Symfony_Aureo_Ruffier.pptx
+++ b/assets/docs/Presentation_projet_Symfony_Aureo_Ruffier.pptx
@@ -5,7 +5,7 @@
     <p:sldMasterId id="2147483648" r:id="rId1"/>
   </p:sldMasterIdLst>
   <p:notesMasterIdLst>
-    <p:notesMasterId r:id="rId20"/>
+    <p:notesMasterId r:id="rId22"/>
   </p:notesMasterIdLst>
   <p:sldIdLst>
     <p:sldId id="256" r:id="rId2"/>
@@ -17,15 +17,17 @@
     <p:sldId id="261" r:id="rId8"/>
     <p:sldId id="273" r:id="rId9"/>
     <p:sldId id="262" r:id="rId10"/>
-    <p:sldId id="263" r:id="rId11"/>
-    <p:sldId id="264" r:id="rId12"/>
-    <p:sldId id="272" r:id="rId13"/>
-    <p:sldId id="265" r:id="rId14"/>
-    <p:sldId id="276" r:id="rId15"/>
-    <p:sldId id="266" r:id="rId16"/>
-    <p:sldId id="267" r:id="rId17"/>
-    <p:sldId id="269" r:id="rId18"/>
-    <p:sldId id="270" r:id="rId19"/>
+    <p:sldId id="277" r:id="rId11"/>
+    <p:sldId id="278" r:id="rId12"/>
+    <p:sldId id="263" r:id="rId13"/>
+    <p:sldId id="264" r:id="rId14"/>
+    <p:sldId id="272" r:id="rId15"/>
+    <p:sldId id="265" r:id="rId16"/>
+    <p:sldId id="276" r:id="rId17"/>
+    <p:sldId id="266" r:id="rId18"/>
+    <p:sldId id="267" r:id="rId19"/>
+    <p:sldId id="269" r:id="rId20"/>
+    <p:sldId id="270" r:id="rId21"/>
   </p:sldIdLst>
   <p:sldSz cx="12192000" cy="6858000"/>
   <p:notesSz cx="6858000" cy="9144000"/>
@@ -353,7 +355,13 @@
   <p:cSld>
     <p:spTree>
       <p:nvGrpSpPr>
-        <p:cNvPr id="1" name=""/>
+        <p:cNvPr id="1" name="">
+          <a:extLst>
+            <a:ext uri="{FF2B5EF4-FFF2-40B4-BE49-F238E27FC236}">
+              <a16:creationId xmlns:a16="http://schemas.microsoft.com/office/drawing/2014/main" id="{FA214650-3623-84CC-CAD4-60560A7767D5}"/>
+            </a:ext>
+          </a:extLst>
+        </p:cNvPr>
         <p:cNvGrpSpPr/>
         <p:nvPr/>
       </p:nvGrpSpPr>
@@ -367,7 +375,13 @@
       </p:grpSpPr>
       <p:sp>
         <p:nvSpPr>
-          <p:cNvPr id="2" name="Slide Image Placeholder 1"/>
+          <p:cNvPr id="2" name="Slide Image Placeholder 1">
+            <a:extLst>
+              <a:ext uri="{FF2B5EF4-FFF2-40B4-BE49-F238E27FC236}">
+                <a16:creationId xmlns:a16="http://schemas.microsoft.com/office/drawing/2014/main" id="{8E443CD2-0F4C-D245-27BF-960F96E6D320}"/>
+              </a:ext>
+            </a:extLst>
+          </p:cNvPr>
           <p:cNvSpPr>
             <a:spLocks noGrp="1" noRot="1" noChangeAspect="1"/>
           </p:cNvSpPr>
@@ -379,7 +393,13 @@
       </p:sp>
       <p:sp>
         <p:nvSpPr>
-          <p:cNvPr id="3" name="Notes Placeholder 2"/>
+          <p:cNvPr id="3" name="Notes Placeholder 2">
+            <a:extLst>
+              <a:ext uri="{FF2B5EF4-FFF2-40B4-BE49-F238E27FC236}">
+                <a16:creationId xmlns:a16="http://schemas.microsoft.com/office/drawing/2014/main" id="{E23E3190-DACF-AF3D-F44E-B9E3A8EC833E}"/>
+              </a:ext>
+            </a:extLst>
+          </p:cNvPr>
           <p:cNvSpPr>
             <a:spLocks noGrp="1"/>
           </p:cNvSpPr>
@@ -402,128 +422,44 @@
             </a:r>
             <a:r>
               <a:rPr dirty="0"/>
-              <a:t> MVC avec les </a:t>
-            </a:r>
-            <a:r>
-              <a:rPr dirty="0" err="1"/>
-              <a:t>vrais</a:t>
-            </a:r>
-            <a:r>
-              <a:rPr dirty="0"/>
-              <a:t> controllers.</a:t>
+              <a:t> Twig, Bootstrap, CSS et JS.</a:t>
             </a:r>
             <a:endParaRPr lang="pt-BR" dirty="0"/>
           </a:p>
           <a:p>
             <a:r>
               <a:rPr lang="fr-FR" dirty="0"/>
-              <a:t>Le </a:t>
+              <a:t>Pour le CSS, j'utilise Bootstrap pour le système de grille, le responsive, les boutons, les formulaires et certains composants.</a:t>
+            </a:r>
+          </a:p>
+          <a:p>
+            <a:r>
+              <a:rPr lang="fr-FR" dirty="0"/>
+              <a:t>J'ai ensuite ajouté des classes personnalisées pour respecter le design du projet, par exemple « service-</a:t>
             </a:r>
             <a:r>
               <a:rPr lang="fr-FR" dirty="0" err="1"/>
-              <a:t>back-end</a:t>
+              <a:t>card</a:t>
             </a:r>
             <a:r>
               <a:rPr lang="fr-FR" dirty="0"/>
-              <a:t> est basé sur le principe MVC.</a:t>
-            </a:r>
-          </a:p>
-          <a:p>
+              <a:t> », « </a:t>
+            </a:r>
+            <a:r>
+              <a:rPr lang="fr-FR" dirty="0" err="1"/>
+              <a:t>hero</a:t>
+            </a:r>
             <a:r>
               <a:rPr lang="fr-FR" dirty="0"/>
-              <a:t>La partie Model est représentée principalement par les entités Doctrine et les repositories.</a:t>
-            </a:r>
-          </a:p>
-          <a:p>
+              <a:t>-section » ou « </a:t>
+            </a:r>
+            <a:r>
+              <a:rPr lang="fr-FR" dirty="0" err="1"/>
+              <a:t>btn</a:t>
+            </a:r>
             <a:r>
               <a:rPr lang="fr-FR" dirty="0"/>
-              <a:t>Les </a:t>
-            </a:r>
-            <a:r>
-              <a:rPr lang="fr-FR" dirty="0" err="1"/>
-              <a:t>controllers</a:t>
-            </a:r>
-            <a:r>
-              <a:rPr lang="fr-FR" dirty="0"/>
-              <a:t> reçoivent les requêtes et coordonnent le traitement.</a:t>
-            </a:r>
-          </a:p>
-          <a:p>
-            <a:r>
-              <a:rPr lang="fr-FR" dirty="0"/>
-              <a:t>Enfin, la </a:t>
-            </a:r>
-            <a:r>
-              <a:rPr lang="fr-FR" dirty="0" err="1"/>
-              <a:t>View</a:t>
-            </a:r>
-            <a:r>
-              <a:rPr lang="fr-FR" dirty="0"/>
-              <a:t> correspond aux </a:t>
-            </a:r>
-            <a:r>
-              <a:rPr lang="fr-FR" dirty="0" err="1"/>
-              <a:t>templates</a:t>
-            </a:r>
-            <a:r>
-              <a:rPr lang="fr-FR" dirty="0"/>
-              <a:t> Twig.</a:t>
-            </a:r>
-          </a:p>
-          <a:p>
-            <a:r>
-              <a:rPr lang="fr-FR" dirty="0"/>
-              <a:t>Par exemple, lorsqu'un utilisateur consulte la liste des produits, la requête arrive sur </a:t>
-            </a:r>
-            <a:r>
-              <a:rPr lang="fr-FR" dirty="0" err="1"/>
-              <a:t>ProductController</a:t>
-            </a:r>
-            <a:r>
-              <a:rPr lang="fr-FR" dirty="0"/>
-              <a:t>.</a:t>
-            </a:r>
-          </a:p>
-          <a:p>
-            <a:r>
-              <a:rPr lang="fr-FR" dirty="0"/>
-              <a:t>Le </a:t>
-            </a:r>
-            <a:r>
-              <a:rPr lang="fr-FR" dirty="0" err="1"/>
-              <a:t>controller</a:t>
-            </a:r>
-            <a:r>
-              <a:rPr lang="fr-FR" dirty="0"/>
-              <a:t> utilise </a:t>
-            </a:r>
-            <a:r>
-              <a:rPr lang="fr-FR" dirty="0" err="1"/>
-              <a:t>ProductRepository</a:t>
-            </a:r>
-            <a:r>
-              <a:rPr lang="fr-FR" dirty="0"/>
-              <a:t> pour récupérer les produits actifs.</a:t>
-            </a:r>
-          </a:p>
-          <a:p>
-            <a:r>
-              <a:rPr lang="fr-FR" dirty="0"/>
-              <a:t>Il transmet ensuite les données au </a:t>
-            </a:r>
-            <a:r>
-              <a:rPr lang="fr-FR" dirty="0" err="1"/>
-              <a:t>template</a:t>
-            </a:r>
-            <a:r>
-              <a:rPr lang="fr-FR" dirty="0"/>
-              <a:t> Twig.</a:t>
-            </a:r>
-          </a:p>
-          <a:p>
-            <a:r>
-              <a:rPr lang="fr-FR" dirty="0"/>
-              <a:t>Twig génère le HTML qui est finalement envoyé au navigateur.</a:t>
+              <a:t>-gold ».</a:t>
             </a:r>
           </a:p>
           <a:p>
@@ -533,7 +469,13 @@
       </p:sp>
       <p:sp>
         <p:nvSpPr>
-          <p:cNvPr id="4" name="Slide Number Placeholder 3"/>
+          <p:cNvPr id="4" name="Slide Number Placeholder 3">
+            <a:extLst>
+              <a:ext uri="{FF2B5EF4-FFF2-40B4-BE49-F238E27FC236}">
+                <a16:creationId xmlns:a16="http://schemas.microsoft.com/office/drawing/2014/main" id="{BFEB2D9A-4DAD-4B55-3C66-DC40F5C056E6}"/>
+              </a:ext>
+            </a:extLst>
+          </p:cNvPr>
           <p:cNvSpPr>
             <a:spLocks noGrp="1"/>
           </p:cNvSpPr>
@@ -544,6 +486,11 @@
         <p:spPr/>
       </p:sp>
     </p:spTree>
+    <p:extLst>
+      <p:ext uri="{BB962C8B-B14F-4D97-AF65-F5344CB8AC3E}">
+        <p14:creationId xmlns:p14="http://schemas.microsoft.com/office/powerpoint/2010/main" val="1625430989"/>
+      </p:ext>
+    </p:extLst>
   </p:cSld>
   <p:clrMapOvr>
     <a:masterClrMapping/>
@@ -552,6 +499,138 @@
 </file>
 
 <file path=ppt/notesSlides/notesSlide11.xml><?xml version="1.0" encoding="utf-8"?>
+<p:notes xmlns:a="http://schemas.openxmlformats.org/drawingml/2006/main" xmlns:r="http://schemas.openxmlformats.org/officeDocument/2006/relationships" xmlns:p="http://schemas.openxmlformats.org/presentationml/2006/main">
+  <p:cSld>
+    <p:spTree>
+      <p:nvGrpSpPr>
+        <p:cNvPr id="1" name="">
+          <a:extLst>
+            <a:ext uri="{FF2B5EF4-FFF2-40B4-BE49-F238E27FC236}">
+              <a16:creationId xmlns:a16="http://schemas.microsoft.com/office/drawing/2014/main" id="{AF8E1159-95DD-E7EA-9203-51C0FFFA9A5F}"/>
+            </a:ext>
+          </a:extLst>
+        </p:cNvPr>
+        <p:cNvGrpSpPr/>
+        <p:nvPr/>
+      </p:nvGrpSpPr>
+      <p:grpSpPr>
+        <a:xfrm>
+          <a:off x="0" y="0"/>
+          <a:ext cx="0" cy="0"/>
+          <a:chOff x="0" y="0"/>
+          <a:chExt cx="0" cy="0"/>
+        </a:xfrm>
+      </p:grpSpPr>
+      <p:sp>
+        <p:nvSpPr>
+          <p:cNvPr id="2" name="Slide Image Placeholder 1">
+            <a:extLst>
+              <a:ext uri="{FF2B5EF4-FFF2-40B4-BE49-F238E27FC236}">
+                <a16:creationId xmlns:a16="http://schemas.microsoft.com/office/drawing/2014/main" id="{FAD2DFDE-0E7A-7D7A-2129-6FCC732C2898}"/>
+              </a:ext>
+            </a:extLst>
+          </p:cNvPr>
+          <p:cNvSpPr>
+            <a:spLocks noGrp="1" noRot="1" noChangeAspect="1"/>
+          </p:cNvSpPr>
+          <p:nvPr>
+            <p:ph type="sldImg" idx="2"/>
+          </p:nvPr>
+        </p:nvSpPr>
+        <p:spPr/>
+      </p:sp>
+      <p:sp>
+        <p:nvSpPr>
+          <p:cNvPr id="3" name="Notes Placeholder 2">
+            <a:extLst>
+              <a:ext uri="{FF2B5EF4-FFF2-40B4-BE49-F238E27FC236}">
+                <a16:creationId xmlns:a16="http://schemas.microsoft.com/office/drawing/2014/main" id="{ABF9DA19-03A8-92C7-68E6-27C40F8057C4}"/>
+              </a:ext>
+            </a:extLst>
+          </p:cNvPr>
+          <p:cNvSpPr>
+            <a:spLocks noGrp="1"/>
+          </p:cNvSpPr>
+          <p:nvPr>
+            <p:ph type="body" sz="quarter" idx="3"/>
+          </p:nvPr>
+        </p:nvSpPr>
+        <p:spPr/>
+        <p:txBody>
+          <a:bodyPr/>
+          <a:lstStyle/>
+          <a:p>
+            <a:r>
+              <a:rPr dirty="0"/>
+              <a:t>~2m : </a:t>
+            </a:r>
+            <a:r>
+              <a:rPr dirty="0" err="1"/>
+              <a:t>Expliquer</a:t>
+            </a:r>
+            <a:r>
+              <a:rPr dirty="0"/>
+              <a:t> Twig, Bootstrap, CSS et JS.</a:t>
+            </a:r>
+            <a:endParaRPr lang="pt-BR" dirty="0"/>
+          </a:p>
+          <a:p>
+            <a:r>
+              <a:rPr lang="fr-FR" dirty="0"/>
+              <a:t>Le JavaScript reste relativement léger dans cette version du projet. Une partie des interactions nécessaires est déjà fournie par Bootstrap.</a:t>
+            </a:r>
+          </a:p>
+          <a:p>
+            <a:r>
+              <a:rPr lang="fr-FR" dirty="0"/>
+              <a:t>Les fichiers CSS et JavaScript sont ensuite compilés et gérés avec </a:t>
+            </a:r>
+            <a:r>
+              <a:rPr lang="fr-FR" dirty="0" err="1"/>
+              <a:t>Webpack</a:t>
+            </a:r>
+            <a:r>
+              <a:rPr lang="fr-FR" dirty="0"/>
+              <a:t> Encore.</a:t>
+            </a:r>
+          </a:p>
+          <a:p>
+            <a:endParaRPr dirty="0"/>
+          </a:p>
+        </p:txBody>
+      </p:sp>
+      <p:sp>
+        <p:nvSpPr>
+          <p:cNvPr id="4" name="Slide Number Placeholder 3">
+            <a:extLst>
+              <a:ext uri="{FF2B5EF4-FFF2-40B4-BE49-F238E27FC236}">
+                <a16:creationId xmlns:a16="http://schemas.microsoft.com/office/drawing/2014/main" id="{0EA0F60C-60C5-B1C0-D491-2D8C61EDFFB3}"/>
+              </a:ext>
+            </a:extLst>
+          </p:cNvPr>
+          <p:cNvSpPr>
+            <a:spLocks noGrp="1"/>
+          </p:cNvSpPr>
+          <p:nvPr>
+            <p:ph type="sldNum" sz="quarter" idx="5"/>
+          </p:nvPr>
+        </p:nvSpPr>
+        <p:spPr/>
+      </p:sp>
+    </p:spTree>
+    <p:extLst>
+      <p:ext uri="{BB962C8B-B14F-4D97-AF65-F5344CB8AC3E}">
+        <p14:creationId xmlns:p14="http://schemas.microsoft.com/office/powerpoint/2010/main" val="2866797633"/>
+      </p:ext>
+    </p:extLst>
+  </p:cSld>
+  <p:clrMapOvr>
+    <a:masterClrMapping/>
+  </p:clrMapOvr>
+</p:notes>
+</file>
+
+<file path=ppt/notesSlides/notesSlide12.xml><?xml version="1.0" encoding="utf-8"?>
 <p:notes xmlns:a="http://schemas.openxmlformats.org/drawingml/2006/main" xmlns:r="http://schemas.openxmlformats.org/officeDocument/2006/relationships" xmlns:p="http://schemas.openxmlformats.org/presentationml/2006/main">
   <p:cSld>
     <p:spTree>
@@ -597,23 +676,25 @@
           <a:p>
             <a:r>
               <a:rPr dirty="0"/>
-              <a:t>~1m30 : </a:t>
+              <a:t>~2m : </a:t>
             </a:r>
             <a:r>
               <a:rPr dirty="0" err="1"/>
-              <a:t>Montrer</a:t>
+              <a:t>Expliquer</a:t>
             </a:r>
             <a:r>
               <a:rPr dirty="0"/>
-              <a:t> Repository → Doctrine → SQL.</a:t>
+              <a:t> MVC avec les </a:t>
+            </a:r>
+            <a:r>
+              <a:rPr dirty="0" err="1"/>
+              <a:t>vrais</a:t>
+            </a:r>
+            <a:r>
+              <a:rPr dirty="0"/>
+              <a:t> controllers.</a:t>
             </a:r>
             <a:endParaRPr lang="pt-BR" dirty="0"/>
-          </a:p>
-          <a:p>
-            <a:r>
-              <a:rPr lang="fr-FR" dirty="0"/>
-              <a:t>Un point important dans mon projet est l'utilisation de Doctrine.</a:t>
-            </a:r>
           </a:p>
           <a:p>
             <a:r>
@@ -622,15 +703,63 @@
             </a:r>
             <a:r>
               <a:rPr lang="fr-FR" dirty="0" err="1"/>
-              <a:t>controller</a:t>
+              <a:t>back-end</a:t>
             </a:r>
             <a:r>
               <a:rPr lang="fr-FR" dirty="0"/>
-              <a:t> ne communique pas directement avec </a:t>
+              <a:t> est basé sur le principe MVC.</a:t>
+            </a:r>
+          </a:p>
+          <a:p>
+            <a:r>
+              <a:rPr lang="fr-FR" dirty="0"/>
+              <a:t>La partie Model est représentée principalement par les entités Doctrine et les repositories.</a:t>
+            </a:r>
+          </a:p>
+          <a:p>
+            <a:r>
+              <a:rPr lang="fr-FR" dirty="0"/>
+              <a:t>Les </a:t>
             </a:r>
             <a:r>
               <a:rPr lang="fr-FR" dirty="0" err="1"/>
-              <a:t>MariaDB</a:t>
+              <a:t>controllers</a:t>
+            </a:r>
+            <a:r>
+              <a:rPr lang="fr-FR" dirty="0"/>
+              <a:t> reçoivent les requêtes et coordonnent le traitement.</a:t>
+            </a:r>
+          </a:p>
+          <a:p>
+            <a:r>
+              <a:rPr lang="fr-FR" dirty="0"/>
+              <a:t>Enfin, la </a:t>
+            </a:r>
+            <a:r>
+              <a:rPr lang="fr-FR" dirty="0" err="1"/>
+              <a:t>View</a:t>
+            </a:r>
+            <a:r>
+              <a:rPr lang="fr-FR" dirty="0"/>
+              <a:t> correspond aux </a:t>
+            </a:r>
+            <a:r>
+              <a:rPr lang="fr-FR" dirty="0" err="1"/>
+              <a:t>templates</a:t>
+            </a:r>
+            <a:r>
+              <a:rPr lang="fr-FR" dirty="0"/>
+              <a:t> Twig.</a:t>
+            </a:r>
+          </a:p>
+          <a:p>
+            <a:r>
+              <a:rPr lang="fr-FR" dirty="0"/>
+              <a:t>Par exemple, lorsqu'un utilisateur consulte la liste des produits, la requête arrive sur </a:t>
+            </a:r>
+            <a:r>
+              <a:rPr lang="fr-FR" dirty="0" err="1"/>
+              <a:t>ProductController</a:t>
             </a:r>
             <a:r>
               <a:rPr lang="fr-FR" dirty="0"/>
@@ -640,55 +769,7 @@
           <a:p>
             <a:r>
               <a:rPr lang="fr-FR" dirty="0"/>
-              <a:t>Il utilise un repository.</a:t>
-            </a:r>
-          </a:p>
-          <a:p>
-            <a:r>
-              <a:rPr lang="fr-FR" dirty="0"/>
-              <a:t>Dans le repository, je peux utiliser les méthodes fournies par Doctrine ou construire des requêtes plus spécifiques avec </a:t>
-            </a:r>
-            <a:r>
-              <a:rPr lang="fr-FR" dirty="0" err="1"/>
-              <a:t>QueryBuilder</a:t>
-            </a:r>
-            <a:r>
-              <a:rPr lang="fr-FR" dirty="0"/>
-              <a:t> et DQL.</a:t>
-            </a:r>
-          </a:p>
-          <a:p>
-            <a:r>
-              <a:rPr lang="fr-FR" dirty="0"/>
-              <a:t>Doctrine traduit ensuite cette logique en SQL compatible avec la base de données.</a:t>
-            </a:r>
-          </a:p>
-          <a:p>
-            <a:r>
-              <a:rPr lang="fr-FR" dirty="0"/>
-              <a:t>Par exemple, j'ai une méthode personnalisée « </a:t>
-            </a:r>
-            <a:r>
-              <a:rPr lang="fr-FR" dirty="0" err="1"/>
-              <a:t>findLatestApproved</a:t>
-            </a:r>
-            <a:r>
-              <a:rPr lang="fr-FR" dirty="0"/>
-              <a:t> » dans </a:t>
-            </a:r>
-            <a:r>
-              <a:rPr lang="fr-FR" dirty="0" err="1"/>
-              <a:t>ReviewRepository</a:t>
-            </a:r>
-            <a:r>
-              <a:rPr lang="fr-FR" dirty="0"/>
-              <a:t> pour récupérer les 6 dernières avis.</a:t>
-            </a:r>
-          </a:p>
-          <a:p>
-            <a:r>
-              <a:rPr lang="fr-FR" dirty="0"/>
-              <a:t>Cela permet de garder la logique d'accès aux données dans le repository plutôt que de mettre directement les requêtes dans le </a:t>
+              <a:t>Le </a:t>
             </a:r>
             <a:r>
               <a:rPr lang="fr-FR" dirty="0" err="1"/>
@@ -696,7 +777,35 @@
             </a:r>
             <a:r>
               <a:rPr lang="fr-FR" dirty="0"/>
-              <a:t>.</a:t>
+              <a:t> utilise </a:t>
+            </a:r>
+            <a:r>
+              <a:rPr lang="fr-FR" dirty="0" err="1"/>
+              <a:t>ProductRepository</a:t>
+            </a:r>
+            <a:r>
+              <a:rPr lang="fr-FR" dirty="0"/>
+              <a:t> pour récupérer les produits actifs.</a:t>
+            </a:r>
+          </a:p>
+          <a:p>
+            <a:r>
+              <a:rPr lang="fr-FR" dirty="0"/>
+              <a:t>Il transmet ensuite les données au </a:t>
+            </a:r>
+            <a:r>
+              <a:rPr lang="fr-FR" dirty="0" err="1"/>
+              <a:t>template</a:t>
+            </a:r>
+            <a:r>
+              <a:rPr lang="fr-FR" dirty="0"/>
+              <a:t> Twig.</a:t>
+            </a:r>
+          </a:p>
+          <a:p>
+            <a:r>
+              <a:rPr lang="fr-FR" dirty="0"/>
+              <a:t>Twig génère le HTML qui est finalement envoyé au navigateur.</a:t>
             </a:r>
           </a:p>
           <a:p>
@@ -717,868 +826,6 @@
         <p:spPr/>
       </p:sp>
     </p:spTree>
-  </p:cSld>
-  <p:clrMapOvr>
-    <a:masterClrMapping/>
-  </p:clrMapOvr>
-</p:notes>
-</file>
-
-<file path=ppt/notesSlides/notesSlide12.xml><?xml version="1.0" encoding="utf-8"?>
-<p:notes xmlns:a="http://schemas.openxmlformats.org/drawingml/2006/main" xmlns:r="http://schemas.openxmlformats.org/officeDocument/2006/relationships" xmlns:p="http://schemas.openxmlformats.org/presentationml/2006/main">
-  <p:cSld>
-    <p:spTree>
-      <p:nvGrpSpPr>
-        <p:cNvPr id="1" name="">
-          <a:extLst>
-            <a:ext uri="{FF2B5EF4-FFF2-40B4-BE49-F238E27FC236}">
-              <a16:creationId xmlns:a16="http://schemas.microsoft.com/office/drawing/2014/main" id="{B0BE95BA-2664-B704-434A-81C247A4D922}"/>
-            </a:ext>
-          </a:extLst>
-        </p:cNvPr>
-        <p:cNvGrpSpPr/>
-        <p:nvPr/>
-      </p:nvGrpSpPr>
-      <p:grpSpPr>
-        <a:xfrm>
-          <a:off x="0" y="0"/>
-          <a:ext cx="0" cy="0"/>
-          <a:chOff x="0" y="0"/>
-          <a:chExt cx="0" cy="0"/>
-        </a:xfrm>
-      </p:grpSpPr>
-      <p:sp>
-        <p:nvSpPr>
-          <p:cNvPr id="2" name="Slide Image Placeholder 1">
-            <a:extLst>
-              <a:ext uri="{FF2B5EF4-FFF2-40B4-BE49-F238E27FC236}">
-                <a16:creationId xmlns:a16="http://schemas.microsoft.com/office/drawing/2014/main" id="{E6CAB29D-25D9-AB3A-3450-01B99CF032D6}"/>
-              </a:ext>
-            </a:extLst>
-          </p:cNvPr>
-          <p:cNvSpPr>
-            <a:spLocks noGrp="1" noRot="1" noChangeAspect="1"/>
-          </p:cNvSpPr>
-          <p:nvPr>
-            <p:ph type="sldImg" idx="2"/>
-          </p:nvPr>
-        </p:nvSpPr>
-        <p:spPr/>
-      </p:sp>
-      <p:sp>
-        <p:nvSpPr>
-          <p:cNvPr id="3" name="Notes Placeholder 2">
-            <a:extLst>
-              <a:ext uri="{FF2B5EF4-FFF2-40B4-BE49-F238E27FC236}">
-                <a16:creationId xmlns:a16="http://schemas.microsoft.com/office/drawing/2014/main" id="{DF41B860-6C54-5A5B-DD4A-30854732357D}"/>
-              </a:ext>
-            </a:extLst>
-          </p:cNvPr>
-          <p:cNvSpPr>
-            <a:spLocks noGrp="1"/>
-          </p:cNvSpPr>
-          <p:nvPr>
-            <p:ph type="body" sz="quarter" idx="3"/>
-          </p:nvPr>
-        </p:nvSpPr>
-        <p:spPr/>
-        <p:txBody>
-          <a:bodyPr/>
-          <a:lstStyle/>
-          <a:p>
-            <a:r>
-              <a:rPr dirty="0"/>
-              <a:t>~2m : </a:t>
-            </a:r>
-            <a:r>
-              <a:rPr dirty="0" err="1"/>
-              <a:t>Expliquer</a:t>
-            </a:r>
-            <a:r>
-              <a:rPr dirty="0"/>
-              <a:t> </a:t>
-            </a:r>
-            <a:r>
-              <a:rPr lang="pt-BR" dirty="0"/>
-              <a:t>CRUD</a:t>
-            </a:r>
-            <a:r>
-              <a:rPr dirty="0"/>
-              <a:t>.</a:t>
-            </a:r>
-            <a:endParaRPr lang="pt-BR" dirty="0"/>
-          </a:p>
-          <a:p>
-            <a:endParaRPr lang="pt-BR" dirty="0"/>
-          </a:p>
-          <a:p>
-            <a:r>
-              <a:rPr lang="pt-BR" dirty="0" err="1"/>
-              <a:t>HandleRequest</a:t>
-            </a:r>
-            <a:r>
-              <a:rPr lang="pt-BR" dirty="0"/>
-              <a:t> : </a:t>
-            </a:r>
-            <a:r>
-              <a:rPr lang="fr-FR" dirty="0" err="1"/>
-              <a:t>Lê</a:t>
-            </a:r>
-            <a:r>
-              <a:rPr lang="fr-FR" dirty="0"/>
-              <a:t> os </a:t>
-            </a:r>
-            <a:r>
-              <a:rPr lang="fr-FR" dirty="0" err="1"/>
-              <a:t>dados</a:t>
-            </a:r>
-            <a:r>
-              <a:rPr lang="fr-FR" dirty="0"/>
-              <a:t> </a:t>
-            </a:r>
-            <a:r>
-              <a:rPr lang="fr-FR" dirty="0" err="1"/>
-              <a:t>enviados</a:t>
-            </a:r>
-            <a:r>
-              <a:rPr lang="fr-FR" dirty="0"/>
-              <a:t> pelo </a:t>
-            </a:r>
-            <a:r>
-              <a:rPr lang="fr-FR" dirty="0" err="1"/>
-              <a:t>usuário</a:t>
-            </a:r>
-            <a:r>
-              <a:rPr lang="fr-FR" dirty="0"/>
-              <a:t> na </a:t>
-            </a:r>
-            <a:r>
-              <a:rPr lang="fr-FR" dirty="0" err="1"/>
-              <a:t>requisição</a:t>
-            </a:r>
-            <a:r>
-              <a:rPr lang="fr-FR" dirty="0"/>
-              <a:t> HTTP e os </a:t>
-            </a:r>
-            <a:r>
-              <a:rPr lang="fr-FR" dirty="0" err="1"/>
-              <a:t>injeta</a:t>
-            </a:r>
-            <a:r>
-              <a:rPr lang="fr-FR" dirty="0"/>
-              <a:t> </a:t>
-            </a:r>
-            <a:r>
-              <a:rPr lang="fr-FR" dirty="0" err="1"/>
-              <a:t>dentro</a:t>
-            </a:r>
-            <a:r>
-              <a:rPr lang="fr-FR" dirty="0"/>
-              <a:t> do </a:t>
-            </a:r>
-            <a:r>
-              <a:rPr lang="fr-FR" dirty="0" err="1"/>
-              <a:t>formulário</a:t>
-            </a:r>
-            <a:r>
-              <a:rPr lang="fr-FR" dirty="0"/>
-              <a:t>.</a:t>
-            </a:r>
-          </a:p>
-          <a:p>
-            <a:r>
-              <a:rPr lang="fr-FR" dirty="0"/>
-              <a:t>O </a:t>
-            </a:r>
-            <a:r>
-              <a:rPr lang="fr-FR" dirty="0" err="1"/>
-              <a:t>código</a:t>
-            </a:r>
-            <a:r>
-              <a:rPr lang="fr-FR" dirty="0"/>
-              <a:t> HTTP </a:t>
-            </a:r>
-            <a:r>
-              <a:rPr lang="fr-FR" sz="1200" kern="1200" dirty="0" err="1">
-                <a:solidFill>
-                  <a:schemeClr val="tx1"/>
-                </a:solidFill>
-                <a:latin typeface="+mn-lt"/>
-                <a:ea typeface="+mn-ea"/>
-                <a:cs typeface="+mn-cs"/>
-              </a:rPr>
-              <a:t>Response</a:t>
-            </a:r>
-            <a:r>
-              <a:rPr lang="fr-FR" sz="1200" kern="1200" dirty="0">
-                <a:solidFill>
-                  <a:schemeClr val="tx1"/>
-                </a:solidFill>
-                <a:latin typeface="+mn-lt"/>
-                <a:ea typeface="+mn-ea"/>
-                <a:cs typeface="+mn-cs"/>
-              </a:rPr>
-              <a:t>::HTTP_SEE_OTHER</a:t>
-            </a:r>
-            <a:r>
-              <a:rPr lang="fr-FR" dirty="0"/>
-              <a:t> (</a:t>
-            </a:r>
-            <a:r>
-              <a:rPr lang="fr-FR" dirty="0" err="1"/>
-              <a:t>código</a:t>
-            </a:r>
-            <a:r>
-              <a:rPr lang="fr-FR" dirty="0"/>
-              <a:t> 303) garante que a </a:t>
-            </a:r>
-            <a:r>
-              <a:rPr lang="fr-FR" dirty="0" err="1"/>
-              <a:t>requisição</a:t>
-            </a:r>
-            <a:r>
-              <a:rPr lang="fr-FR" dirty="0"/>
-              <a:t> de </a:t>
-            </a:r>
-            <a:r>
-              <a:rPr lang="fr-FR" dirty="0" err="1"/>
-              <a:t>redirecionamento</a:t>
-            </a:r>
-            <a:r>
-              <a:rPr lang="fr-FR" dirty="0"/>
-              <a:t> mude </a:t>
-            </a:r>
-            <a:r>
-              <a:rPr lang="fr-FR" dirty="0" err="1"/>
-              <a:t>corretamente</a:t>
-            </a:r>
-            <a:r>
-              <a:rPr lang="fr-FR" dirty="0"/>
-              <a:t> para </a:t>
-            </a:r>
-            <a:r>
-              <a:rPr lang="fr-FR" sz="1200" kern="1200" dirty="0">
-                <a:solidFill>
-                  <a:schemeClr val="tx1"/>
-                </a:solidFill>
-                <a:latin typeface="+mn-lt"/>
-                <a:ea typeface="+mn-ea"/>
-                <a:cs typeface="+mn-cs"/>
-              </a:rPr>
-              <a:t>GET</a:t>
-            </a:r>
-            <a:r>
-              <a:rPr lang="fr-FR" dirty="0"/>
-              <a:t>.</a:t>
-            </a:r>
-          </a:p>
-          <a:p>
-            <a:endParaRPr lang="fr-FR" sz="1200" kern="1200" dirty="0">
-              <a:solidFill>
-                <a:schemeClr val="tx1"/>
-              </a:solidFill>
-              <a:latin typeface="+mn-lt"/>
-              <a:ea typeface="+mn-ea"/>
-              <a:cs typeface="+mn-cs"/>
-            </a:endParaRPr>
-          </a:p>
-          <a:p>
-            <a:r>
-              <a:rPr lang="fr-FR" sz="1200" kern="1200" dirty="0" err="1">
-                <a:solidFill>
-                  <a:schemeClr val="tx1"/>
-                </a:solidFill>
-                <a:latin typeface="+mn-lt"/>
-                <a:ea typeface="+mn-ea"/>
-                <a:cs typeface="+mn-cs"/>
-              </a:rPr>
-              <a:t>isCsrfTokenValid</a:t>
-            </a:r>
-            <a:r>
-              <a:rPr lang="fr-FR" sz="1200" kern="1200" dirty="0">
-                <a:solidFill>
-                  <a:schemeClr val="tx1"/>
-                </a:solidFill>
-                <a:latin typeface="+mn-lt"/>
-                <a:ea typeface="+mn-ea"/>
-                <a:cs typeface="+mn-cs"/>
-              </a:rPr>
-              <a:t>(...)</a:t>
-            </a:r>
-            <a:r>
-              <a:rPr lang="fr-FR" dirty="0"/>
-              <a:t>: Compara o </a:t>
-            </a:r>
-            <a:r>
-              <a:rPr lang="fr-FR" dirty="0" err="1"/>
-              <a:t>token</a:t>
-            </a:r>
-            <a:r>
-              <a:rPr lang="fr-FR" dirty="0"/>
-              <a:t> </a:t>
-            </a:r>
-            <a:r>
-              <a:rPr lang="fr-FR" dirty="0" err="1"/>
-              <a:t>enviado</a:t>
-            </a:r>
-            <a:r>
-              <a:rPr lang="fr-FR" dirty="0"/>
-              <a:t> com o </a:t>
-            </a:r>
-            <a:r>
-              <a:rPr lang="fr-FR" dirty="0" err="1"/>
-              <a:t>token</a:t>
-            </a:r>
-            <a:r>
-              <a:rPr lang="fr-FR" dirty="0"/>
-              <a:t> </a:t>
-            </a:r>
-            <a:r>
-              <a:rPr lang="fr-FR" dirty="0" err="1"/>
-              <a:t>gerado</a:t>
-            </a:r>
-            <a:r>
-              <a:rPr lang="fr-FR" dirty="0"/>
-              <a:t> pelo </a:t>
-            </a:r>
-            <a:r>
-              <a:rPr lang="fr-FR" dirty="0" err="1"/>
-              <a:t>servidor</a:t>
-            </a:r>
-            <a:r>
-              <a:rPr lang="fr-FR" dirty="0"/>
-              <a:t> para </a:t>
-            </a:r>
-            <a:r>
-              <a:rPr lang="fr-FR" dirty="0" err="1"/>
-              <a:t>aquela</a:t>
-            </a:r>
-            <a:r>
-              <a:rPr lang="fr-FR" dirty="0"/>
-              <a:t> </a:t>
-            </a:r>
-            <a:r>
-              <a:rPr lang="fr-FR" dirty="0" err="1"/>
-              <a:t>ação</a:t>
-            </a:r>
-            <a:r>
-              <a:rPr lang="fr-FR" dirty="0"/>
-              <a:t> </a:t>
-            </a:r>
-            <a:r>
-              <a:rPr lang="fr-FR" dirty="0" err="1"/>
-              <a:t>específica</a:t>
-            </a:r>
-            <a:r>
-              <a:rPr lang="fr-FR" dirty="0"/>
-              <a:t>.</a:t>
-            </a:r>
-          </a:p>
-          <a:p>
-            <a:r>
-              <a:rPr lang="fr-FR" dirty="0"/>
-              <a:t>O </a:t>
-            </a:r>
-            <a:r>
-              <a:rPr lang="fr-FR" dirty="0" err="1"/>
-              <a:t>identificador</a:t>
-            </a:r>
-            <a:r>
-              <a:rPr lang="fr-FR" dirty="0"/>
-              <a:t> </a:t>
-            </a:r>
-            <a:r>
-              <a:rPr lang="fr-FR" dirty="0" err="1"/>
-              <a:t>único</a:t>
-            </a:r>
-            <a:r>
-              <a:rPr lang="fr-FR" dirty="0"/>
-              <a:t> do </a:t>
-            </a:r>
-            <a:r>
-              <a:rPr lang="fr-FR" dirty="0" err="1"/>
-              <a:t>token</a:t>
-            </a:r>
-            <a:r>
-              <a:rPr lang="fr-FR" dirty="0"/>
-              <a:t> é composto pela string </a:t>
-            </a:r>
-            <a:r>
-              <a:rPr lang="fr-FR" sz="1200" kern="1200" dirty="0">
-                <a:solidFill>
-                  <a:schemeClr val="tx1"/>
-                </a:solidFill>
-                <a:latin typeface="+mn-lt"/>
-                <a:ea typeface="+mn-ea"/>
-                <a:cs typeface="+mn-cs"/>
-              </a:rPr>
-              <a:t>'</a:t>
-            </a:r>
-            <a:r>
-              <a:rPr lang="fr-FR" sz="1200" kern="1200" dirty="0" err="1">
-                <a:solidFill>
-                  <a:schemeClr val="tx1"/>
-                </a:solidFill>
-                <a:latin typeface="+mn-lt"/>
-                <a:ea typeface="+mn-ea"/>
-                <a:cs typeface="+mn-cs"/>
-              </a:rPr>
-              <a:t>delete</a:t>
-            </a:r>
-            <a:r>
-              <a:rPr lang="fr-FR" sz="1200" kern="1200" dirty="0">
-                <a:solidFill>
-                  <a:schemeClr val="tx1"/>
-                </a:solidFill>
-                <a:latin typeface="+mn-lt"/>
-                <a:ea typeface="+mn-ea"/>
-                <a:cs typeface="+mn-cs"/>
-              </a:rPr>
-              <a:t>'</a:t>
-            </a:r>
-            <a:r>
-              <a:rPr lang="fr-FR" dirty="0"/>
-              <a:t> </a:t>
-            </a:r>
-            <a:r>
-              <a:rPr lang="fr-FR" dirty="0" err="1"/>
-              <a:t>concatenada</a:t>
-            </a:r>
-            <a:r>
-              <a:rPr lang="fr-FR" dirty="0"/>
-              <a:t> com o ID da </a:t>
-            </a:r>
-            <a:r>
-              <a:rPr lang="fr-FR" dirty="0" err="1"/>
-              <a:t>avaliação</a:t>
-            </a:r>
-            <a:r>
-              <a:rPr lang="fr-FR" dirty="0"/>
-              <a:t> (</a:t>
-            </a:r>
-            <a:r>
-              <a:rPr lang="fr-FR" sz="1200" kern="1200" dirty="0">
-                <a:solidFill>
-                  <a:schemeClr val="tx1"/>
-                </a:solidFill>
-                <a:latin typeface="+mn-lt"/>
-                <a:ea typeface="+mn-ea"/>
-                <a:cs typeface="+mn-cs"/>
-              </a:rPr>
-              <a:t>$</a:t>
-            </a:r>
-            <a:r>
-              <a:rPr lang="fr-FR" sz="1200" kern="1200" dirty="0" err="1">
-                <a:solidFill>
-                  <a:schemeClr val="tx1"/>
-                </a:solidFill>
-                <a:latin typeface="+mn-lt"/>
-                <a:ea typeface="+mn-ea"/>
-                <a:cs typeface="+mn-cs"/>
-              </a:rPr>
-              <a:t>review</a:t>
-            </a:r>
-            <a:r>
-              <a:rPr lang="fr-FR" sz="1200" kern="1200" dirty="0">
-                <a:solidFill>
-                  <a:schemeClr val="tx1"/>
-                </a:solidFill>
-                <a:latin typeface="+mn-lt"/>
-                <a:ea typeface="+mn-ea"/>
-                <a:cs typeface="+mn-cs"/>
-              </a:rPr>
-              <a:t>-&gt;</a:t>
-            </a:r>
-            <a:r>
-              <a:rPr lang="fr-FR" sz="1200" kern="1200" dirty="0" err="1">
-                <a:solidFill>
-                  <a:schemeClr val="tx1"/>
-                </a:solidFill>
-                <a:latin typeface="+mn-lt"/>
-                <a:ea typeface="+mn-ea"/>
-                <a:cs typeface="+mn-cs"/>
-              </a:rPr>
-              <a:t>getId</a:t>
-            </a:r>
-            <a:r>
-              <a:rPr lang="fr-FR" sz="1200" kern="1200" dirty="0">
-                <a:solidFill>
-                  <a:schemeClr val="tx1"/>
-                </a:solidFill>
-                <a:latin typeface="+mn-lt"/>
-                <a:ea typeface="+mn-ea"/>
-                <a:cs typeface="+mn-cs"/>
-              </a:rPr>
-              <a:t>()</a:t>
-            </a:r>
-            <a:r>
-              <a:rPr lang="fr-FR" dirty="0"/>
-              <a:t>).</a:t>
-            </a:r>
-          </a:p>
-          <a:p>
-            <a:r>
-              <a:rPr lang="fr-FR" sz="1200" kern="1200" dirty="0">
-                <a:solidFill>
-                  <a:schemeClr val="tx1"/>
-                </a:solidFill>
-                <a:latin typeface="+mn-lt"/>
-                <a:ea typeface="+mn-ea"/>
-                <a:cs typeface="+mn-cs"/>
-              </a:rPr>
-              <a:t>$</a:t>
-            </a:r>
-            <a:r>
-              <a:rPr lang="fr-FR" sz="1200" kern="1200" dirty="0" err="1">
-                <a:solidFill>
-                  <a:schemeClr val="tx1"/>
-                </a:solidFill>
-                <a:latin typeface="+mn-lt"/>
-                <a:ea typeface="+mn-ea"/>
-                <a:cs typeface="+mn-cs"/>
-              </a:rPr>
-              <a:t>request</a:t>
-            </a:r>
-            <a:r>
-              <a:rPr lang="fr-FR" sz="1200" kern="1200" dirty="0">
-                <a:solidFill>
-                  <a:schemeClr val="tx1"/>
-                </a:solidFill>
-                <a:latin typeface="+mn-lt"/>
-                <a:ea typeface="+mn-ea"/>
-                <a:cs typeface="+mn-cs"/>
-              </a:rPr>
-              <a:t>-&gt;</a:t>
-            </a:r>
-            <a:r>
-              <a:rPr lang="fr-FR" sz="1200" kern="1200" dirty="0" err="1">
-                <a:solidFill>
-                  <a:schemeClr val="tx1"/>
-                </a:solidFill>
-                <a:latin typeface="+mn-lt"/>
-                <a:ea typeface="+mn-ea"/>
-                <a:cs typeface="+mn-cs"/>
-              </a:rPr>
-              <a:t>getPayload</a:t>
-            </a:r>
-            <a:r>
-              <a:rPr lang="fr-FR" sz="1200" kern="1200" dirty="0">
-                <a:solidFill>
-                  <a:schemeClr val="tx1"/>
-                </a:solidFill>
-                <a:latin typeface="+mn-lt"/>
-                <a:ea typeface="+mn-ea"/>
-                <a:cs typeface="+mn-cs"/>
-              </a:rPr>
-              <a:t>()-&gt;</a:t>
-            </a:r>
-            <a:r>
-              <a:rPr lang="fr-FR" sz="1200" kern="1200" dirty="0" err="1">
-                <a:solidFill>
-                  <a:schemeClr val="tx1"/>
-                </a:solidFill>
-                <a:latin typeface="+mn-lt"/>
-                <a:ea typeface="+mn-ea"/>
-                <a:cs typeface="+mn-cs"/>
-              </a:rPr>
-              <a:t>getString</a:t>
-            </a:r>
-            <a:r>
-              <a:rPr lang="fr-FR" sz="1200" kern="1200" dirty="0">
-                <a:solidFill>
-                  <a:schemeClr val="tx1"/>
-                </a:solidFill>
-                <a:latin typeface="+mn-lt"/>
-                <a:ea typeface="+mn-ea"/>
-                <a:cs typeface="+mn-cs"/>
-              </a:rPr>
-              <a:t>('_</a:t>
-            </a:r>
-            <a:r>
-              <a:rPr lang="fr-FR" sz="1200" kern="1200" dirty="0" err="1">
-                <a:solidFill>
-                  <a:schemeClr val="tx1"/>
-                </a:solidFill>
-                <a:latin typeface="+mn-lt"/>
-                <a:ea typeface="+mn-ea"/>
-                <a:cs typeface="+mn-cs"/>
-              </a:rPr>
-              <a:t>token</a:t>
-            </a:r>
-            <a:r>
-              <a:rPr lang="fr-FR" sz="1200" kern="1200" dirty="0">
-                <a:solidFill>
-                  <a:schemeClr val="tx1"/>
-                </a:solidFill>
-                <a:latin typeface="+mn-lt"/>
-                <a:ea typeface="+mn-ea"/>
-                <a:cs typeface="+mn-cs"/>
-              </a:rPr>
-              <a:t>')</a:t>
-            </a:r>
-            <a:r>
-              <a:rPr lang="fr-FR" dirty="0"/>
-              <a:t>: Busca de forma </a:t>
-            </a:r>
-            <a:r>
-              <a:rPr lang="fr-FR" dirty="0" err="1"/>
-              <a:t>segura</a:t>
-            </a:r>
-            <a:r>
-              <a:rPr lang="fr-FR" dirty="0"/>
-              <a:t> o </a:t>
-            </a:r>
-            <a:r>
-              <a:rPr lang="fr-FR" dirty="0" err="1"/>
-              <a:t>valor</a:t>
-            </a:r>
-            <a:r>
-              <a:rPr lang="fr-FR" dirty="0"/>
-              <a:t> do campo </a:t>
-            </a:r>
-            <a:r>
-              <a:rPr lang="fr-FR" dirty="0" err="1"/>
-              <a:t>oculto</a:t>
-            </a:r>
-            <a:r>
-              <a:rPr lang="fr-FR" dirty="0"/>
-              <a:t> </a:t>
-            </a:r>
-            <a:r>
-              <a:rPr lang="fr-FR" sz="1200" kern="1200" dirty="0">
-                <a:solidFill>
-                  <a:schemeClr val="tx1"/>
-                </a:solidFill>
-                <a:latin typeface="+mn-lt"/>
-                <a:ea typeface="+mn-ea"/>
-                <a:cs typeface="+mn-cs"/>
-              </a:rPr>
-              <a:t>_</a:t>
-            </a:r>
-            <a:r>
-              <a:rPr lang="fr-FR" sz="1200" kern="1200" dirty="0" err="1">
-                <a:solidFill>
-                  <a:schemeClr val="tx1"/>
-                </a:solidFill>
-                <a:latin typeface="+mn-lt"/>
-                <a:ea typeface="+mn-ea"/>
-                <a:cs typeface="+mn-cs"/>
-              </a:rPr>
-              <a:t>token</a:t>
-            </a:r>
-            <a:r>
-              <a:rPr lang="fr-FR" dirty="0"/>
-              <a:t> </a:t>
-            </a:r>
-            <a:r>
-              <a:rPr lang="fr-FR" dirty="0" err="1"/>
-              <a:t>enviado</a:t>
-            </a:r>
-            <a:r>
-              <a:rPr lang="fr-FR" dirty="0"/>
-              <a:t> </a:t>
-            </a:r>
-            <a:r>
-              <a:rPr lang="fr-FR" dirty="0" err="1"/>
-              <a:t>dentro</a:t>
-            </a:r>
-            <a:r>
-              <a:rPr lang="fr-FR" dirty="0"/>
-              <a:t> do </a:t>
-            </a:r>
-            <a:r>
-              <a:rPr lang="fr-FR" dirty="0" err="1"/>
-              <a:t>payload</a:t>
-            </a:r>
-            <a:r>
-              <a:rPr lang="fr-FR" dirty="0"/>
-              <a:t> da </a:t>
-            </a:r>
-            <a:r>
-              <a:rPr lang="fr-FR" dirty="0" err="1"/>
-              <a:t>requisição</a:t>
-            </a:r>
-            <a:r>
-              <a:rPr lang="fr-FR" dirty="0"/>
-              <a:t> POST.</a:t>
-            </a:r>
-          </a:p>
-          <a:p>
-            <a:pPr lvl="0"/>
-            <a:r>
-              <a:rPr lang="fr-FR" dirty="0" err="1"/>
-              <a:t>evitar</a:t>
-            </a:r>
-            <a:r>
-              <a:rPr lang="fr-FR" dirty="0"/>
-              <a:t> </a:t>
-            </a:r>
-            <a:r>
-              <a:rPr lang="fr-FR" dirty="0" err="1"/>
-              <a:t>ataques</a:t>
-            </a:r>
-            <a:r>
-              <a:rPr lang="fr-FR" dirty="0"/>
-              <a:t> de </a:t>
-            </a:r>
-            <a:r>
-              <a:rPr lang="fr-FR" i="1" dirty="0"/>
-              <a:t>Cross-Site </a:t>
-            </a:r>
-            <a:r>
-              <a:rPr lang="fr-FR" i="1" dirty="0" err="1"/>
-              <a:t>Request</a:t>
-            </a:r>
-            <a:r>
-              <a:rPr lang="fr-FR" i="1" dirty="0"/>
-              <a:t> </a:t>
-            </a:r>
-            <a:r>
-              <a:rPr lang="fr-FR" i="1" dirty="0" err="1"/>
-              <a:t>Forgery</a:t>
-            </a:r>
-            <a:r>
-              <a:rPr lang="fr-FR" i="1" dirty="0"/>
-              <a:t> (CSRF)</a:t>
-            </a:r>
-            <a:r>
-              <a:rPr lang="fr-FR" dirty="0"/>
-              <a:t>, </a:t>
-            </a:r>
-            <a:r>
-              <a:rPr lang="fr-FR" dirty="0" err="1"/>
-              <a:t>garantindo</a:t>
-            </a:r>
-            <a:r>
-              <a:rPr lang="fr-FR" dirty="0"/>
-              <a:t> que a </a:t>
-            </a:r>
-            <a:r>
-              <a:rPr lang="fr-FR" dirty="0" err="1"/>
-              <a:t>solicitação</a:t>
-            </a:r>
-            <a:r>
-              <a:rPr lang="fr-FR" dirty="0"/>
-              <a:t> de </a:t>
-            </a:r>
-            <a:r>
-              <a:rPr lang="fr-FR" dirty="0" err="1"/>
-              <a:t>exclusão</a:t>
-            </a:r>
-            <a:r>
-              <a:rPr lang="fr-FR" dirty="0"/>
-              <a:t> </a:t>
-            </a:r>
-            <a:r>
-              <a:rPr lang="fr-FR" dirty="0" err="1"/>
-              <a:t>realmente</a:t>
-            </a:r>
-            <a:r>
-              <a:rPr lang="fr-FR" dirty="0"/>
-              <a:t> </a:t>
-            </a:r>
-            <a:r>
-              <a:rPr lang="fr-FR" dirty="0" err="1"/>
-              <a:t>veio</a:t>
-            </a:r>
-            <a:r>
-              <a:rPr lang="fr-FR" dirty="0"/>
-              <a:t> do </a:t>
-            </a:r>
-            <a:r>
-              <a:rPr lang="fr-FR" dirty="0" err="1"/>
-              <a:t>nosso</a:t>
-            </a:r>
-            <a:r>
-              <a:rPr lang="fr-FR" dirty="0"/>
-              <a:t> site/</a:t>
-            </a:r>
-            <a:r>
-              <a:rPr lang="fr-FR" dirty="0" err="1"/>
-              <a:t>sistema</a:t>
-            </a:r>
-            <a:r>
-              <a:rPr lang="fr-FR" dirty="0"/>
-              <a:t> e </a:t>
-            </a:r>
-            <a:r>
-              <a:rPr lang="fr-FR" dirty="0" err="1"/>
-              <a:t>não</a:t>
-            </a:r>
-            <a:r>
-              <a:rPr lang="fr-FR" dirty="0"/>
-              <a:t> de um site </a:t>
-            </a:r>
-            <a:r>
-              <a:rPr lang="fr-FR" dirty="0" err="1"/>
-              <a:t>malicioso</a:t>
-            </a:r>
-            <a:r>
-              <a:rPr lang="fr-FR" dirty="0"/>
-              <a:t> </a:t>
-            </a:r>
-            <a:r>
-              <a:rPr lang="fr-FR" dirty="0" err="1"/>
-              <a:t>externo</a:t>
-            </a:r>
-            <a:r>
-              <a:rPr lang="fr-FR" dirty="0"/>
-              <a:t> </a:t>
-            </a:r>
-            <a:r>
-              <a:rPr lang="fr-FR" dirty="0" err="1"/>
-              <a:t>tentando</a:t>
-            </a:r>
-            <a:r>
-              <a:rPr lang="fr-FR" dirty="0"/>
-              <a:t> </a:t>
-            </a:r>
-            <a:r>
-              <a:rPr lang="fr-FR" dirty="0" err="1"/>
-              <a:t>forçar</a:t>
-            </a:r>
-            <a:r>
-              <a:rPr lang="fr-FR" dirty="0"/>
-              <a:t> a </a:t>
-            </a:r>
-            <a:r>
-              <a:rPr lang="fr-FR" dirty="0" err="1"/>
-              <a:t>ação</a:t>
-            </a:r>
-            <a:r>
-              <a:rPr lang="fr-FR" dirty="0"/>
-              <a:t>.</a:t>
-            </a:r>
-          </a:p>
-          <a:p>
-            <a:endParaRPr dirty="0"/>
-          </a:p>
-        </p:txBody>
-      </p:sp>
-      <p:sp>
-        <p:nvSpPr>
-          <p:cNvPr id="4" name="Slide Number Placeholder 3">
-            <a:extLst>
-              <a:ext uri="{FF2B5EF4-FFF2-40B4-BE49-F238E27FC236}">
-                <a16:creationId xmlns:a16="http://schemas.microsoft.com/office/drawing/2014/main" id="{AC714190-D623-97D1-4157-043DF7878153}"/>
-              </a:ext>
-            </a:extLst>
-          </p:cNvPr>
-          <p:cNvSpPr>
-            <a:spLocks noGrp="1"/>
-          </p:cNvSpPr>
-          <p:nvPr>
-            <p:ph type="sldNum" sz="quarter" idx="5"/>
-          </p:nvPr>
-        </p:nvSpPr>
-        <p:spPr/>
-      </p:sp>
-    </p:spTree>
-    <p:extLst>
-      <p:ext uri="{BB962C8B-B14F-4D97-AF65-F5344CB8AC3E}">
-        <p14:creationId xmlns:p14="http://schemas.microsoft.com/office/powerpoint/2010/main" val="560285634"/>
-      </p:ext>
-    </p:extLst>
   </p:cSld>
   <p:clrMapOvr>
     <a:masterClrMapping/>
@@ -1632,28 +879,106 @@
           <a:p>
             <a:r>
               <a:rPr dirty="0"/>
-              <a:t>~1m : Forms, Security et Mailer.</a:t>
+              <a:t>~1m30 : </a:t>
+            </a:r>
+            <a:r>
+              <a:rPr dirty="0" err="1"/>
+              <a:t>Montrer</a:t>
+            </a:r>
+            <a:r>
+              <a:rPr dirty="0"/>
+              <a:t> Repository → Doctrine → SQL.</a:t>
             </a:r>
             <a:endParaRPr lang="pt-BR" dirty="0"/>
           </a:p>
           <a:p>
             <a:r>
               <a:rPr lang="fr-FR" dirty="0"/>
-              <a:t>Symfony me permet également de gérer les formulaires.</a:t>
+              <a:t>Un point important dans mon projet est l'utilisation de Doctrine.</a:t>
             </a:r>
           </a:p>
           <a:p>
             <a:r>
               <a:rPr lang="fr-FR" dirty="0"/>
-              <a:t>J'utilise des classes </a:t>
+              <a:t>Le </a:t>
             </a:r>
             <a:r>
               <a:rPr lang="fr-FR" dirty="0" err="1"/>
-              <a:t>FormType</a:t>
+              <a:t>controller</a:t>
             </a:r>
             <a:r>
               <a:rPr lang="fr-FR" dirty="0"/>
-              <a:t> pour la création d'utilisateurs, les demandes de devis, les avis et les formulaires d'administration.</a:t>
+              <a:t> ne communique pas directement avec </a:t>
+            </a:r>
+            <a:r>
+              <a:rPr lang="fr-FR" dirty="0" err="1"/>
+              <a:t>MariaDB</a:t>
+            </a:r>
+            <a:r>
+              <a:rPr lang="fr-FR" dirty="0"/>
+              <a:t>.</a:t>
+            </a:r>
+          </a:p>
+          <a:p>
+            <a:r>
+              <a:rPr lang="fr-FR" dirty="0"/>
+              <a:t>Il utilise un repository.</a:t>
+            </a:r>
+          </a:p>
+          <a:p>
+            <a:r>
+              <a:rPr lang="fr-FR" dirty="0"/>
+              <a:t>Dans le repository, je peux utiliser les méthodes fournies par Doctrine ou construire des requêtes plus spécifiques avec </a:t>
+            </a:r>
+            <a:r>
+              <a:rPr lang="fr-FR" dirty="0" err="1"/>
+              <a:t>QueryBuilder</a:t>
+            </a:r>
+            <a:r>
+              <a:rPr lang="fr-FR" dirty="0"/>
+              <a:t> et DQL.</a:t>
+            </a:r>
+          </a:p>
+          <a:p>
+            <a:r>
+              <a:rPr lang="fr-FR" dirty="0"/>
+              <a:t>Doctrine traduit ensuite cette logique en SQL compatible avec la base de données.</a:t>
+            </a:r>
+          </a:p>
+          <a:p>
+            <a:r>
+              <a:rPr lang="fr-FR" dirty="0"/>
+              <a:t>Par exemple, j'ai une méthode personnalisée « </a:t>
+            </a:r>
+            <a:r>
+              <a:rPr lang="fr-FR" dirty="0" err="1"/>
+              <a:t>findLatestApproved</a:t>
+            </a:r>
+            <a:r>
+              <a:rPr lang="fr-FR" dirty="0"/>
+              <a:t> » dans </a:t>
+            </a:r>
+            <a:r>
+              <a:rPr lang="fr-FR" dirty="0" err="1"/>
+              <a:t>ReviewRepository</a:t>
+            </a:r>
+            <a:r>
+              <a:rPr lang="fr-FR" dirty="0"/>
+              <a:t> pour récupérer les 6 dernières avis.</a:t>
+            </a:r>
+          </a:p>
+          <a:p>
+            <a:r>
+              <a:rPr lang="fr-FR" dirty="0"/>
+              <a:t>Cela permet de garder la logique d'accès aux données dans le repository plutôt que de mettre directement les requêtes dans le </a:t>
+            </a:r>
+            <a:r>
+              <a:rPr lang="fr-FR" dirty="0" err="1"/>
+              <a:t>controller</a:t>
+            </a:r>
+            <a:r>
+              <a:rPr lang="fr-FR" dirty="0"/>
+              <a:t>.</a:t>
             </a:r>
           </a:p>
           <a:p>
@@ -1689,7 +1014,7 @@
         <p:cNvPr id="1" name="">
           <a:extLst>
             <a:ext uri="{FF2B5EF4-FFF2-40B4-BE49-F238E27FC236}">
-              <a16:creationId xmlns:a16="http://schemas.microsoft.com/office/drawing/2014/main" id="{F7561664-256E-100F-1E97-40212D33EA46}"/>
+              <a16:creationId xmlns:a16="http://schemas.microsoft.com/office/drawing/2014/main" id="{B0BE95BA-2664-B704-434A-81C247A4D922}"/>
             </a:ext>
           </a:extLst>
         </p:cNvPr>
@@ -1709,7 +1034,7 @@
           <p:cNvPr id="2" name="Slide Image Placeholder 1">
             <a:extLst>
               <a:ext uri="{FF2B5EF4-FFF2-40B4-BE49-F238E27FC236}">
-                <a16:creationId xmlns:a16="http://schemas.microsoft.com/office/drawing/2014/main" id="{94CFDC0A-4B0D-09F9-86D9-ECEA885D33CE}"/>
+                <a16:creationId xmlns:a16="http://schemas.microsoft.com/office/drawing/2014/main" id="{E6CAB29D-25D9-AB3A-3450-01B99CF032D6}"/>
               </a:ext>
             </a:extLst>
           </p:cNvPr>
@@ -1727,7 +1052,7 @@
           <p:cNvPr id="3" name="Notes Placeholder 2">
             <a:extLst>
               <a:ext uri="{FF2B5EF4-FFF2-40B4-BE49-F238E27FC236}">
-                <a16:creationId xmlns:a16="http://schemas.microsoft.com/office/drawing/2014/main" id="{29ABE0F3-864D-5B80-DD18-11119F175421}"/>
+                <a16:creationId xmlns:a16="http://schemas.microsoft.com/office/drawing/2014/main" id="{DF41B860-6C54-5A5B-DD4A-30854732357D}"/>
               </a:ext>
             </a:extLst>
           </p:cNvPr>
@@ -1745,28 +1070,766 @@
           <a:p>
             <a:r>
               <a:rPr dirty="0"/>
-              <a:t>~1m : Forms, Security et Mailer.</a:t>
+              <a:t>~2m : </a:t>
+            </a:r>
+            <a:r>
+              <a:rPr dirty="0" err="1"/>
+              <a:t>Expliquer</a:t>
+            </a:r>
+            <a:r>
+              <a:rPr dirty="0"/>
+              <a:t> </a:t>
+            </a:r>
+            <a:r>
+              <a:rPr lang="pt-BR" dirty="0"/>
+              <a:t>CRUD</a:t>
+            </a:r>
+            <a:r>
+              <a:rPr dirty="0"/>
+              <a:t>.</a:t>
             </a:r>
             <a:endParaRPr lang="pt-BR" dirty="0"/>
           </a:p>
           <a:p>
+            <a:endParaRPr lang="pt-BR" dirty="0"/>
+          </a:p>
+          <a:p>
+            <a:r>
+              <a:rPr lang="pt-BR" dirty="0" err="1"/>
+              <a:t>HandleRequest</a:t>
+            </a:r>
+            <a:r>
+              <a:rPr lang="pt-BR" dirty="0"/>
+              <a:t> : </a:t>
+            </a:r>
+            <a:r>
+              <a:rPr lang="fr-FR" dirty="0" err="1"/>
+              <a:t>Lê</a:t>
+            </a:r>
             <a:r>
               <a:rPr lang="fr-FR" dirty="0"/>
-              <a:t>La sécurité est gérée avec le composant Security de Symfony.</a:t>
-            </a:r>
-          </a:p>
-          <a:p>
+              <a:t> os </a:t>
+            </a:r>
+            <a:r>
+              <a:rPr lang="fr-FR" dirty="0" err="1"/>
+              <a:t>dados</a:t>
+            </a:r>
             <a:r>
               <a:rPr lang="fr-FR" dirty="0"/>
-              <a:t>Les mots de passe ne sont pas stockés en clair : ils sont </a:t>
+              <a:t> </a:t>
             </a:r>
             <a:r>
               <a:rPr lang="fr-FR" dirty="0" err="1"/>
-              <a:t>hashés</a:t>
+              <a:t>enviados</a:t>
             </a:r>
             <a:r>
               <a:rPr lang="fr-FR" dirty="0"/>
-              <a:t> avant d'être enregistrés.</a:t>
+              <a:t> pelo </a:t>
+            </a:r>
+            <a:r>
+              <a:rPr lang="fr-FR" dirty="0" err="1"/>
+              <a:t>usuário</a:t>
+            </a:r>
+            <a:r>
+              <a:rPr lang="fr-FR" dirty="0"/>
+              <a:t> na </a:t>
+            </a:r>
+            <a:r>
+              <a:rPr lang="fr-FR" dirty="0" err="1"/>
+              <a:t>requisição</a:t>
+            </a:r>
+            <a:r>
+              <a:rPr lang="fr-FR" dirty="0"/>
+              <a:t> HTTP e os </a:t>
+            </a:r>
+            <a:r>
+              <a:rPr lang="fr-FR" dirty="0" err="1"/>
+              <a:t>injeta</a:t>
+            </a:r>
+            <a:r>
+              <a:rPr lang="fr-FR" dirty="0"/>
+              <a:t> </a:t>
+            </a:r>
+            <a:r>
+              <a:rPr lang="fr-FR" dirty="0" err="1"/>
+              <a:t>dentro</a:t>
+            </a:r>
+            <a:r>
+              <a:rPr lang="fr-FR" dirty="0"/>
+              <a:t> do </a:t>
+            </a:r>
+            <a:r>
+              <a:rPr lang="fr-FR" dirty="0" err="1"/>
+              <a:t>formulário</a:t>
+            </a:r>
+            <a:r>
+              <a:rPr lang="fr-FR" dirty="0"/>
+              <a:t>.</a:t>
+            </a:r>
+          </a:p>
+          <a:p>
+            <a:r>
+              <a:rPr lang="fr-FR" dirty="0"/>
+              <a:t>O </a:t>
+            </a:r>
+            <a:r>
+              <a:rPr lang="fr-FR" dirty="0" err="1"/>
+              <a:t>código</a:t>
+            </a:r>
+            <a:r>
+              <a:rPr lang="fr-FR" dirty="0"/>
+              <a:t> HTTP </a:t>
+            </a:r>
+            <a:r>
+              <a:rPr lang="fr-FR" sz="1200" kern="1200" dirty="0" err="1">
+                <a:solidFill>
+                  <a:schemeClr val="tx1"/>
+                </a:solidFill>
+                <a:latin typeface="+mn-lt"/>
+                <a:ea typeface="+mn-ea"/>
+                <a:cs typeface="+mn-cs"/>
+              </a:rPr>
+              <a:t>Response</a:t>
+            </a:r>
+            <a:r>
+              <a:rPr lang="fr-FR" sz="1200" kern="1200" dirty="0">
+                <a:solidFill>
+                  <a:schemeClr val="tx1"/>
+                </a:solidFill>
+                <a:latin typeface="+mn-lt"/>
+                <a:ea typeface="+mn-ea"/>
+                <a:cs typeface="+mn-cs"/>
+              </a:rPr>
+              <a:t>::HTTP_SEE_OTHER</a:t>
+            </a:r>
+            <a:r>
+              <a:rPr lang="fr-FR" dirty="0"/>
+              <a:t> (</a:t>
+            </a:r>
+            <a:r>
+              <a:rPr lang="fr-FR" dirty="0" err="1"/>
+              <a:t>código</a:t>
+            </a:r>
+            <a:r>
+              <a:rPr lang="fr-FR" dirty="0"/>
+              <a:t> 303) garante que a </a:t>
+            </a:r>
+            <a:r>
+              <a:rPr lang="fr-FR" dirty="0" err="1"/>
+              <a:t>requisição</a:t>
+            </a:r>
+            <a:r>
+              <a:rPr lang="fr-FR" dirty="0"/>
+              <a:t> de </a:t>
+            </a:r>
+            <a:r>
+              <a:rPr lang="fr-FR" dirty="0" err="1"/>
+              <a:t>redirecionamento</a:t>
+            </a:r>
+            <a:r>
+              <a:rPr lang="fr-FR" dirty="0"/>
+              <a:t> mude </a:t>
+            </a:r>
+            <a:r>
+              <a:rPr lang="fr-FR" dirty="0" err="1"/>
+              <a:t>corretamente</a:t>
+            </a:r>
+            <a:r>
+              <a:rPr lang="fr-FR" dirty="0"/>
+              <a:t> para </a:t>
+            </a:r>
+            <a:r>
+              <a:rPr lang="fr-FR" sz="1200" kern="1200" dirty="0">
+                <a:solidFill>
+                  <a:schemeClr val="tx1"/>
+                </a:solidFill>
+                <a:latin typeface="+mn-lt"/>
+                <a:ea typeface="+mn-ea"/>
+                <a:cs typeface="+mn-cs"/>
+              </a:rPr>
+              <a:t>GET</a:t>
+            </a:r>
+            <a:r>
+              <a:rPr lang="fr-FR" dirty="0"/>
+              <a:t>.</a:t>
+            </a:r>
+          </a:p>
+          <a:p>
+            <a:endParaRPr lang="fr-FR" sz="1200" kern="1200" dirty="0">
+              <a:solidFill>
+                <a:schemeClr val="tx1"/>
+              </a:solidFill>
+              <a:latin typeface="+mn-lt"/>
+              <a:ea typeface="+mn-ea"/>
+              <a:cs typeface="+mn-cs"/>
+            </a:endParaRPr>
+          </a:p>
+          <a:p>
+            <a:r>
+              <a:rPr lang="fr-FR" sz="1200" kern="1200" dirty="0" err="1">
+                <a:solidFill>
+                  <a:schemeClr val="tx1"/>
+                </a:solidFill>
+                <a:latin typeface="+mn-lt"/>
+                <a:ea typeface="+mn-ea"/>
+                <a:cs typeface="+mn-cs"/>
+              </a:rPr>
+              <a:t>isCsrfTokenValid</a:t>
+            </a:r>
+            <a:r>
+              <a:rPr lang="fr-FR" sz="1200" kern="1200" dirty="0">
+                <a:solidFill>
+                  <a:schemeClr val="tx1"/>
+                </a:solidFill>
+                <a:latin typeface="+mn-lt"/>
+                <a:ea typeface="+mn-ea"/>
+                <a:cs typeface="+mn-cs"/>
+              </a:rPr>
+              <a:t>(...)</a:t>
+            </a:r>
+            <a:r>
+              <a:rPr lang="fr-FR" dirty="0"/>
+              <a:t>: Compara o </a:t>
+            </a:r>
+            <a:r>
+              <a:rPr lang="fr-FR" dirty="0" err="1"/>
+              <a:t>token</a:t>
+            </a:r>
+            <a:r>
+              <a:rPr lang="fr-FR" dirty="0"/>
+              <a:t> </a:t>
+            </a:r>
+            <a:r>
+              <a:rPr lang="fr-FR" dirty="0" err="1"/>
+              <a:t>enviado</a:t>
+            </a:r>
+            <a:r>
+              <a:rPr lang="fr-FR" dirty="0"/>
+              <a:t> com o </a:t>
+            </a:r>
+            <a:r>
+              <a:rPr lang="fr-FR" dirty="0" err="1"/>
+              <a:t>token</a:t>
+            </a:r>
+            <a:r>
+              <a:rPr lang="fr-FR" dirty="0"/>
+              <a:t> </a:t>
+            </a:r>
+            <a:r>
+              <a:rPr lang="fr-FR" dirty="0" err="1"/>
+              <a:t>gerado</a:t>
+            </a:r>
+            <a:r>
+              <a:rPr lang="fr-FR" dirty="0"/>
+              <a:t> pelo </a:t>
+            </a:r>
+            <a:r>
+              <a:rPr lang="fr-FR" dirty="0" err="1"/>
+              <a:t>servidor</a:t>
+            </a:r>
+            <a:r>
+              <a:rPr lang="fr-FR" dirty="0"/>
+              <a:t> para </a:t>
+            </a:r>
+            <a:r>
+              <a:rPr lang="fr-FR" dirty="0" err="1"/>
+              <a:t>aquela</a:t>
+            </a:r>
+            <a:r>
+              <a:rPr lang="fr-FR" dirty="0"/>
+              <a:t> </a:t>
+            </a:r>
+            <a:r>
+              <a:rPr lang="fr-FR" dirty="0" err="1"/>
+              <a:t>ação</a:t>
+            </a:r>
+            <a:r>
+              <a:rPr lang="fr-FR" dirty="0"/>
+              <a:t> </a:t>
+            </a:r>
+            <a:r>
+              <a:rPr lang="fr-FR" dirty="0" err="1"/>
+              <a:t>específica</a:t>
+            </a:r>
+            <a:r>
+              <a:rPr lang="fr-FR" dirty="0"/>
+              <a:t>.</a:t>
+            </a:r>
+          </a:p>
+          <a:p>
+            <a:r>
+              <a:rPr lang="fr-FR" dirty="0"/>
+              <a:t>O </a:t>
+            </a:r>
+            <a:r>
+              <a:rPr lang="fr-FR" dirty="0" err="1"/>
+              <a:t>identificador</a:t>
+            </a:r>
+            <a:r>
+              <a:rPr lang="fr-FR" dirty="0"/>
+              <a:t> </a:t>
+            </a:r>
+            <a:r>
+              <a:rPr lang="fr-FR" dirty="0" err="1"/>
+              <a:t>único</a:t>
+            </a:r>
+            <a:r>
+              <a:rPr lang="fr-FR" dirty="0"/>
+              <a:t> do </a:t>
+            </a:r>
+            <a:r>
+              <a:rPr lang="fr-FR" dirty="0" err="1"/>
+              <a:t>token</a:t>
+            </a:r>
+            <a:r>
+              <a:rPr lang="fr-FR" dirty="0"/>
+              <a:t> é composto pela string </a:t>
+            </a:r>
+            <a:r>
+              <a:rPr lang="fr-FR" sz="1200" kern="1200" dirty="0">
+                <a:solidFill>
+                  <a:schemeClr val="tx1"/>
+                </a:solidFill>
+                <a:latin typeface="+mn-lt"/>
+                <a:ea typeface="+mn-ea"/>
+                <a:cs typeface="+mn-cs"/>
+              </a:rPr>
+              <a:t>'</a:t>
+            </a:r>
+            <a:r>
+              <a:rPr lang="fr-FR" sz="1200" kern="1200" dirty="0" err="1">
+                <a:solidFill>
+                  <a:schemeClr val="tx1"/>
+                </a:solidFill>
+                <a:latin typeface="+mn-lt"/>
+                <a:ea typeface="+mn-ea"/>
+                <a:cs typeface="+mn-cs"/>
+              </a:rPr>
+              <a:t>delete</a:t>
+            </a:r>
+            <a:r>
+              <a:rPr lang="fr-FR" sz="1200" kern="1200" dirty="0">
+                <a:solidFill>
+                  <a:schemeClr val="tx1"/>
+                </a:solidFill>
+                <a:latin typeface="+mn-lt"/>
+                <a:ea typeface="+mn-ea"/>
+                <a:cs typeface="+mn-cs"/>
+              </a:rPr>
+              <a:t>'</a:t>
+            </a:r>
+            <a:r>
+              <a:rPr lang="fr-FR" dirty="0"/>
+              <a:t> </a:t>
+            </a:r>
+            <a:r>
+              <a:rPr lang="fr-FR" dirty="0" err="1"/>
+              <a:t>concatenada</a:t>
+            </a:r>
+            <a:r>
+              <a:rPr lang="fr-FR" dirty="0"/>
+              <a:t> com o ID da </a:t>
+            </a:r>
+            <a:r>
+              <a:rPr lang="fr-FR" dirty="0" err="1"/>
+              <a:t>avaliação</a:t>
+            </a:r>
+            <a:r>
+              <a:rPr lang="fr-FR" dirty="0"/>
+              <a:t> (</a:t>
+            </a:r>
+            <a:r>
+              <a:rPr lang="fr-FR" sz="1200" kern="1200" dirty="0">
+                <a:solidFill>
+                  <a:schemeClr val="tx1"/>
+                </a:solidFill>
+                <a:latin typeface="+mn-lt"/>
+                <a:ea typeface="+mn-ea"/>
+                <a:cs typeface="+mn-cs"/>
+              </a:rPr>
+              <a:t>$</a:t>
+            </a:r>
+            <a:r>
+              <a:rPr lang="fr-FR" sz="1200" kern="1200" dirty="0" err="1">
+                <a:solidFill>
+                  <a:schemeClr val="tx1"/>
+                </a:solidFill>
+                <a:latin typeface="+mn-lt"/>
+                <a:ea typeface="+mn-ea"/>
+                <a:cs typeface="+mn-cs"/>
+              </a:rPr>
+              <a:t>review</a:t>
+            </a:r>
+            <a:r>
+              <a:rPr lang="fr-FR" sz="1200" kern="1200" dirty="0">
+                <a:solidFill>
+                  <a:schemeClr val="tx1"/>
+                </a:solidFill>
+                <a:latin typeface="+mn-lt"/>
+                <a:ea typeface="+mn-ea"/>
+                <a:cs typeface="+mn-cs"/>
+              </a:rPr>
+              <a:t>-&gt;</a:t>
+            </a:r>
+            <a:r>
+              <a:rPr lang="fr-FR" sz="1200" kern="1200" dirty="0" err="1">
+                <a:solidFill>
+                  <a:schemeClr val="tx1"/>
+                </a:solidFill>
+                <a:latin typeface="+mn-lt"/>
+                <a:ea typeface="+mn-ea"/>
+                <a:cs typeface="+mn-cs"/>
+              </a:rPr>
+              <a:t>getId</a:t>
+            </a:r>
+            <a:r>
+              <a:rPr lang="fr-FR" sz="1200" kern="1200" dirty="0">
+                <a:solidFill>
+                  <a:schemeClr val="tx1"/>
+                </a:solidFill>
+                <a:latin typeface="+mn-lt"/>
+                <a:ea typeface="+mn-ea"/>
+                <a:cs typeface="+mn-cs"/>
+              </a:rPr>
+              <a:t>()</a:t>
+            </a:r>
+            <a:r>
+              <a:rPr lang="fr-FR" dirty="0"/>
+              <a:t>).</a:t>
+            </a:r>
+          </a:p>
+          <a:p>
+            <a:r>
+              <a:rPr lang="fr-FR" sz="1200" kern="1200" dirty="0">
+                <a:solidFill>
+                  <a:schemeClr val="tx1"/>
+                </a:solidFill>
+                <a:latin typeface="+mn-lt"/>
+                <a:ea typeface="+mn-ea"/>
+                <a:cs typeface="+mn-cs"/>
+              </a:rPr>
+              <a:t>$</a:t>
+            </a:r>
+            <a:r>
+              <a:rPr lang="fr-FR" sz="1200" kern="1200" dirty="0" err="1">
+                <a:solidFill>
+                  <a:schemeClr val="tx1"/>
+                </a:solidFill>
+                <a:latin typeface="+mn-lt"/>
+                <a:ea typeface="+mn-ea"/>
+                <a:cs typeface="+mn-cs"/>
+              </a:rPr>
+              <a:t>request</a:t>
+            </a:r>
+            <a:r>
+              <a:rPr lang="fr-FR" sz="1200" kern="1200" dirty="0">
+                <a:solidFill>
+                  <a:schemeClr val="tx1"/>
+                </a:solidFill>
+                <a:latin typeface="+mn-lt"/>
+                <a:ea typeface="+mn-ea"/>
+                <a:cs typeface="+mn-cs"/>
+              </a:rPr>
+              <a:t>-&gt;</a:t>
+            </a:r>
+            <a:r>
+              <a:rPr lang="fr-FR" sz="1200" kern="1200" dirty="0" err="1">
+                <a:solidFill>
+                  <a:schemeClr val="tx1"/>
+                </a:solidFill>
+                <a:latin typeface="+mn-lt"/>
+                <a:ea typeface="+mn-ea"/>
+                <a:cs typeface="+mn-cs"/>
+              </a:rPr>
+              <a:t>getPayload</a:t>
+            </a:r>
+            <a:r>
+              <a:rPr lang="fr-FR" sz="1200" kern="1200" dirty="0">
+                <a:solidFill>
+                  <a:schemeClr val="tx1"/>
+                </a:solidFill>
+                <a:latin typeface="+mn-lt"/>
+                <a:ea typeface="+mn-ea"/>
+                <a:cs typeface="+mn-cs"/>
+              </a:rPr>
+              <a:t>()-&gt;</a:t>
+            </a:r>
+            <a:r>
+              <a:rPr lang="fr-FR" sz="1200" kern="1200" dirty="0" err="1">
+                <a:solidFill>
+                  <a:schemeClr val="tx1"/>
+                </a:solidFill>
+                <a:latin typeface="+mn-lt"/>
+                <a:ea typeface="+mn-ea"/>
+                <a:cs typeface="+mn-cs"/>
+              </a:rPr>
+              <a:t>getString</a:t>
+            </a:r>
+            <a:r>
+              <a:rPr lang="fr-FR" sz="1200" kern="1200" dirty="0">
+                <a:solidFill>
+                  <a:schemeClr val="tx1"/>
+                </a:solidFill>
+                <a:latin typeface="+mn-lt"/>
+                <a:ea typeface="+mn-ea"/>
+                <a:cs typeface="+mn-cs"/>
+              </a:rPr>
+              <a:t>('_</a:t>
+            </a:r>
+            <a:r>
+              <a:rPr lang="fr-FR" sz="1200" kern="1200" dirty="0" err="1">
+                <a:solidFill>
+                  <a:schemeClr val="tx1"/>
+                </a:solidFill>
+                <a:latin typeface="+mn-lt"/>
+                <a:ea typeface="+mn-ea"/>
+                <a:cs typeface="+mn-cs"/>
+              </a:rPr>
+              <a:t>token</a:t>
+            </a:r>
+            <a:r>
+              <a:rPr lang="fr-FR" sz="1200" kern="1200" dirty="0">
+                <a:solidFill>
+                  <a:schemeClr val="tx1"/>
+                </a:solidFill>
+                <a:latin typeface="+mn-lt"/>
+                <a:ea typeface="+mn-ea"/>
+                <a:cs typeface="+mn-cs"/>
+              </a:rPr>
+              <a:t>')</a:t>
+            </a:r>
+            <a:r>
+              <a:rPr lang="fr-FR" dirty="0"/>
+              <a:t>: Busca de forma </a:t>
+            </a:r>
+            <a:r>
+              <a:rPr lang="fr-FR" dirty="0" err="1"/>
+              <a:t>segura</a:t>
+            </a:r>
+            <a:r>
+              <a:rPr lang="fr-FR" dirty="0"/>
+              <a:t> o </a:t>
+            </a:r>
+            <a:r>
+              <a:rPr lang="fr-FR" dirty="0" err="1"/>
+              <a:t>valor</a:t>
+            </a:r>
+            <a:r>
+              <a:rPr lang="fr-FR" dirty="0"/>
+              <a:t> do campo </a:t>
+            </a:r>
+            <a:r>
+              <a:rPr lang="fr-FR" dirty="0" err="1"/>
+              <a:t>oculto</a:t>
+            </a:r>
+            <a:r>
+              <a:rPr lang="fr-FR" dirty="0"/>
+              <a:t> </a:t>
+            </a:r>
+            <a:r>
+              <a:rPr lang="fr-FR" sz="1200" kern="1200" dirty="0">
+                <a:solidFill>
+                  <a:schemeClr val="tx1"/>
+                </a:solidFill>
+                <a:latin typeface="+mn-lt"/>
+                <a:ea typeface="+mn-ea"/>
+                <a:cs typeface="+mn-cs"/>
+              </a:rPr>
+              <a:t>_</a:t>
+            </a:r>
+            <a:r>
+              <a:rPr lang="fr-FR" sz="1200" kern="1200" dirty="0" err="1">
+                <a:solidFill>
+                  <a:schemeClr val="tx1"/>
+                </a:solidFill>
+                <a:latin typeface="+mn-lt"/>
+                <a:ea typeface="+mn-ea"/>
+                <a:cs typeface="+mn-cs"/>
+              </a:rPr>
+              <a:t>token</a:t>
+            </a:r>
+            <a:r>
+              <a:rPr lang="fr-FR" dirty="0"/>
+              <a:t> </a:t>
+            </a:r>
+            <a:r>
+              <a:rPr lang="fr-FR" dirty="0" err="1"/>
+              <a:t>enviado</a:t>
+            </a:r>
+            <a:r>
+              <a:rPr lang="fr-FR" dirty="0"/>
+              <a:t> </a:t>
+            </a:r>
+            <a:r>
+              <a:rPr lang="fr-FR" dirty="0" err="1"/>
+              <a:t>dentro</a:t>
+            </a:r>
+            <a:r>
+              <a:rPr lang="fr-FR" dirty="0"/>
+              <a:t> do </a:t>
+            </a:r>
+            <a:r>
+              <a:rPr lang="fr-FR" dirty="0" err="1"/>
+              <a:t>payload</a:t>
+            </a:r>
+            <a:r>
+              <a:rPr lang="fr-FR" dirty="0"/>
+              <a:t> da </a:t>
+            </a:r>
+            <a:r>
+              <a:rPr lang="fr-FR" dirty="0" err="1"/>
+              <a:t>requisição</a:t>
+            </a:r>
+            <a:r>
+              <a:rPr lang="fr-FR" dirty="0"/>
+              <a:t> POST.</a:t>
+            </a:r>
+          </a:p>
+          <a:p>
+            <a:pPr lvl="0"/>
+            <a:r>
+              <a:rPr lang="fr-FR" dirty="0" err="1"/>
+              <a:t>evitar</a:t>
+            </a:r>
+            <a:r>
+              <a:rPr lang="fr-FR" dirty="0"/>
+              <a:t> </a:t>
+            </a:r>
+            <a:r>
+              <a:rPr lang="fr-FR" dirty="0" err="1"/>
+              <a:t>ataques</a:t>
+            </a:r>
+            <a:r>
+              <a:rPr lang="fr-FR" dirty="0"/>
+              <a:t> de </a:t>
+            </a:r>
+            <a:r>
+              <a:rPr lang="fr-FR" i="1" dirty="0"/>
+              <a:t>Cross-Site </a:t>
+            </a:r>
+            <a:r>
+              <a:rPr lang="fr-FR" i="1" dirty="0" err="1"/>
+              <a:t>Request</a:t>
+            </a:r>
+            <a:r>
+              <a:rPr lang="fr-FR" i="1" dirty="0"/>
+              <a:t> </a:t>
+            </a:r>
+            <a:r>
+              <a:rPr lang="fr-FR" i="1" dirty="0" err="1"/>
+              <a:t>Forgery</a:t>
+            </a:r>
+            <a:r>
+              <a:rPr lang="fr-FR" i="1" dirty="0"/>
+              <a:t> (CSRF)</a:t>
+            </a:r>
+            <a:r>
+              <a:rPr lang="fr-FR" dirty="0"/>
+              <a:t>, </a:t>
+            </a:r>
+            <a:r>
+              <a:rPr lang="fr-FR" dirty="0" err="1"/>
+              <a:t>garantindo</a:t>
+            </a:r>
+            <a:r>
+              <a:rPr lang="fr-FR" dirty="0"/>
+              <a:t> que a </a:t>
+            </a:r>
+            <a:r>
+              <a:rPr lang="fr-FR" dirty="0" err="1"/>
+              <a:t>solicitação</a:t>
+            </a:r>
+            <a:r>
+              <a:rPr lang="fr-FR" dirty="0"/>
+              <a:t> de </a:t>
+            </a:r>
+            <a:r>
+              <a:rPr lang="fr-FR" dirty="0" err="1"/>
+              <a:t>exclusão</a:t>
+            </a:r>
+            <a:r>
+              <a:rPr lang="fr-FR" dirty="0"/>
+              <a:t> </a:t>
+            </a:r>
+            <a:r>
+              <a:rPr lang="fr-FR" dirty="0" err="1"/>
+              <a:t>realmente</a:t>
+            </a:r>
+            <a:r>
+              <a:rPr lang="fr-FR" dirty="0"/>
+              <a:t> </a:t>
+            </a:r>
+            <a:r>
+              <a:rPr lang="fr-FR" dirty="0" err="1"/>
+              <a:t>veio</a:t>
+            </a:r>
+            <a:r>
+              <a:rPr lang="fr-FR" dirty="0"/>
+              <a:t> do </a:t>
+            </a:r>
+            <a:r>
+              <a:rPr lang="fr-FR" dirty="0" err="1"/>
+              <a:t>nosso</a:t>
+            </a:r>
+            <a:r>
+              <a:rPr lang="fr-FR" dirty="0"/>
+              <a:t> site/</a:t>
+            </a:r>
+            <a:r>
+              <a:rPr lang="fr-FR" dirty="0" err="1"/>
+              <a:t>sistema</a:t>
+            </a:r>
+            <a:r>
+              <a:rPr lang="fr-FR" dirty="0"/>
+              <a:t> e </a:t>
+            </a:r>
+            <a:r>
+              <a:rPr lang="fr-FR" dirty="0" err="1"/>
+              <a:t>não</a:t>
+            </a:r>
+            <a:r>
+              <a:rPr lang="fr-FR" dirty="0"/>
+              <a:t> de um site </a:t>
+            </a:r>
+            <a:r>
+              <a:rPr lang="fr-FR" dirty="0" err="1"/>
+              <a:t>malicioso</a:t>
+            </a:r>
+            <a:r>
+              <a:rPr lang="fr-FR" dirty="0"/>
+              <a:t> </a:t>
+            </a:r>
+            <a:r>
+              <a:rPr lang="fr-FR" dirty="0" err="1"/>
+              <a:t>externo</a:t>
+            </a:r>
+            <a:r>
+              <a:rPr lang="fr-FR" dirty="0"/>
+              <a:t> </a:t>
+            </a:r>
+            <a:r>
+              <a:rPr lang="fr-FR" dirty="0" err="1"/>
+              <a:t>tentando</a:t>
+            </a:r>
+            <a:r>
+              <a:rPr lang="fr-FR" dirty="0"/>
+              <a:t> </a:t>
+            </a:r>
+            <a:r>
+              <a:rPr lang="fr-FR" dirty="0" err="1"/>
+              <a:t>forçar</a:t>
+            </a:r>
+            <a:r>
+              <a:rPr lang="fr-FR" dirty="0"/>
+              <a:t> a </a:t>
+            </a:r>
+            <a:r>
+              <a:rPr lang="fr-FR" dirty="0" err="1"/>
+              <a:t>ação</a:t>
+            </a:r>
+            <a:r>
+              <a:rPr lang="fr-FR" dirty="0"/>
+              <a:t>.</a:t>
             </a:r>
           </a:p>
           <a:p>
@@ -1779,7 +1842,7 @@
           <p:cNvPr id="4" name="Slide Number Placeholder 3">
             <a:extLst>
               <a:ext uri="{FF2B5EF4-FFF2-40B4-BE49-F238E27FC236}">
-                <a16:creationId xmlns:a16="http://schemas.microsoft.com/office/drawing/2014/main" id="{CD913D0E-062F-9342-9C9F-EA0DFE33B75E}"/>
+                <a16:creationId xmlns:a16="http://schemas.microsoft.com/office/drawing/2014/main" id="{AC714190-D623-97D1-4157-043DF7878153}"/>
               </a:ext>
             </a:extLst>
           </p:cNvPr>
@@ -1795,7 +1858,7 @@
     </p:spTree>
     <p:extLst>
       <p:ext uri="{BB962C8B-B14F-4D97-AF65-F5344CB8AC3E}">
-        <p14:creationId xmlns:p14="http://schemas.microsoft.com/office/powerpoint/2010/main" val="3299617376"/>
+        <p14:creationId xmlns:p14="http://schemas.microsoft.com/office/powerpoint/2010/main" val="560285634"/>
       </p:ext>
     </p:extLst>
   </p:cSld>
@@ -1851,24 +1914,32 @@
           <a:p>
             <a:r>
               <a:rPr dirty="0"/>
-              <a:t>~5m : </a:t>
-            </a:r>
-            <a:r>
-              <a:rPr dirty="0" err="1"/>
-              <a:t>Démonstration</a:t>
-            </a:r>
-            <a:r>
-              <a:rPr dirty="0"/>
-              <a:t> </a:t>
-            </a:r>
-            <a:r>
-              <a:rPr dirty="0" err="1"/>
-              <a:t>en</a:t>
-            </a:r>
-            <a:r>
-              <a:rPr dirty="0"/>
-              <a:t> direct.</a:t>
-            </a:r>
+              <a:t>~1m : Forms, Security et Mailer.</a:t>
+            </a:r>
+            <a:endParaRPr lang="pt-BR" dirty="0"/>
+          </a:p>
+          <a:p>
+            <a:r>
+              <a:rPr lang="fr-FR" dirty="0"/>
+              <a:t>Symfony me permet également de gérer les formulaires.</a:t>
+            </a:r>
+          </a:p>
+          <a:p>
+            <a:r>
+              <a:rPr lang="fr-FR" dirty="0"/>
+              <a:t>J'utilise des classes </a:t>
+            </a:r>
+            <a:r>
+              <a:rPr lang="fr-FR" dirty="0" err="1"/>
+              <a:t>FormType</a:t>
+            </a:r>
+            <a:r>
+              <a:rPr lang="fr-FR" dirty="0"/>
+              <a:t> pour la création d'utilisateurs, les demandes de devis, les avis et les formulaires d'administration.</a:t>
+            </a:r>
+          </a:p>
+          <a:p>
+            <a:endParaRPr dirty="0"/>
           </a:p>
         </p:txBody>
       </p:sp>
@@ -1897,7 +1968,13 @@
   <p:cSld>
     <p:spTree>
       <p:nvGrpSpPr>
-        <p:cNvPr id="1" name=""/>
+        <p:cNvPr id="1" name="">
+          <a:extLst>
+            <a:ext uri="{FF2B5EF4-FFF2-40B4-BE49-F238E27FC236}">
+              <a16:creationId xmlns:a16="http://schemas.microsoft.com/office/drawing/2014/main" id="{F7561664-256E-100F-1E97-40212D33EA46}"/>
+            </a:ext>
+          </a:extLst>
+        </p:cNvPr>
         <p:cNvGrpSpPr/>
         <p:nvPr/>
       </p:nvGrpSpPr>
@@ -1911,7 +1988,13 @@
       </p:grpSpPr>
       <p:sp>
         <p:nvSpPr>
-          <p:cNvPr id="2" name="Slide Image Placeholder 1"/>
+          <p:cNvPr id="2" name="Slide Image Placeholder 1">
+            <a:extLst>
+              <a:ext uri="{FF2B5EF4-FFF2-40B4-BE49-F238E27FC236}">
+                <a16:creationId xmlns:a16="http://schemas.microsoft.com/office/drawing/2014/main" id="{94CFDC0A-4B0D-09F9-86D9-ECEA885D33CE}"/>
+              </a:ext>
+            </a:extLst>
+          </p:cNvPr>
           <p:cNvSpPr>
             <a:spLocks noGrp="1" noRot="1" noChangeAspect="1"/>
           </p:cNvSpPr>
@@ -1923,7 +2006,13 @@
       </p:sp>
       <p:sp>
         <p:nvSpPr>
-          <p:cNvPr id="3" name="Notes Placeholder 2"/>
+          <p:cNvPr id="3" name="Notes Placeholder 2">
+            <a:extLst>
+              <a:ext uri="{FF2B5EF4-FFF2-40B4-BE49-F238E27FC236}">
+                <a16:creationId xmlns:a16="http://schemas.microsoft.com/office/drawing/2014/main" id="{29ABE0F3-864D-5B80-DD18-11119F175421}"/>
+              </a:ext>
+            </a:extLst>
+          </p:cNvPr>
           <p:cNvSpPr>
             <a:spLocks noGrp="1"/>
           </p:cNvSpPr>
@@ -1938,65 +2027,28 @@
           <a:p>
             <a:r>
               <a:rPr dirty="0"/>
-              <a:t>~1m30 : Donner 2-3 </a:t>
-            </a:r>
-            <a:r>
-              <a:rPr dirty="0" err="1"/>
-              <a:t>difficultés</a:t>
-            </a:r>
-            <a:r>
-              <a:rPr dirty="0"/>
-              <a:t> et solutions.</a:t>
+              <a:t>~1m : Forms, Security et Mailer.</a:t>
             </a:r>
             <a:endParaRPr lang="pt-BR" dirty="0"/>
           </a:p>
           <a:p>
             <a:r>
               <a:rPr lang="fr-FR" dirty="0"/>
-              <a:t>Une des premières difficultés a été de bien comprendre la manière dont les différentes parties de Symfony communiquent entre elles.</a:t>
-            </a:r>
-          </a:p>
-          <a:p>
-            <a:endParaRPr lang="fr-FR" dirty="0"/>
+              <a:t>La sécurité est gérée avec le composant Security de Symfony.</a:t>
+            </a:r>
           </a:p>
           <a:p>
             <a:r>
               <a:rPr lang="fr-FR" dirty="0"/>
-              <a:t>Par exemple, il faut comprendre la différence entre une entité, un repository et un </a:t>
+              <a:t>Les mots de passe ne sont pas stockés en clair : ils sont </a:t>
             </a:r>
             <a:r>
               <a:rPr lang="fr-FR" dirty="0" err="1"/>
-              <a:t>controller</a:t>
+              <a:t>hashés</a:t>
             </a:r>
             <a:r>
               <a:rPr lang="fr-FR" dirty="0"/>
-              <a:t>, et surtout savoir où placer chaque responsabilité.</a:t>
-            </a:r>
-          </a:p>
-          <a:p>
-            <a:endParaRPr lang="fr-FR" dirty="0"/>
-          </a:p>
-          <a:p>
-            <a:r>
-              <a:rPr lang="fr-FR" dirty="0"/>
-              <a:t>J'ai également rencontré des difficultés avec les relations entre les entités Doctrine, notamment les relations entre produits et catégories.</a:t>
-            </a:r>
-          </a:p>
-          <a:p>
-            <a:endParaRPr lang="fr-FR" dirty="0"/>
-          </a:p>
-          <a:p>
-            <a:r>
-              <a:rPr lang="fr-FR" dirty="0"/>
-              <a:t>Côté </a:t>
-            </a:r>
-            <a:r>
-              <a:rPr lang="fr-FR" dirty="0" err="1"/>
-              <a:t>front-end</a:t>
-            </a:r>
-            <a:r>
-              <a:rPr lang="fr-FR" dirty="0"/>
-              <a:t>, l'intégration de la maquette a demandé plusieurs adaptations pour obtenir un résultat responsif.</a:t>
+              <a:t> avant d'être enregistrés.</a:t>
             </a:r>
           </a:p>
           <a:p>
@@ -2006,7 +2058,13 @@
       </p:sp>
       <p:sp>
         <p:nvSpPr>
-          <p:cNvPr id="4" name="Slide Number Placeholder 3"/>
+          <p:cNvPr id="4" name="Slide Number Placeholder 3">
+            <a:extLst>
+              <a:ext uri="{FF2B5EF4-FFF2-40B4-BE49-F238E27FC236}">
+                <a16:creationId xmlns:a16="http://schemas.microsoft.com/office/drawing/2014/main" id="{CD913D0E-062F-9342-9C9F-EA0DFE33B75E}"/>
+              </a:ext>
+            </a:extLst>
+          </p:cNvPr>
           <p:cNvSpPr>
             <a:spLocks noGrp="1"/>
           </p:cNvSpPr>
@@ -2017,6 +2075,11 @@
         <p:spPr/>
       </p:sp>
     </p:spTree>
+    <p:extLst>
+      <p:ext uri="{BB962C8B-B14F-4D97-AF65-F5344CB8AC3E}">
+        <p14:creationId xmlns:p14="http://schemas.microsoft.com/office/powerpoint/2010/main" val="3299617376"/>
+      </p:ext>
+    </p:extLst>
   </p:cSld>
   <p:clrMapOvr>
     <a:masterClrMapping/>
@@ -2070,19 +2133,11 @@
           <a:p>
             <a:r>
               <a:rPr dirty="0"/>
-              <a:t>~1m : </a:t>
+              <a:t>~5m : </a:t>
             </a:r>
             <a:r>
               <a:rPr dirty="0" err="1"/>
-              <a:t>Présenter</a:t>
-            </a:r>
-            <a:r>
-              <a:rPr dirty="0"/>
-              <a:t> les </a:t>
-            </a:r>
-            <a:r>
-              <a:rPr dirty="0" err="1"/>
-              <a:t>évolutions</a:t>
+              <a:t>Démonstration</a:t>
             </a:r>
             <a:r>
               <a:rPr dirty="0"/>
@@ -2090,46 +2145,12 @@
             </a:r>
             <a:r>
               <a:rPr dirty="0" err="1"/>
-              <a:t>prévues</a:t>
+              <a:t>en</a:t>
             </a:r>
             <a:r>
               <a:rPr dirty="0"/>
-              <a:t>.</a:t>
-            </a:r>
-            <a:endParaRPr lang="pt-BR" dirty="0"/>
-          </a:p>
-          <a:p>
-            <a:r>
-              <a:rPr lang="fr-FR" dirty="0"/>
-              <a:t>Le projet est encore en cours de développement, donc plusieurs évolutions sont prévues.</a:t>
-            </a:r>
-          </a:p>
-          <a:p>
-            <a:r>
-              <a:rPr lang="fr-FR" dirty="0"/>
-              <a:t>À court terme, je souhaite principalement finaliser certaines fonctionnalités existantes et améliorer les tests et les validations.</a:t>
-            </a:r>
-          </a:p>
-          <a:p>
-            <a:r>
-              <a:rPr lang="fr-FR" dirty="0"/>
-              <a:t>Ensuite, je pourrais ajouter la gestion des images, une recherche plus avancée, des filtres et une pagination.</a:t>
-            </a:r>
-          </a:p>
-          <a:p>
-            <a:r>
-              <a:rPr lang="fr-FR" dirty="0"/>
-              <a:t>À plus long terme, une évolution intéressante serait de permettre à un utilisateur de personnaliser directement un produit avant de faire une demande de devis.</a:t>
-            </a:r>
-          </a:p>
-          <a:p>
-            <a:r>
-              <a:rPr lang="fr-FR" dirty="0"/>
-              <a:t>Enfin, l'objectif final serait de pouvoir mettre l'application en production.</a:t>
-            </a:r>
-          </a:p>
-          <a:p>
-            <a:endParaRPr dirty="0"/>
+              <a:t> direct.</a:t>
+            </a:r>
           </a:p>
         </p:txBody>
       </p:sp>
@@ -2199,34 +2220,57 @@
           <a:p>
             <a:r>
               <a:rPr dirty="0"/>
-              <a:t>~45s : Conclusion et questions.</a:t>
+              <a:t>~1m30 : Donner 2-3 </a:t>
+            </a:r>
+            <a:r>
+              <a:rPr dirty="0" err="1"/>
+              <a:t>difficultés</a:t>
+            </a:r>
+            <a:r>
+              <a:rPr dirty="0"/>
+              <a:t> et solutions.</a:t>
             </a:r>
             <a:endParaRPr lang="pt-BR" dirty="0"/>
           </a:p>
           <a:p>
             <a:r>
               <a:rPr lang="fr-FR" dirty="0"/>
-              <a:t>Pour conclure, ce projet m'a permis de mettre en pratique plusieurs notions importantes du développement d'applications web.</a:t>
-            </a:r>
+              <a:t>Une des premières difficultés a été de bien comprendre la manière dont les différentes parties de Symfony communiquent entre elles.</a:t>
+            </a:r>
+          </a:p>
+          <a:p>
+            <a:endParaRPr lang="fr-FR" dirty="0"/>
           </a:p>
           <a:p>
             <a:r>
               <a:rPr lang="fr-FR" dirty="0"/>
-              <a:t>J'ai travaillé sur la conception de la base de données, les relations entre les entités, les </a:t>
+              <a:t>Par exemple, il faut comprendre la différence entre une entité, un repository et un </a:t>
             </a:r>
             <a:r>
               <a:rPr lang="fr-FR" dirty="0" err="1"/>
-              <a:t>controllers</a:t>
+              <a:t>controller</a:t>
             </a:r>
             <a:r>
               <a:rPr lang="fr-FR" dirty="0"/>
-              <a:t>, les repositories, Doctrine, les formulaires, la sécurité et le rendu avec Twig.</a:t>
-            </a:r>
+              <a:t>, et surtout savoir où placer chaque responsabilité.</a:t>
+            </a:r>
+          </a:p>
+          <a:p>
+            <a:endParaRPr lang="fr-FR" dirty="0"/>
           </a:p>
           <a:p>
             <a:r>
               <a:rPr lang="fr-FR" dirty="0"/>
-              <a:t>J'ai également travaillé sur l'intégration </a:t>
+              <a:t>J'ai également rencontré des difficultés avec les relations entre les entités Doctrine, notamment les relations entre produits et catégories.</a:t>
+            </a:r>
+          </a:p>
+          <a:p>
+            <a:endParaRPr lang="fr-FR" dirty="0"/>
+          </a:p>
+          <a:p>
+            <a:r>
+              <a:rPr lang="fr-FR" dirty="0"/>
+              <a:t>Côté </a:t>
             </a:r>
             <a:r>
               <a:rPr lang="fr-FR" dirty="0" err="1"/>
@@ -2234,28 +2278,136 @@
             </a:r>
             <a:r>
               <a:rPr lang="fr-FR" dirty="0"/>
-              <a:t> avec Bootstrap, CSS et JavaScript.</a:t>
-            </a:r>
+              <a:t>, l'intégration de la maquette a demandé plusieurs adaptations pour obtenir un résultat responsif.</a:t>
+            </a:r>
+          </a:p>
+          <a:p>
+            <a:endParaRPr dirty="0"/>
+          </a:p>
+        </p:txBody>
+      </p:sp>
+      <p:sp>
+        <p:nvSpPr>
+          <p:cNvPr id="4" name="Slide Number Placeholder 3"/>
+          <p:cNvSpPr>
+            <a:spLocks noGrp="1"/>
+          </p:cNvSpPr>
+          <p:nvPr>
+            <p:ph type="sldNum" sz="quarter" idx="5"/>
+          </p:nvPr>
+        </p:nvSpPr>
+        <p:spPr/>
+      </p:sp>
+    </p:spTree>
+  </p:cSld>
+  <p:clrMapOvr>
+    <a:masterClrMapping/>
+  </p:clrMapOvr>
+</p:notes>
+</file>
+
+<file path=ppt/notesSlides/notesSlide19.xml><?xml version="1.0" encoding="utf-8"?>
+<p:notes xmlns:a="http://schemas.openxmlformats.org/drawingml/2006/main" xmlns:r="http://schemas.openxmlformats.org/officeDocument/2006/relationships" xmlns:p="http://schemas.openxmlformats.org/presentationml/2006/main">
+  <p:cSld>
+    <p:spTree>
+      <p:nvGrpSpPr>
+        <p:cNvPr id="1" name=""/>
+        <p:cNvGrpSpPr/>
+        <p:nvPr/>
+      </p:nvGrpSpPr>
+      <p:grpSpPr>
+        <a:xfrm>
+          <a:off x="0" y="0"/>
+          <a:ext cx="0" cy="0"/>
+          <a:chOff x="0" y="0"/>
+          <a:chExt cx="0" cy="0"/>
+        </a:xfrm>
+      </p:grpSpPr>
+      <p:sp>
+        <p:nvSpPr>
+          <p:cNvPr id="2" name="Slide Image Placeholder 1"/>
+          <p:cNvSpPr>
+            <a:spLocks noGrp="1" noRot="1" noChangeAspect="1"/>
+          </p:cNvSpPr>
+          <p:nvPr>
+            <p:ph type="sldImg" idx="2"/>
+          </p:nvPr>
+        </p:nvSpPr>
+        <p:spPr/>
+      </p:sp>
+      <p:sp>
+        <p:nvSpPr>
+          <p:cNvPr id="3" name="Notes Placeholder 2"/>
+          <p:cNvSpPr>
+            <a:spLocks noGrp="1"/>
+          </p:cNvSpPr>
+          <p:nvPr>
+            <p:ph type="body" sz="quarter" idx="3"/>
+          </p:nvPr>
+        </p:nvSpPr>
+        <p:spPr/>
+        <p:txBody>
+          <a:bodyPr/>
+          <a:lstStyle/>
+          <a:p>
+            <a:r>
+              <a:rPr dirty="0"/>
+              <a:t>~1m : </a:t>
+            </a:r>
+            <a:r>
+              <a:rPr dirty="0" err="1"/>
+              <a:t>Présenter</a:t>
+            </a:r>
+            <a:r>
+              <a:rPr dirty="0"/>
+              <a:t> les </a:t>
+            </a:r>
+            <a:r>
+              <a:rPr dirty="0" err="1"/>
+              <a:t>évolutions</a:t>
+            </a:r>
+            <a:r>
+              <a:rPr dirty="0"/>
+              <a:t> </a:t>
+            </a:r>
+            <a:r>
+              <a:rPr dirty="0" err="1"/>
+              <a:t>prévues</a:t>
+            </a:r>
+            <a:r>
+              <a:rPr dirty="0"/>
+              <a:t>.</a:t>
+            </a:r>
+            <a:endParaRPr lang="pt-BR" dirty="0"/>
           </a:p>
           <a:p>
             <a:r>
               <a:rPr lang="fr-FR" dirty="0"/>
-              <a:t>Le projet n'est pas encore complètement terminé, mais les principales bases techniques sont en place et l'application possède déjà un fonctionnement complet sur plusieurs parties.</a:t>
+              <a:t>Le projet est encore en cours de développement, donc plusieurs évolutions sont prévues.</a:t>
             </a:r>
           </a:p>
           <a:p>
             <a:r>
               <a:rPr lang="fr-FR" dirty="0"/>
-              <a:t>Ce projet m'a surtout permis de mieux comprendre comment les différentes couches d'une application Symfony communiquent entre elles.</a:t>
-            </a:r>
-          </a:p>
-          <a:p>
-            <a:endParaRPr lang="fr-FR" dirty="0"/>
+              <a:t>À court terme, je souhaite principalement finaliser certaines fonctionnalités existantes et améliorer les tests et les validations.</a:t>
+            </a:r>
           </a:p>
           <a:p>
             <a:r>
               <a:rPr lang="fr-FR" dirty="0"/>
-              <a:t>Merci pour votre attention.</a:t>
+              <a:t>Ensuite, je pourrais ajouter la gestion des images, une recherche plus avancée, des filtres et une pagination.</a:t>
+            </a:r>
+          </a:p>
+          <a:p>
+            <a:r>
+              <a:rPr lang="fr-FR" dirty="0"/>
+              <a:t>À plus long terme, une évolution intéressante serait de permettre à un utilisateur de personnaliser directement un produit avant de faire une demande de devis.</a:t>
+            </a:r>
+          </a:p>
+          <a:p>
+            <a:r>
+              <a:rPr lang="fr-FR" dirty="0"/>
+              <a:t>Enfin, l'objectif final serait de pouvoir mettre l'application en production.</a:t>
             </a:r>
           </a:p>
           <a:p>
@@ -2401,6 +2553,136 @@
             <a:r>
               <a:rPr lang="fr-FR" dirty="0"/>
               <a:t>, avant de terminer par une démonstration et les évolutions prévues.</a:t>
+            </a:r>
+          </a:p>
+          <a:p>
+            <a:endParaRPr dirty="0"/>
+          </a:p>
+        </p:txBody>
+      </p:sp>
+      <p:sp>
+        <p:nvSpPr>
+          <p:cNvPr id="4" name="Slide Number Placeholder 3"/>
+          <p:cNvSpPr>
+            <a:spLocks noGrp="1"/>
+          </p:cNvSpPr>
+          <p:nvPr>
+            <p:ph type="sldNum" sz="quarter" idx="5"/>
+          </p:nvPr>
+        </p:nvSpPr>
+        <p:spPr/>
+      </p:sp>
+    </p:spTree>
+  </p:cSld>
+  <p:clrMapOvr>
+    <a:masterClrMapping/>
+  </p:clrMapOvr>
+</p:notes>
+</file>
+
+<file path=ppt/notesSlides/notesSlide20.xml><?xml version="1.0" encoding="utf-8"?>
+<p:notes xmlns:a="http://schemas.openxmlformats.org/drawingml/2006/main" xmlns:r="http://schemas.openxmlformats.org/officeDocument/2006/relationships" xmlns:p="http://schemas.openxmlformats.org/presentationml/2006/main">
+  <p:cSld>
+    <p:spTree>
+      <p:nvGrpSpPr>
+        <p:cNvPr id="1" name=""/>
+        <p:cNvGrpSpPr/>
+        <p:nvPr/>
+      </p:nvGrpSpPr>
+      <p:grpSpPr>
+        <a:xfrm>
+          <a:off x="0" y="0"/>
+          <a:ext cx="0" cy="0"/>
+          <a:chOff x="0" y="0"/>
+          <a:chExt cx="0" cy="0"/>
+        </a:xfrm>
+      </p:grpSpPr>
+      <p:sp>
+        <p:nvSpPr>
+          <p:cNvPr id="2" name="Slide Image Placeholder 1"/>
+          <p:cNvSpPr>
+            <a:spLocks noGrp="1" noRot="1" noChangeAspect="1"/>
+          </p:cNvSpPr>
+          <p:nvPr>
+            <p:ph type="sldImg" idx="2"/>
+          </p:nvPr>
+        </p:nvSpPr>
+        <p:spPr/>
+      </p:sp>
+      <p:sp>
+        <p:nvSpPr>
+          <p:cNvPr id="3" name="Notes Placeholder 2"/>
+          <p:cNvSpPr>
+            <a:spLocks noGrp="1"/>
+          </p:cNvSpPr>
+          <p:nvPr>
+            <p:ph type="body" sz="quarter" idx="3"/>
+          </p:nvPr>
+        </p:nvSpPr>
+        <p:spPr/>
+        <p:txBody>
+          <a:bodyPr/>
+          <a:lstStyle/>
+          <a:p>
+            <a:r>
+              <a:rPr dirty="0"/>
+              <a:t>~45s : Conclusion et questions.</a:t>
+            </a:r>
+            <a:endParaRPr lang="pt-BR" dirty="0"/>
+          </a:p>
+          <a:p>
+            <a:r>
+              <a:rPr lang="fr-FR" dirty="0"/>
+              <a:t>Pour conclure, ce projet m'a permis de mettre en pratique plusieurs notions importantes du développement d'applications web.</a:t>
+            </a:r>
+          </a:p>
+          <a:p>
+            <a:r>
+              <a:rPr lang="fr-FR" dirty="0"/>
+              <a:t>J'ai travaillé sur la conception de la base de données, les relations entre les entités, les </a:t>
+            </a:r>
+            <a:r>
+              <a:rPr lang="fr-FR" dirty="0" err="1"/>
+              <a:t>controllers</a:t>
+            </a:r>
+            <a:r>
+              <a:rPr lang="fr-FR" dirty="0"/>
+              <a:t>, les repositories, Doctrine, les formulaires, la sécurité et le rendu avec Twig.</a:t>
+            </a:r>
+          </a:p>
+          <a:p>
+            <a:r>
+              <a:rPr lang="fr-FR" dirty="0"/>
+              <a:t>J'ai également travaillé sur l'intégration </a:t>
+            </a:r>
+            <a:r>
+              <a:rPr lang="fr-FR" dirty="0" err="1"/>
+              <a:t>front-end</a:t>
+            </a:r>
+            <a:r>
+              <a:rPr lang="fr-FR" dirty="0"/>
+              <a:t> avec Bootstrap, CSS et JavaScript.</a:t>
+            </a:r>
+          </a:p>
+          <a:p>
+            <a:r>
+              <a:rPr lang="fr-FR" dirty="0"/>
+              <a:t>Le projet n'est pas encore complètement terminé, mais les principales bases techniques sont en place et l'application possède déjà un fonctionnement complet sur plusieurs parties.</a:t>
+            </a:r>
+          </a:p>
+          <a:p>
+            <a:r>
+              <a:rPr lang="fr-FR" dirty="0"/>
+              <a:t>Ce projet m'a surtout permis de mieux comprendre comment les différentes couches d'une application Symfony communiquent entre elles.</a:t>
+            </a:r>
+          </a:p>
+          <a:p>
+            <a:endParaRPr lang="fr-FR" dirty="0"/>
+          </a:p>
+          <a:p>
+            <a:r>
+              <a:rPr lang="fr-FR" dirty="0"/>
+              <a:t>Merci pour votre attention.</a:t>
             </a:r>
           </a:p>
           <a:p>
@@ -3484,62 +3766,6 @@
             <a:r>
               <a:rPr lang="fr-FR" dirty="0"/>
               <a:t> récupère une liste de produits, Twig peut parcourir cette liste et générer automatiquement les cartes produits.</a:t>
-            </a:r>
-          </a:p>
-          <a:p>
-            <a:r>
-              <a:rPr lang="fr-FR" dirty="0"/>
-              <a:t>Pour le CSS, j'utilise Bootstrap pour le système de grille, le responsive, les boutons, les formulaires et certains composants.</a:t>
-            </a:r>
-          </a:p>
-          <a:p>
-            <a:r>
-              <a:rPr lang="fr-FR" dirty="0"/>
-              <a:t>J'ai ensuite ajouté des classes personnalisées pour respecter le design du projet, par exemple « service-</a:t>
-            </a:r>
-            <a:r>
-              <a:rPr lang="fr-FR" dirty="0" err="1"/>
-              <a:t>card</a:t>
-            </a:r>
-            <a:r>
-              <a:rPr lang="fr-FR" dirty="0"/>
-              <a:t> », « </a:t>
-            </a:r>
-            <a:r>
-              <a:rPr lang="fr-FR" dirty="0" err="1"/>
-              <a:t>hero</a:t>
-            </a:r>
-            <a:r>
-              <a:rPr lang="fr-FR" dirty="0"/>
-              <a:t>-section » ou « </a:t>
-            </a:r>
-            <a:r>
-              <a:rPr lang="fr-FR" dirty="0" err="1"/>
-              <a:t>btn</a:t>
-            </a:r>
-            <a:r>
-              <a:rPr lang="fr-FR" dirty="0"/>
-              <a:t>-gold ».</a:t>
-            </a:r>
-          </a:p>
-          <a:p>
-            <a:r>
-              <a:rPr lang="fr-FR" dirty="0"/>
-              <a:t>Le JavaScript reste relativement léger dans cette version du projet. Une partie des interactions nécessaires est déjà fournie par Bootstrap.</a:t>
-            </a:r>
-          </a:p>
-          <a:p>
-            <a:r>
-              <a:rPr lang="fr-FR" dirty="0"/>
-              <a:t>Les fichiers CSS et JavaScript sont ensuite compilés et gérés avec </a:t>
-            </a:r>
-            <a:r>
-              <a:rPr lang="fr-FR" dirty="0" err="1"/>
-              <a:t>Webpack</a:t>
-            </a:r>
-            <a:r>
-              <a:rPr lang="fr-FR" dirty="0"/>
-              <a:t> Encore.</a:t>
             </a:r>
           </a:p>
           <a:p>
@@ -6690,7 +6916,13 @@
   <p:cSld>
     <p:spTree>
       <p:nvGrpSpPr>
-        <p:cNvPr id="1" name=""/>
+        <p:cNvPr id="1" name="">
+          <a:extLst>
+            <a:ext uri="{FF2B5EF4-FFF2-40B4-BE49-F238E27FC236}">
+              <a16:creationId xmlns:a16="http://schemas.microsoft.com/office/drawing/2014/main" id="{D9F48E48-FC17-F909-87AB-1BA6E127C560}"/>
+            </a:ext>
+          </a:extLst>
+        </p:cNvPr>
         <p:cNvGrpSpPr/>
         <p:nvPr/>
       </p:nvGrpSpPr>
@@ -6704,7 +6936,13 @@
       </p:grpSpPr>
       <p:sp>
         <p:nvSpPr>
-          <p:cNvPr id="3" name="TextBox 2"/>
+          <p:cNvPr id="3" name="TextBox 2">
+            <a:extLst>
+              <a:ext uri="{FF2B5EF4-FFF2-40B4-BE49-F238E27FC236}">
+                <a16:creationId xmlns:a16="http://schemas.microsoft.com/office/drawing/2014/main" id="{1F45181B-3A1E-4552-3BB9-8A1DE9E22C07}"/>
+              </a:ext>
+            </a:extLst>
+          </p:cNvPr>
           <p:cNvSpPr txBox="1"/>
           <p:nvPr/>
         </p:nvSpPr>
@@ -6731,30 +6969,33 @@
                 </a:solidFill>
                 <a:latin typeface="Aptos Display"/>
               </a:rPr>
-              <a:t>Back-end</a:t>
-            </a:r>
-            <a:r>
-              <a:rPr lang="fr-FR" sz="2800" b="1" noProof="0" dirty="0">
-                <a:solidFill>
-                  <a:srgbClr val="2C2522"/>
-                </a:solidFill>
-                <a:latin typeface="Aptos Display"/>
-              </a:rPr>
-              <a:t> — MVC</a:t>
-            </a:r>
-          </a:p>
-        </p:txBody>
-      </p:sp>
-      <p:sp>
-        <p:nvSpPr>
-          <p:cNvPr id="4" name="Rounded Rectangle 3"/>
+              <a:t>Front-end</a:t>
+            </a:r>
+            <a:endParaRPr lang="fr-FR" sz="2800" b="1" noProof="0" dirty="0">
+              <a:solidFill>
+                <a:srgbClr val="2C2522"/>
+              </a:solidFill>
+              <a:latin typeface="Aptos Display"/>
+            </a:endParaRPr>
+          </a:p>
+        </p:txBody>
+      </p:sp>
+      <p:sp>
+        <p:nvSpPr>
+          <p:cNvPr id="6" name="Rounded Rectangle 5">
+            <a:extLst>
+              <a:ext uri="{FF2B5EF4-FFF2-40B4-BE49-F238E27FC236}">
+                <a16:creationId xmlns:a16="http://schemas.microsoft.com/office/drawing/2014/main" id="{909F4DBC-FAC0-9652-E248-70AAABA23F4C}"/>
+              </a:ext>
+            </a:extLst>
+          </p:cNvPr>
           <p:cNvSpPr/>
           <p:nvPr/>
         </p:nvSpPr>
         <p:spPr>
           <a:xfrm>
-            <a:off x="731520" y="928189"/>
-            <a:ext cx="3383280" cy="3474720"/>
+            <a:off x="332841" y="1460864"/>
+            <a:ext cx="3407954" cy="4114800"/>
           </a:xfrm>
           <a:prstGeom prst="roundRect">
             <a:avLst/>
@@ -6820,7 +7061,7 @@
                 <a:ea typeface="+mn-ea"/>
                 <a:cs typeface="+mn-cs"/>
               </a:rPr>
-              <a:t>MODEL</a:t>
+              <a:t>CSS</a:t>
             </a:r>
           </a:p>
           <a:p>
@@ -6846,7 +7087,7 @@
               </a:defRPr>
             </a:pPr>
             <a:r>
-              <a:rPr kumimoji="0" lang="fr-FR" sz="1600" b="0" i="0" u="none" strike="noStrike" kern="1200" cap="none" spc="0" normalizeH="0" baseline="0" noProof="0" dirty="0" err="1">
+              <a:rPr kumimoji="0" lang="fr-FR" sz="1600" b="0" i="0" u="none" strike="noStrike" kern="1200" cap="none" spc="0" normalizeH="0" baseline="0" noProof="0" dirty="0">
                 <a:ln>
                   <a:noFill/>
                 </a:ln>
@@ -6860,7 +7101,7 @@
                 <a:ea typeface="+mn-ea"/>
                 <a:cs typeface="+mn-cs"/>
               </a:rPr>
-              <a:t>Entity</a:t>
+              <a:t>Bootstrap 5.3.8</a:t>
             </a:r>
             <a:br>
               <a:rPr kumimoji="0" lang="fr-FR" sz="1600" b="0" i="0" u="none" strike="noStrike" kern="1200" cap="none" spc="0" normalizeH="0" baseline="0" noProof="0" dirty="0">
@@ -6893,7 +7134,7 @@
                 <a:ea typeface="+mn-ea"/>
                 <a:cs typeface="+mn-cs"/>
               </a:rPr>
-              <a:t>Doctrine</a:t>
+              <a:t>+</a:t>
             </a:r>
             <a:br>
               <a:rPr kumimoji="0" lang="fr-FR" sz="1600" b="0" i="0" u="none" strike="noStrike" kern="1200" cap="none" spc="0" normalizeH="0" baseline="0" noProof="0" dirty="0">
@@ -6926,7 +7167,7 @@
                 <a:ea typeface="+mn-ea"/>
                 <a:cs typeface="+mn-cs"/>
               </a:rPr>
-              <a:t>Repository</a:t>
+              <a:t>CSS personnalisé</a:t>
             </a:r>
             <a:br>
               <a:rPr kumimoji="0" lang="fr-FR" sz="1600" b="0" i="0" u="none" strike="noStrike" kern="1200" cap="none" spc="0" normalizeH="0" baseline="0" noProof="0" dirty="0">
@@ -6944,171 +7185,6 @@
                 <a:cs typeface="+mn-cs"/>
               </a:rPr>
             </a:br>
-            <a:br>
-              <a:rPr kumimoji="0" lang="fr-FR" sz="1600" b="0" i="0" u="none" strike="noStrike" kern="1200" cap="none" spc="0" normalizeH="0" baseline="0" noProof="0" dirty="0">
-                <a:ln>
-                  <a:noFill/>
-                </a:ln>
-                <a:solidFill>
-                  <a:srgbClr val="2C2522"/>
-                </a:solidFill>
-                <a:effectLst/>
-                <a:uLnTx/>
-                <a:uFillTx/>
-                <a:latin typeface="Calibri"/>
-                <a:ea typeface="+mn-ea"/>
-                <a:cs typeface="+mn-cs"/>
-              </a:rPr>
-            </a:br>
-            <a:r>
-              <a:rPr kumimoji="0" lang="fr-FR" sz="1600" b="0" i="0" u="none" strike="noStrike" kern="1200" cap="none" spc="0" normalizeH="0" baseline="0" noProof="0" dirty="0">
-                <a:ln>
-                  <a:noFill/>
-                </a:ln>
-                <a:solidFill>
-                  <a:srgbClr val="2C2522"/>
-                </a:solidFill>
-                <a:effectLst/>
-                <a:uLnTx/>
-                <a:uFillTx/>
-                <a:latin typeface="Calibri"/>
-                <a:ea typeface="+mn-ea"/>
-                <a:cs typeface="+mn-cs"/>
-              </a:rPr>
-              <a:t>Product</a:t>
-            </a:r>
-            <a:br>
-              <a:rPr kumimoji="0" lang="fr-FR" sz="1600" b="0" i="0" u="none" strike="noStrike" kern="1200" cap="none" spc="0" normalizeH="0" baseline="0" noProof="0" dirty="0">
-                <a:ln>
-                  <a:noFill/>
-                </a:ln>
-                <a:solidFill>
-                  <a:srgbClr val="2C2522"/>
-                </a:solidFill>
-                <a:effectLst/>
-                <a:uLnTx/>
-                <a:uFillTx/>
-                <a:latin typeface="Calibri"/>
-                <a:ea typeface="+mn-ea"/>
-                <a:cs typeface="+mn-cs"/>
-              </a:rPr>
-            </a:br>
-            <a:r>
-              <a:rPr kumimoji="0" lang="fr-FR" sz="1600" b="0" i="0" u="none" strike="noStrike" kern="1200" cap="none" spc="0" normalizeH="0" baseline="0" noProof="0" dirty="0" err="1">
-                <a:ln>
-                  <a:noFill/>
-                </a:ln>
-                <a:solidFill>
-                  <a:srgbClr val="2C2522"/>
-                </a:solidFill>
-                <a:effectLst/>
-                <a:uLnTx/>
-                <a:uFillTx/>
-                <a:latin typeface="Calibri"/>
-                <a:ea typeface="+mn-ea"/>
-                <a:cs typeface="+mn-cs"/>
-              </a:rPr>
-              <a:t>Category</a:t>
-            </a:r>
-            <a:br>
-              <a:rPr kumimoji="0" lang="fr-FR" sz="1600" b="0" i="0" u="none" strike="noStrike" kern="1200" cap="none" spc="0" normalizeH="0" baseline="0" noProof="0" dirty="0">
-                <a:ln>
-                  <a:noFill/>
-                </a:ln>
-                <a:solidFill>
-                  <a:srgbClr val="2C2522"/>
-                </a:solidFill>
-                <a:effectLst/>
-                <a:uLnTx/>
-                <a:uFillTx/>
-                <a:latin typeface="Calibri"/>
-                <a:ea typeface="+mn-ea"/>
-                <a:cs typeface="+mn-cs"/>
-              </a:rPr>
-            </a:br>
-            <a:r>
-              <a:rPr kumimoji="0" lang="fr-FR" sz="1600" b="0" i="0" u="none" strike="noStrike" kern="1200" cap="none" spc="0" normalizeH="0" baseline="0" noProof="0" dirty="0">
-                <a:ln>
-                  <a:noFill/>
-                </a:ln>
-                <a:solidFill>
-                  <a:srgbClr val="2C2522"/>
-                </a:solidFill>
-                <a:effectLst/>
-                <a:uLnTx/>
-                <a:uFillTx/>
-                <a:latin typeface="Calibri"/>
-                <a:ea typeface="+mn-ea"/>
-                <a:cs typeface="+mn-cs"/>
-              </a:rPr>
-              <a:t>User</a:t>
-            </a:r>
-            <a:br>
-              <a:rPr kumimoji="0" lang="fr-FR" sz="1600" b="0" i="0" u="none" strike="noStrike" kern="1200" cap="none" spc="0" normalizeH="0" baseline="0" noProof="0" dirty="0">
-                <a:ln>
-                  <a:noFill/>
-                </a:ln>
-                <a:solidFill>
-                  <a:srgbClr val="2C2522"/>
-                </a:solidFill>
-                <a:effectLst/>
-                <a:uLnTx/>
-                <a:uFillTx/>
-                <a:latin typeface="Calibri"/>
-                <a:ea typeface="+mn-ea"/>
-                <a:cs typeface="+mn-cs"/>
-              </a:rPr>
-            </a:br>
-            <a:r>
-              <a:rPr kumimoji="0" lang="fr-FR" sz="1600" b="0" i="0" u="none" strike="noStrike" kern="1200" cap="none" spc="0" normalizeH="0" baseline="0" noProof="0" dirty="0" err="1">
-                <a:ln>
-                  <a:noFill/>
-                </a:ln>
-                <a:solidFill>
-                  <a:srgbClr val="2C2522"/>
-                </a:solidFill>
-                <a:effectLst/>
-                <a:uLnTx/>
-                <a:uFillTx/>
-                <a:latin typeface="Calibri"/>
-                <a:ea typeface="+mn-ea"/>
-                <a:cs typeface="+mn-cs"/>
-              </a:rPr>
-              <a:t>Review</a:t>
-            </a:r>
-            <a:br>
-              <a:rPr kumimoji="0" lang="fr-FR" sz="1600" b="0" i="0" u="none" strike="noStrike" kern="1200" cap="none" spc="0" normalizeH="0" baseline="0" noProof="0" dirty="0">
-                <a:ln>
-                  <a:noFill/>
-                </a:ln>
-                <a:solidFill>
-                  <a:srgbClr val="2C2522"/>
-                </a:solidFill>
-                <a:effectLst/>
-                <a:uLnTx/>
-                <a:uFillTx/>
-                <a:latin typeface="Calibri"/>
-                <a:ea typeface="+mn-ea"/>
-                <a:cs typeface="+mn-cs"/>
-              </a:rPr>
-            </a:br>
-            <a:r>
-              <a:rPr kumimoji="0" lang="fr-FR" sz="1600" b="0" i="0" u="none" strike="noStrike" kern="1200" cap="none" spc="0" normalizeH="0" baseline="0" noProof="0" dirty="0" err="1">
-                <a:ln>
-                  <a:noFill/>
-                </a:ln>
-                <a:solidFill>
-                  <a:srgbClr val="2C2522"/>
-                </a:solidFill>
-                <a:effectLst/>
-                <a:uLnTx/>
-                <a:uFillTx/>
-                <a:latin typeface="Calibri"/>
-                <a:ea typeface="+mn-ea"/>
-                <a:cs typeface="+mn-cs"/>
-              </a:rPr>
-              <a:t>QuoteRequest</a:t>
-            </a:r>
             <a:endParaRPr kumimoji="0" lang="fr-FR" sz="1600" b="0" i="0" u="none" strike="noStrike" kern="1200" cap="none" spc="0" normalizeH="0" baseline="0" noProof="0" dirty="0">
               <a:ln>
                 <a:noFill/>
@@ -7125,6 +7201,420 @@
             </a:endParaRPr>
           </a:p>
           <a:p>
+            <a:pPr marL="0" marR="0" lvl="0" indent="0" algn="l" defTabSz="457200" rtl="0" eaLnBrk="1" fontAlgn="auto" latinLnBrk="0" hangingPunct="1">
+              <a:lnSpc>
+                <a:spcPct val="100000"/>
+              </a:lnSpc>
+              <a:spcBef>
+                <a:spcPts val="700"/>
+              </a:spcBef>
+              <a:spcAft>
+                <a:spcPts val="0"/>
+              </a:spcAft>
+              <a:buClrTx/>
+              <a:buSzTx/>
+              <a:buFontTx/>
+              <a:buNone/>
+              <a:tabLst/>
+              <a:defRPr sz="1200">
+                <a:solidFill>
+                  <a:srgbClr val="2C2522"/>
+                </a:solidFill>
+              </a:defRPr>
+            </a:pPr>
+            <a:r>
+              <a:rPr kumimoji="0" lang="fr-FR" sz="1600" b="0" i="0" u="none" strike="noStrike" kern="1200" cap="none" spc="0" normalizeH="0" baseline="0" noProof="0" dirty="0">
+                <a:ln>
+                  <a:noFill/>
+                </a:ln>
+                <a:solidFill>
+                  <a:srgbClr val="2C2522"/>
+                </a:solidFill>
+                <a:effectLst/>
+                <a:uLnTx/>
+                <a:uFillTx/>
+                <a:latin typeface="Calibri"/>
+                <a:ea typeface="+mn-ea"/>
+                <a:cs typeface="+mn-cs"/>
+              </a:rPr>
+              <a:t>Exemples de classes personnalisées :</a:t>
+            </a:r>
+          </a:p>
+          <a:p>
+            <a:pPr marL="0" marR="0" lvl="0" indent="0" algn="l" defTabSz="457200" rtl="0" eaLnBrk="1" fontAlgn="auto" latinLnBrk="0" hangingPunct="1">
+              <a:lnSpc>
+                <a:spcPct val="100000"/>
+              </a:lnSpc>
+              <a:spcBef>
+                <a:spcPts val="700"/>
+              </a:spcBef>
+              <a:spcAft>
+                <a:spcPts val="0"/>
+              </a:spcAft>
+              <a:buClrTx/>
+              <a:buSzTx/>
+              <a:buFontTx/>
+              <a:buNone/>
+              <a:tabLst/>
+              <a:defRPr sz="1200">
+                <a:solidFill>
+                  <a:srgbClr val="2C2522"/>
+                </a:solidFill>
+              </a:defRPr>
+            </a:pPr>
+            <a:br>
+              <a:rPr kumimoji="0" lang="fr-FR" sz="1600" b="0" i="0" u="none" strike="noStrike" kern="1200" cap="none" spc="0" normalizeH="0" baseline="0" noProof="0" dirty="0">
+                <a:ln>
+                  <a:noFill/>
+                </a:ln>
+                <a:solidFill>
+                  <a:srgbClr val="2C2522"/>
+                </a:solidFill>
+                <a:effectLst/>
+                <a:uLnTx/>
+                <a:uFillTx/>
+                <a:latin typeface="Calibri"/>
+                <a:ea typeface="+mn-ea"/>
+                <a:cs typeface="+mn-cs"/>
+              </a:rPr>
+            </a:br>
+            <a:r>
+              <a:rPr kumimoji="0" lang="fr-FR" sz="1600" b="0" i="0" u="none" strike="noStrike" kern="1200" cap="none" spc="0" normalizeH="0" baseline="0" noProof="0" dirty="0">
+                <a:ln>
+                  <a:noFill/>
+                </a:ln>
+                <a:solidFill>
+                  <a:srgbClr val="2C2522"/>
+                </a:solidFill>
+                <a:effectLst/>
+                <a:uLnTx/>
+                <a:uFillTx/>
+                <a:latin typeface="Calibri"/>
+                <a:ea typeface="+mn-ea"/>
+                <a:cs typeface="+mn-cs"/>
+              </a:rPr>
+              <a:t>.</a:t>
+            </a:r>
+            <a:r>
+              <a:rPr kumimoji="0" lang="fr-FR" sz="1600" b="0" i="0" u="none" strike="noStrike" kern="1200" cap="none" spc="0" normalizeH="0" baseline="0" noProof="0" dirty="0" err="1">
+                <a:ln>
+                  <a:noFill/>
+                </a:ln>
+                <a:solidFill>
+                  <a:srgbClr val="2C2522"/>
+                </a:solidFill>
+                <a:effectLst/>
+                <a:uLnTx/>
+                <a:uFillTx/>
+                <a:latin typeface="Calibri"/>
+                <a:ea typeface="+mn-ea"/>
+                <a:cs typeface="+mn-cs"/>
+              </a:rPr>
+              <a:t>hero</a:t>
+            </a:r>
+            <a:r>
+              <a:rPr kumimoji="0" lang="fr-FR" sz="1600" b="0" i="0" u="none" strike="noStrike" kern="1200" cap="none" spc="0" normalizeH="0" baseline="0" noProof="0" dirty="0">
+                <a:ln>
+                  <a:noFill/>
+                </a:ln>
+                <a:solidFill>
+                  <a:srgbClr val="2C2522"/>
+                </a:solidFill>
+                <a:effectLst/>
+                <a:uLnTx/>
+                <a:uFillTx/>
+                <a:latin typeface="Calibri"/>
+                <a:ea typeface="+mn-ea"/>
+                <a:cs typeface="+mn-cs"/>
+              </a:rPr>
+              <a:t>-section</a:t>
+            </a:r>
+            <a:br>
+              <a:rPr kumimoji="0" lang="fr-FR" sz="1600" b="0" i="0" u="none" strike="noStrike" kern="1200" cap="none" spc="0" normalizeH="0" baseline="0" noProof="0" dirty="0">
+                <a:ln>
+                  <a:noFill/>
+                </a:ln>
+                <a:solidFill>
+                  <a:srgbClr val="2C2522"/>
+                </a:solidFill>
+                <a:effectLst/>
+                <a:uLnTx/>
+                <a:uFillTx/>
+                <a:latin typeface="Calibri"/>
+                <a:ea typeface="+mn-ea"/>
+                <a:cs typeface="+mn-cs"/>
+              </a:rPr>
+            </a:br>
+            <a:r>
+              <a:rPr kumimoji="0" lang="fr-FR" sz="1600" b="0" i="0" u="none" strike="noStrike" kern="1200" cap="none" spc="0" normalizeH="0" baseline="0" noProof="0" dirty="0">
+                <a:ln>
+                  <a:noFill/>
+                </a:ln>
+                <a:solidFill>
+                  <a:srgbClr val="2C2522"/>
+                </a:solidFill>
+                <a:effectLst/>
+                <a:uLnTx/>
+                <a:uFillTx/>
+                <a:latin typeface="Calibri"/>
+                <a:ea typeface="+mn-ea"/>
+                <a:cs typeface="+mn-cs"/>
+              </a:rPr>
+              <a:t>.</a:t>
+            </a:r>
+            <a:r>
+              <a:rPr kumimoji="0" lang="fr-FR" sz="1600" b="0" i="0" u="none" strike="noStrike" kern="1200" cap="none" spc="0" normalizeH="0" baseline="0" noProof="0" dirty="0" err="1">
+                <a:ln>
+                  <a:noFill/>
+                </a:ln>
+                <a:solidFill>
+                  <a:srgbClr val="2C2522"/>
+                </a:solidFill>
+                <a:effectLst/>
+                <a:uLnTx/>
+                <a:uFillTx/>
+                <a:latin typeface="Calibri"/>
+                <a:ea typeface="+mn-ea"/>
+                <a:cs typeface="+mn-cs"/>
+              </a:rPr>
+              <a:t>hero-title</a:t>
+            </a:r>
+            <a:br>
+              <a:rPr kumimoji="0" lang="fr-FR" sz="1600" b="0" i="0" u="none" strike="noStrike" kern="1200" cap="none" spc="0" normalizeH="0" baseline="0" noProof="0" dirty="0">
+                <a:ln>
+                  <a:noFill/>
+                </a:ln>
+                <a:solidFill>
+                  <a:srgbClr val="2C2522"/>
+                </a:solidFill>
+                <a:effectLst/>
+                <a:uLnTx/>
+                <a:uFillTx/>
+                <a:latin typeface="Calibri"/>
+                <a:ea typeface="+mn-ea"/>
+                <a:cs typeface="+mn-cs"/>
+              </a:rPr>
+            </a:br>
+            <a:r>
+              <a:rPr kumimoji="0" lang="fr-FR" sz="1600" b="0" i="0" u="none" strike="noStrike" kern="1200" cap="none" spc="0" normalizeH="0" baseline="0" noProof="0" dirty="0">
+                <a:ln>
+                  <a:noFill/>
+                </a:ln>
+                <a:solidFill>
+                  <a:srgbClr val="2C2522"/>
+                </a:solidFill>
+                <a:effectLst/>
+                <a:uLnTx/>
+                <a:uFillTx/>
+                <a:latin typeface="Calibri"/>
+                <a:ea typeface="+mn-ea"/>
+                <a:cs typeface="+mn-cs"/>
+              </a:rPr>
+              <a:t>.</a:t>
+            </a:r>
+            <a:r>
+              <a:rPr kumimoji="0" lang="fr-FR" sz="1600" b="0" i="0" u="none" strike="noStrike" kern="1200" cap="none" spc="0" normalizeH="0" baseline="0" noProof="0" dirty="0" err="1">
+                <a:ln>
+                  <a:noFill/>
+                </a:ln>
+                <a:solidFill>
+                  <a:srgbClr val="2C2522"/>
+                </a:solidFill>
+                <a:effectLst/>
+                <a:uLnTx/>
+                <a:uFillTx/>
+                <a:latin typeface="Calibri"/>
+                <a:ea typeface="+mn-ea"/>
+                <a:cs typeface="+mn-cs"/>
+              </a:rPr>
+              <a:t>hero-subtitle</a:t>
+            </a:r>
+            <a:br>
+              <a:rPr kumimoji="0" lang="fr-FR" sz="1600" b="0" i="0" u="none" strike="noStrike" kern="1200" cap="none" spc="0" normalizeH="0" baseline="0" noProof="0" dirty="0">
+                <a:ln>
+                  <a:noFill/>
+                </a:ln>
+                <a:solidFill>
+                  <a:srgbClr val="2C2522"/>
+                </a:solidFill>
+                <a:effectLst/>
+                <a:uLnTx/>
+                <a:uFillTx/>
+                <a:latin typeface="Calibri"/>
+                <a:ea typeface="+mn-ea"/>
+                <a:cs typeface="+mn-cs"/>
+              </a:rPr>
+            </a:br>
+            <a:r>
+              <a:rPr kumimoji="0" lang="fr-FR" sz="1600" b="0" i="0" u="none" strike="noStrike" kern="1200" cap="none" spc="0" normalizeH="0" baseline="0" noProof="0" dirty="0">
+                <a:ln>
+                  <a:noFill/>
+                </a:ln>
+                <a:solidFill>
+                  <a:srgbClr val="2C2522"/>
+                </a:solidFill>
+                <a:effectLst/>
+                <a:uLnTx/>
+                <a:uFillTx/>
+                <a:latin typeface="Calibri"/>
+                <a:ea typeface="+mn-ea"/>
+                <a:cs typeface="+mn-cs"/>
+              </a:rPr>
+              <a:t>.service-</a:t>
+            </a:r>
+            <a:r>
+              <a:rPr kumimoji="0" lang="fr-FR" sz="1600" b="0" i="0" u="none" strike="noStrike" kern="1200" cap="none" spc="0" normalizeH="0" baseline="0" noProof="0" dirty="0" err="1">
+                <a:ln>
+                  <a:noFill/>
+                </a:ln>
+                <a:solidFill>
+                  <a:srgbClr val="2C2522"/>
+                </a:solidFill>
+                <a:effectLst/>
+                <a:uLnTx/>
+                <a:uFillTx/>
+                <a:latin typeface="Calibri"/>
+                <a:ea typeface="+mn-ea"/>
+                <a:cs typeface="+mn-cs"/>
+              </a:rPr>
+              <a:t>card</a:t>
+            </a:r>
+            <a:br>
+              <a:rPr kumimoji="0" lang="fr-FR" sz="1600" b="0" i="0" u="none" strike="noStrike" kern="1200" cap="none" spc="0" normalizeH="0" baseline="0" noProof="0" dirty="0">
+                <a:ln>
+                  <a:noFill/>
+                </a:ln>
+                <a:solidFill>
+                  <a:srgbClr val="2C2522"/>
+                </a:solidFill>
+                <a:effectLst/>
+                <a:uLnTx/>
+                <a:uFillTx/>
+                <a:latin typeface="Calibri"/>
+                <a:ea typeface="+mn-ea"/>
+                <a:cs typeface="+mn-cs"/>
+              </a:rPr>
+            </a:br>
+            <a:r>
+              <a:rPr kumimoji="0" lang="fr-FR" sz="1600" b="0" i="0" u="none" strike="noStrike" kern="1200" cap="none" spc="0" normalizeH="0" baseline="0" noProof="0" dirty="0">
+                <a:ln>
+                  <a:noFill/>
+                </a:ln>
+                <a:solidFill>
+                  <a:srgbClr val="2C2522"/>
+                </a:solidFill>
+                <a:effectLst/>
+                <a:uLnTx/>
+                <a:uFillTx/>
+                <a:latin typeface="Calibri"/>
+                <a:ea typeface="+mn-ea"/>
+                <a:cs typeface="+mn-cs"/>
+              </a:rPr>
+              <a:t>.</a:t>
+            </a:r>
+            <a:r>
+              <a:rPr kumimoji="0" lang="fr-FR" sz="1600" b="0" i="0" u="none" strike="noStrike" kern="1200" cap="none" spc="0" normalizeH="0" baseline="0" noProof="0" dirty="0" err="1">
+                <a:ln>
+                  <a:noFill/>
+                </a:ln>
+                <a:solidFill>
+                  <a:srgbClr val="2C2522"/>
+                </a:solidFill>
+                <a:effectLst/>
+                <a:uLnTx/>
+                <a:uFillTx/>
+                <a:latin typeface="Calibri"/>
+                <a:ea typeface="+mn-ea"/>
+                <a:cs typeface="+mn-cs"/>
+              </a:rPr>
+              <a:t>feature</a:t>
+            </a:r>
+            <a:r>
+              <a:rPr kumimoji="0" lang="fr-FR" sz="1600" b="0" i="0" u="none" strike="noStrike" kern="1200" cap="none" spc="0" normalizeH="0" baseline="0" noProof="0" dirty="0">
+                <a:ln>
+                  <a:noFill/>
+                </a:ln>
+                <a:solidFill>
+                  <a:srgbClr val="2C2522"/>
+                </a:solidFill>
+                <a:effectLst/>
+                <a:uLnTx/>
+                <a:uFillTx/>
+                <a:latin typeface="Calibri"/>
+                <a:ea typeface="+mn-ea"/>
+                <a:cs typeface="+mn-cs"/>
+              </a:rPr>
+              <a:t>-bar</a:t>
+            </a:r>
+            <a:br>
+              <a:rPr kumimoji="0" lang="fr-FR" sz="1600" b="0" i="0" u="none" strike="noStrike" kern="1200" cap="none" spc="0" normalizeH="0" baseline="0" noProof="0" dirty="0">
+                <a:ln>
+                  <a:noFill/>
+                </a:ln>
+                <a:solidFill>
+                  <a:srgbClr val="2C2522"/>
+                </a:solidFill>
+                <a:effectLst/>
+                <a:uLnTx/>
+                <a:uFillTx/>
+                <a:latin typeface="Calibri"/>
+                <a:ea typeface="+mn-ea"/>
+                <a:cs typeface="+mn-cs"/>
+              </a:rPr>
+            </a:br>
+            <a:r>
+              <a:rPr kumimoji="0" lang="fr-FR" sz="1600" b="0" i="0" u="none" strike="noStrike" kern="1200" cap="none" spc="0" normalizeH="0" baseline="0" noProof="0" dirty="0">
+                <a:ln>
+                  <a:noFill/>
+                </a:ln>
+                <a:solidFill>
+                  <a:srgbClr val="2C2522"/>
+                </a:solidFill>
+                <a:effectLst/>
+                <a:uLnTx/>
+                <a:uFillTx/>
+                <a:latin typeface="Calibri"/>
+                <a:ea typeface="+mn-ea"/>
+                <a:cs typeface="+mn-cs"/>
+              </a:rPr>
+              <a:t>.</a:t>
+            </a:r>
+            <a:r>
+              <a:rPr kumimoji="0" lang="fr-FR" sz="1600" b="0" i="0" u="none" strike="noStrike" kern="1200" cap="none" spc="0" normalizeH="0" baseline="0" noProof="0" dirty="0" err="1">
+                <a:ln>
+                  <a:noFill/>
+                </a:ln>
+                <a:solidFill>
+                  <a:srgbClr val="2C2522"/>
+                </a:solidFill>
+                <a:effectLst/>
+                <a:uLnTx/>
+                <a:uFillTx/>
+                <a:latin typeface="Calibri"/>
+                <a:ea typeface="+mn-ea"/>
+                <a:cs typeface="+mn-cs"/>
+              </a:rPr>
+              <a:t>btn</a:t>
+            </a:r>
+            <a:r>
+              <a:rPr kumimoji="0" lang="fr-FR" sz="1600" b="0" i="0" u="none" strike="noStrike" kern="1200" cap="none" spc="0" normalizeH="0" baseline="0" noProof="0" dirty="0">
+                <a:ln>
+                  <a:noFill/>
+                </a:ln>
+                <a:solidFill>
+                  <a:srgbClr val="2C2522"/>
+                </a:solidFill>
+                <a:effectLst/>
+                <a:uLnTx/>
+                <a:uFillTx/>
+                <a:latin typeface="Calibri"/>
+                <a:ea typeface="+mn-ea"/>
+                <a:cs typeface="+mn-cs"/>
+              </a:rPr>
+              <a:t>-gold</a:t>
+            </a:r>
+          </a:p>
+          <a:p>
             <a:pPr algn="ctr"/>
             <a:endParaRPr lang="fr-FR" noProof="0" dirty="0"/>
           </a:p>
@@ -7132,14 +7622,222 @@
       </p:sp>
       <p:sp>
         <p:nvSpPr>
-          <p:cNvPr id="6" name="Rounded Rectangle 5"/>
+          <p:cNvPr id="10" name="Rectangle 9">
+            <a:extLst>
+              <a:ext uri="{FF2B5EF4-FFF2-40B4-BE49-F238E27FC236}">
+                <a16:creationId xmlns:a16="http://schemas.microsoft.com/office/drawing/2014/main" id="{CC323CE1-B360-C388-7F73-07990404F7B2}"/>
+              </a:ext>
+            </a:extLst>
+          </p:cNvPr>
           <p:cNvSpPr/>
           <p:nvPr/>
         </p:nvSpPr>
         <p:spPr>
           <a:xfrm>
-            <a:off x="4389120" y="928189"/>
-            <a:ext cx="3383280" cy="2500811"/>
+            <a:off x="640080" y="6419088"/>
+            <a:ext cx="10881360" cy="18288"/>
+          </a:xfrm>
+          <a:prstGeom prst="rect">
+            <a:avLst/>
+          </a:prstGeom>
+          <a:solidFill>
+            <a:srgbClr val="EFEAE0"/>
+          </a:solidFill>
+          <a:ln>
+            <a:noFill/>
+          </a:ln>
+        </p:spPr>
+        <p:style>
+          <a:lnRef idx="1">
+            <a:schemeClr val="accent1"/>
+          </a:lnRef>
+          <a:fillRef idx="3">
+            <a:schemeClr val="accent1"/>
+          </a:fillRef>
+          <a:effectRef idx="2">
+            <a:schemeClr val="accent1"/>
+          </a:effectRef>
+          <a:fontRef idx="minor">
+            <a:schemeClr val="lt1"/>
+          </a:fontRef>
+        </p:style>
+        <p:txBody>
+          <a:bodyPr rtlCol="0" anchor="ctr"/>
+          <a:lstStyle/>
+          <a:p>
+            <a:pPr algn="ctr"/>
+            <a:endParaRPr lang="fr-FR" noProof="0" dirty="0"/>
+          </a:p>
+        </p:txBody>
+      </p:sp>
+      <p:sp>
+        <p:nvSpPr>
+          <p:cNvPr id="11" name="TextBox 10">
+            <a:extLst>
+              <a:ext uri="{FF2B5EF4-FFF2-40B4-BE49-F238E27FC236}">
+                <a16:creationId xmlns:a16="http://schemas.microsoft.com/office/drawing/2014/main" id="{6D582ACA-0905-337F-D991-B5E086857CF7}"/>
+              </a:ext>
+            </a:extLst>
+          </p:cNvPr>
+          <p:cNvSpPr txBox="1"/>
+          <p:nvPr/>
+        </p:nvSpPr>
+        <p:spPr>
+          <a:xfrm>
+            <a:off x="10789920" y="6473952"/>
+            <a:ext cx="640080" cy="182880"/>
+          </a:xfrm>
+          <a:prstGeom prst="rect">
+            <a:avLst/>
+          </a:prstGeom>
+          <a:noFill/>
+        </p:spPr>
+        <p:txBody>
+          <a:bodyPr wrap="none">
+            <a:spAutoFit/>
+          </a:bodyPr>
+          <a:lstStyle/>
+          <a:p>
+            <a:pPr algn="r"/>
+            <a:r>
+              <a:rPr lang="fr-FR" sz="900" noProof="0" dirty="0">
+                <a:solidFill>
+                  <a:srgbClr val="69625E"/>
+                </a:solidFill>
+              </a:rPr>
+              <a:t>7</a:t>
+            </a:r>
+          </a:p>
+        </p:txBody>
+      </p:sp>
+      <p:pic>
+        <p:nvPicPr>
+          <p:cNvPr id="9" name="Image 8">
+            <a:extLst>
+              <a:ext uri="{FF2B5EF4-FFF2-40B4-BE49-F238E27FC236}">
+                <a16:creationId xmlns:a16="http://schemas.microsoft.com/office/drawing/2014/main" id="{6FF85FC3-DB46-5BDA-8A06-685BC29B9BC2}"/>
+              </a:ext>
+            </a:extLst>
+          </p:cNvPr>
+          <p:cNvPicPr>
+            <a:picLocks noChangeAspect="1"/>
+          </p:cNvPicPr>
+          <p:nvPr/>
+        </p:nvPicPr>
+        <p:blipFill>
+          <a:blip r:embed="rId3"/>
+          <a:stretch>
+            <a:fillRect/>
+          </a:stretch>
+        </p:blipFill>
+        <p:spPr>
+          <a:xfrm>
+            <a:off x="3960156" y="209451"/>
+            <a:ext cx="6430272" cy="6173061"/>
+          </a:xfrm>
+          <a:prstGeom prst="rect">
+            <a:avLst/>
+          </a:prstGeom>
+        </p:spPr>
+      </p:pic>
+    </p:spTree>
+    <p:extLst>
+      <p:ext uri="{BB962C8B-B14F-4D97-AF65-F5344CB8AC3E}">
+        <p14:creationId xmlns:p14="http://schemas.microsoft.com/office/powerpoint/2010/main" val="3644050097"/>
+      </p:ext>
+    </p:extLst>
+  </p:cSld>
+  <p:clrMapOvr>
+    <a:masterClrMapping/>
+  </p:clrMapOvr>
+</p:sld>
+</file>
+
+<file path=ppt/slides/slide11.xml><?xml version="1.0" encoding="utf-8"?>
+<p:sld xmlns:a="http://schemas.openxmlformats.org/drawingml/2006/main" xmlns:r="http://schemas.openxmlformats.org/officeDocument/2006/relationships" xmlns:p="http://schemas.openxmlformats.org/presentationml/2006/main">
+  <p:cSld>
+    <p:spTree>
+      <p:nvGrpSpPr>
+        <p:cNvPr id="1" name="">
+          <a:extLst>
+            <a:ext uri="{FF2B5EF4-FFF2-40B4-BE49-F238E27FC236}">
+              <a16:creationId xmlns:a16="http://schemas.microsoft.com/office/drawing/2014/main" id="{9290EADE-BC71-F356-3419-501EFDB9E2E2}"/>
+            </a:ext>
+          </a:extLst>
+        </p:cNvPr>
+        <p:cNvGrpSpPr/>
+        <p:nvPr/>
+      </p:nvGrpSpPr>
+      <p:grpSpPr>
+        <a:xfrm>
+          <a:off x="0" y="0"/>
+          <a:ext cx="0" cy="0"/>
+          <a:chOff x="0" y="0"/>
+          <a:chExt cx="0" cy="0"/>
+        </a:xfrm>
+      </p:grpSpPr>
+      <p:sp>
+        <p:nvSpPr>
+          <p:cNvPr id="3" name="TextBox 2">
+            <a:extLst>
+              <a:ext uri="{FF2B5EF4-FFF2-40B4-BE49-F238E27FC236}">
+                <a16:creationId xmlns:a16="http://schemas.microsoft.com/office/drawing/2014/main" id="{285E551A-8839-452F-1D54-747D4D010CD6}"/>
+              </a:ext>
+            </a:extLst>
+          </p:cNvPr>
+          <p:cNvSpPr txBox="1"/>
+          <p:nvPr/>
+        </p:nvSpPr>
+        <p:spPr>
+          <a:xfrm>
+            <a:off x="640080" y="411480"/>
+            <a:ext cx="10972800" cy="594360"/>
+          </a:xfrm>
+          <a:prstGeom prst="rect">
+            <a:avLst/>
+          </a:prstGeom>
+          <a:noFill/>
+        </p:spPr>
+        <p:txBody>
+          <a:bodyPr wrap="none">
+            <a:spAutoFit/>
+          </a:bodyPr>
+          <a:lstStyle/>
+          <a:p>
+            <a:r>
+              <a:rPr lang="fr-FR" sz="2800" b="1" noProof="0" dirty="0" err="1">
+                <a:solidFill>
+                  <a:srgbClr val="2C2522"/>
+                </a:solidFill>
+                <a:latin typeface="Aptos Display"/>
+              </a:rPr>
+              <a:t>Front-end</a:t>
+            </a:r>
+            <a:endParaRPr lang="fr-FR" sz="2800" b="1" noProof="0" dirty="0">
+              <a:solidFill>
+                <a:srgbClr val="2C2522"/>
+              </a:solidFill>
+              <a:latin typeface="Aptos Display"/>
+            </a:endParaRPr>
+          </a:p>
+        </p:txBody>
+      </p:sp>
+      <p:sp>
+        <p:nvSpPr>
+          <p:cNvPr id="8" name="Rounded Rectangle 7">
+            <a:extLst>
+              <a:ext uri="{FF2B5EF4-FFF2-40B4-BE49-F238E27FC236}">
+                <a16:creationId xmlns:a16="http://schemas.microsoft.com/office/drawing/2014/main" id="{7571771E-2E0E-B42B-1EFE-36DE8221317B}"/>
+              </a:ext>
+            </a:extLst>
+          </p:cNvPr>
+          <p:cNvSpPr/>
+          <p:nvPr/>
+        </p:nvSpPr>
+        <p:spPr>
+          <a:xfrm>
+            <a:off x="378563" y="1460864"/>
+            <a:ext cx="2469569" cy="4114800"/>
           </a:xfrm>
           <a:prstGeom prst="roundRect">
             <a:avLst/>
@@ -7205,6 +7903,783 @@
                 <a:ea typeface="+mn-ea"/>
                 <a:cs typeface="+mn-cs"/>
               </a:rPr>
+              <a:t>JAVASCRIPT</a:t>
+            </a:r>
+            <a:br>
+              <a:rPr kumimoji="0" lang="fr-FR" sz="1600" b="0" i="0" u="none" strike="noStrike" kern="1200" cap="none" spc="0" normalizeH="0" baseline="0" noProof="0" dirty="0">
+                <a:ln>
+                  <a:noFill/>
+                </a:ln>
+                <a:solidFill>
+                  <a:srgbClr val="2C2522"/>
+                </a:solidFill>
+                <a:effectLst/>
+                <a:uLnTx/>
+                <a:uFillTx/>
+                <a:latin typeface="Calibri"/>
+                <a:ea typeface="+mn-ea"/>
+                <a:cs typeface="+mn-cs"/>
+              </a:rPr>
+            </a:br>
+            <a:br>
+              <a:rPr kumimoji="0" lang="fr-FR" sz="1600" b="0" i="0" u="none" strike="noStrike" kern="1200" cap="none" spc="0" normalizeH="0" baseline="0" noProof="0" dirty="0">
+                <a:ln>
+                  <a:noFill/>
+                </a:ln>
+                <a:solidFill>
+                  <a:srgbClr val="2C2522"/>
+                </a:solidFill>
+                <a:effectLst/>
+                <a:uLnTx/>
+                <a:uFillTx/>
+                <a:latin typeface="Calibri"/>
+                <a:ea typeface="+mn-ea"/>
+                <a:cs typeface="+mn-cs"/>
+              </a:rPr>
+            </a:br>
+            <a:r>
+              <a:rPr kumimoji="0" lang="fr-FR" sz="1600" b="0" i="0" u="none" strike="noStrike" kern="1200" cap="none" spc="0" normalizeH="0" baseline="0" noProof="0" dirty="0">
+                <a:ln>
+                  <a:noFill/>
+                </a:ln>
+                <a:solidFill>
+                  <a:srgbClr val="2C2522"/>
+                </a:solidFill>
+                <a:effectLst/>
+                <a:uLnTx/>
+                <a:uFillTx/>
+                <a:latin typeface="Calibri"/>
+                <a:ea typeface="+mn-ea"/>
+                <a:cs typeface="+mn-cs"/>
+              </a:rPr>
+              <a:t>Bootstrap JS pour les interactions courantes.</a:t>
+            </a:r>
+            <a:br>
+              <a:rPr kumimoji="0" lang="fr-FR" sz="1600" b="0" i="0" u="none" strike="noStrike" kern="1200" cap="none" spc="0" normalizeH="0" baseline="0" noProof="0" dirty="0">
+                <a:ln>
+                  <a:noFill/>
+                </a:ln>
+                <a:solidFill>
+                  <a:srgbClr val="2C2522"/>
+                </a:solidFill>
+                <a:effectLst/>
+                <a:uLnTx/>
+                <a:uFillTx/>
+                <a:latin typeface="Calibri"/>
+                <a:ea typeface="+mn-ea"/>
+                <a:cs typeface="+mn-cs"/>
+              </a:rPr>
+            </a:br>
+            <a:br>
+              <a:rPr kumimoji="0" lang="fr-FR" sz="1600" b="0" i="0" u="none" strike="noStrike" kern="1200" cap="none" spc="0" normalizeH="0" baseline="0" noProof="0" dirty="0">
+                <a:ln>
+                  <a:noFill/>
+                </a:ln>
+                <a:solidFill>
+                  <a:srgbClr val="2C2522"/>
+                </a:solidFill>
+                <a:effectLst/>
+                <a:uLnTx/>
+                <a:uFillTx/>
+                <a:latin typeface="Calibri"/>
+                <a:ea typeface="+mn-ea"/>
+                <a:cs typeface="+mn-cs"/>
+              </a:rPr>
+            </a:br>
+            <a:r>
+              <a:rPr kumimoji="0" lang="fr-FR" sz="1600" b="0" i="0" u="none" strike="noStrike" kern="1200" cap="none" spc="0" normalizeH="0" baseline="0" noProof="0" dirty="0" err="1">
+                <a:ln>
+                  <a:noFill/>
+                </a:ln>
+                <a:solidFill>
+                  <a:srgbClr val="2C2522"/>
+                </a:solidFill>
+                <a:effectLst/>
+                <a:uLnTx/>
+                <a:uFillTx/>
+                <a:latin typeface="Calibri"/>
+                <a:ea typeface="+mn-ea"/>
+                <a:cs typeface="+mn-cs"/>
+              </a:rPr>
+              <a:t>Webpack</a:t>
+            </a:r>
+            <a:r>
+              <a:rPr kumimoji="0" lang="fr-FR" sz="1600" b="0" i="0" u="none" strike="noStrike" kern="1200" cap="none" spc="0" normalizeH="0" baseline="0" noProof="0" dirty="0">
+                <a:ln>
+                  <a:noFill/>
+                </a:ln>
+                <a:solidFill>
+                  <a:srgbClr val="2C2522"/>
+                </a:solidFill>
+                <a:effectLst/>
+                <a:uLnTx/>
+                <a:uFillTx/>
+                <a:latin typeface="Calibri"/>
+                <a:ea typeface="+mn-ea"/>
+                <a:cs typeface="+mn-cs"/>
+              </a:rPr>
+              <a:t> Encore pour compiler et gérer les assets.</a:t>
+            </a:r>
+          </a:p>
+          <a:p>
+            <a:pPr algn="ctr"/>
+            <a:endParaRPr lang="fr-FR" noProof="0" dirty="0"/>
+          </a:p>
+        </p:txBody>
+      </p:sp>
+      <p:sp>
+        <p:nvSpPr>
+          <p:cNvPr id="10" name="Rectangle 9">
+            <a:extLst>
+              <a:ext uri="{FF2B5EF4-FFF2-40B4-BE49-F238E27FC236}">
+                <a16:creationId xmlns:a16="http://schemas.microsoft.com/office/drawing/2014/main" id="{122E84F5-1EAE-D5A6-5E24-EC31D0FC3D13}"/>
+              </a:ext>
+            </a:extLst>
+          </p:cNvPr>
+          <p:cNvSpPr/>
+          <p:nvPr/>
+        </p:nvSpPr>
+        <p:spPr>
+          <a:xfrm>
+            <a:off x="640080" y="6419088"/>
+            <a:ext cx="10881360" cy="18288"/>
+          </a:xfrm>
+          <a:prstGeom prst="rect">
+            <a:avLst/>
+          </a:prstGeom>
+          <a:solidFill>
+            <a:srgbClr val="EFEAE0"/>
+          </a:solidFill>
+          <a:ln>
+            <a:noFill/>
+          </a:ln>
+        </p:spPr>
+        <p:style>
+          <a:lnRef idx="1">
+            <a:schemeClr val="accent1"/>
+          </a:lnRef>
+          <a:fillRef idx="3">
+            <a:schemeClr val="accent1"/>
+          </a:fillRef>
+          <a:effectRef idx="2">
+            <a:schemeClr val="accent1"/>
+          </a:effectRef>
+          <a:fontRef idx="minor">
+            <a:schemeClr val="lt1"/>
+          </a:fontRef>
+        </p:style>
+        <p:txBody>
+          <a:bodyPr rtlCol="0" anchor="ctr"/>
+          <a:lstStyle/>
+          <a:p>
+            <a:pPr algn="ctr"/>
+            <a:endParaRPr lang="fr-FR" noProof="0" dirty="0"/>
+          </a:p>
+        </p:txBody>
+      </p:sp>
+      <p:sp>
+        <p:nvSpPr>
+          <p:cNvPr id="11" name="TextBox 10">
+            <a:extLst>
+              <a:ext uri="{FF2B5EF4-FFF2-40B4-BE49-F238E27FC236}">
+                <a16:creationId xmlns:a16="http://schemas.microsoft.com/office/drawing/2014/main" id="{5EBABDCD-385E-0F02-8A90-64EDC3D91F95}"/>
+              </a:ext>
+            </a:extLst>
+          </p:cNvPr>
+          <p:cNvSpPr txBox="1"/>
+          <p:nvPr/>
+        </p:nvSpPr>
+        <p:spPr>
+          <a:xfrm>
+            <a:off x="10789920" y="6473952"/>
+            <a:ext cx="640080" cy="182880"/>
+          </a:xfrm>
+          <a:prstGeom prst="rect">
+            <a:avLst/>
+          </a:prstGeom>
+          <a:noFill/>
+        </p:spPr>
+        <p:txBody>
+          <a:bodyPr wrap="none">
+            <a:spAutoFit/>
+          </a:bodyPr>
+          <a:lstStyle/>
+          <a:p>
+            <a:pPr algn="r"/>
+            <a:r>
+              <a:rPr lang="fr-FR" sz="900" noProof="0" dirty="0">
+                <a:solidFill>
+                  <a:srgbClr val="69625E"/>
+                </a:solidFill>
+              </a:rPr>
+              <a:t>7</a:t>
+            </a:r>
+          </a:p>
+        </p:txBody>
+      </p:sp>
+      <p:pic>
+        <p:nvPicPr>
+          <p:cNvPr id="5" name="Image 4">
+            <a:extLst>
+              <a:ext uri="{FF2B5EF4-FFF2-40B4-BE49-F238E27FC236}">
+                <a16:creationId xmlns:a16="http://schemas.microsoft.com/office/drawing/2014/main" id="{7918BCD3-0479-D9AF-1E96-A3DAC57FC758}"/>
+              </a:ext>
+            </a:extLst>
+          </p:cNvPr>
+          <p:cNvPicPr>
+            <a:picLocks noChangeAspect="1"/>
+          </p:cNvPicPr>
+          <p:nvPr/>
+        </p:nvPicPr>
+        <p:blipFill>
+          <a:blip r:embed="rId3"/>
+          <a:stretch>
+            <a:fillRect/>
+          </a:stretch>
+        </p:blipFill>
+        <p:spPr>
+          <a:xfrm>
+            <a:off x="3017738" y="621792"/>
+            <a:ext cx="8705759" cy="5726455"/>
+          </a:xfrm>
+          <a:prstGeom prst="rect">
+            <a:avLst/>
+          </a:prstGeom>
+        </p:spPr>
+      </p:pic>
+    </p:spTree>
+    <p:extLst>
+      <p:ext uri="{BB962C8B-B14F-4D97-AF65-F5344CB8AC3E}">
+        <p14:creationId xmlns:p14="http://schemas.microsoft.com/office/powerpoint/2010/main" val="1071155887"/>
+      </p:ext>
+    </p:extLst>
+  </p:cSld>
+  <p:clrMapOvr>
+    <a:masterClrMapping/>
+  </p:clrMapOvr>
+</p:sld>
+</file>
+
+<file path=ppt/slides/slide12.xml><?xml version="1.0" encoding="utf-8"?>
+<p:sld xmlns:a="http://schemas.openxmlformats.org/drawingml/2006/main" xmlns:r="http://schemas.openxmlformats.org/officeDocument/2006/relationships" xmlns:p="http://schemas.openxmlformats.org/presentationml/2006/main">
+  <p:cSld>
+    <p:spTree>
+      <p:nvGrpSpPr>
+        <p:cNvPr id="1" name=""/>
+        <p:cNvGrpSpPr/>
+        <p:nvPr/>
+      </p:nvGrpSpPr>
+      <p:grpSpPr>
+        <a:xfrm>
+          <a:off x="0" y="0"/>
+          <a:ext cx="0" cy="0"/>
+          <a:chOff x="0" y="0"/>
+          <a:chExt cx="0" cy="0"/>
+        </a:xfrm>
+      </p:grpSpPr>
+      <p:sp>
+        <p:nvSpPr>
+          <p:cNvPr id="3" name="TextBox 2"/>
+          <p:cNvSpPr txBox="1"/>
+          <p:nvPr/>
+        </p:nvSpPr>
+        <p:spPr>
+          <a:xfrm>
+            <a:off x="640080" y="411480"/>
+            <a:ext cx="10972800" cy="594360"/>
+          </a:xfrm>
+          <a:prstGeom prst="rect">
+            <a:avLst/>
+          </a:prstGeom>
+          <a:noFill/>
+        </p:spPr>
+        <p:txBody>
+          <a:bodyPr wrap="none">
+            <a:spAutoFit/>
+          </a:bodyPr>
+          <a:lstStyle/>
+          <a:p>
+            <a:r>
+              <a:rPr lang="fr-FR" sz="2800" b="1" noProof="0" dirty="0" err="1">
+                <a:solidFill>
+                  <a:srgbClr val="2C2522"/>
+                </a:solidFill>
+                <a:latin typeface="Aptos Display"/>
+              </a:rPr>
+              <a:t>Back-end</a:t>
+            </a:r>
+            <a:r>
+              <a:rPr lang="fr-FR" sz="2800" b="1" noProof="0" dirty="0">
+                <a:solidFill>
+                  <a:srgbClr val="2C2522"/>
+                </a:solidFill>
+                <a:latin typeface="Aptos Display"/>
+              </a:rPr>
+              <a:t> — MVC</a:t>
+            </a:r>
+          </a:p>
+        </p:txBody>
+      </p:sp>
+      <p:sp>
+        <p:nvSpPr>
+          <p:cNvPr id="4" name="Rounded Rectangle 3"/>
+          <p:cNvSpPr/>
+          <p:nvPr/>
+        </p:nvSpPr>
+        <p:spPr>
+          <a:xfrm>
+            <a:off x="762000" y="1862526"/>
+            <a:ext cx="1666906" cy="3139242"/>
+          </a:xfrm>
+          <a:prstGeom prst="roundRect">
+            <a:avLst/>
+          </a:prstGeom>
+          <a:solidFill>
+            <a:srgbClr val="FFFFFF"/>
+          </a:solidFill>
+          <a:ln>
+            <a:solidFill>
+              <a:srgbClr val="EFEAE0"/>
+            </a:solidFill>
+          </a:ln>
+        </p:spPr>
+        <p:style>
+          <a:lnRef idx="1">
+            <a:schemeClr val="accent1"/>
+          </a:lnRef>
+          <a:fillRef idx="3">
+            <a:schemeClr val="accent1"/>
+          </a:fillRef>
+          <a:effectRef idx="2">
+            <a:schemeClr val="accent1"/>
+          </a:effectRef>
+          <a:fontRef idx="minor">
+            <a:schemeClr val="lt1"/>
+          </a:fontRef>
+        </p:style>
+        <p:txBody>
+          <a:bodyPr rtlCol="0" anchor="t"/>
+          <a:lstStyle/>
+          <a:p>
+            <a:pPr marL="0" marR="0" lvl="0" indent="0" algn="l" defTabSz="457200" rtl="0" eaLnBrk="1" fontAlgn="auto" latinLnBrk="0" hangingPunct="1">
+              <a:lnSpc>
+                <a:spcPct val="100000"/>
+              </a:lnSpc>
+              <a:spcBef>
+                <a:spcPts val="0"/>
+              </a:spcBef>
+              <a:spcAft>
+                <a:spcPts val="0"/>
+              </a:spcAft>
+              <a:buClrTx/>
+              <a:buSzTx/>
+              <a:buFontTx/>
+              <a:buNone/>
+              <a:tabLst/>
+              <a:defRPr/>
+            </a:pPr>
+            <a:r>
+              <a:rPr kumimoji="0" lang="fr-FR" b="1" i="0" u="none" strike="noStrike" kern="1200" cap="none" spc="0" normalizeH="0" baseline="0" noProof="0" dirty="0">
+                <a:ln>
+                  <a:noFill/>
+                </a:ln>
+                <a:solidFill>
+                  <a:srgbClr val="F79646">
+                    <a:lumMod val="50000"/>
+                  </a:srgbClr>
+                </a:solidFill>
+                <a:effectLst/>
+                <a:uLnTx/>
+                <a:uFillTx/>
+                <a:latin typeface="Calibri"/>
+                <a:ea typeface="+mn-ea"/>
+                <a:cs typeface="+mn-cs"/>
+              </a:rPr>
+              <a:t>MODEL</a:t>
+            </a:r>
+          </a:p>
+          <a:p>
+            <a:pPr marL="0" marR="0" lvl="0" indent="0" algn="l" defTabSz="457200" rtl="0" eaLnBrk="1" fontAlgn="auto" latinLnBrk="0" hangingPunct="1">
+              <a:lnSpc>
+                <a:spcPct val="100000"/>
+              </a:lnSpc>
+              <a:spcBef>
+                <a:spcPts val="700"/>
+              </a:spcBef>
+              <a:spcAft>
+                <a:spcPts val="0"/>
+              </a:spcAft>
+              <a:buClrTx/>
+              <a:buSzTx/>
+              <a:buFontTx/>
+              <a:buNone/>
+              <a:tabLst/>
+              <a:defRPr sz="1200">
+                <a:solidFill>
+                  <a:srgbClr val="2C2522"/>
+                </a:solidFill>
+              </a:defRPr>
+            </a:pPr>
+            <a:r>
+              <a:rPr kumimoji="0" lang="fr-FR" sz="1600" b="0" i="0" u="none" strike="noStrike" kern="1200" cap="none" spc="0" normalizeH="0" baseline="0" noProof="0" dirty="0" err="1">
+                <a:ln>
+                  <a:noFill/>
+                </a:ln>
+                <a:solidFill>
+                  <a:srgbClr val="2C2522"/>
+                </a:solidFill>
+                <a:effectLst/>
+                <a:uLnTx/>
+                <a:uFillTx/>
+                <a:latin typeface="Calibri"/>
+                <a:ea typeface="+mn-ea"/>
+                <a:cs typeface="+mn-cs"/>
+              </a:rPr>
+              <a:t>Entity</a:t>
+            </a:r>
+            <a:br>
+              <a:rPr kumimoji="0" lang="fr-FR" sz="1600" b="0" i="0" u="none" strike="noStrike" kern="1200" cap="none" spc="0" normalizeH="0" baseline="0" noProof="0" dirty="0">
+                <a:ln>
+                  <a:noFill/>
+                </a:ln>
+                <a:solidFill>
+                  <a:srgbClr val="2C2522"/>
+                </a:solidFill>
+                <a:effectLst/>
+                <a:uLnTx/>
+                <a:uFillTx/>
+                <a:latin typeface="Calibri"/>
+                <a:ea typeface="+mn-ea"/>
+                <a:cs typeface="+mn-cs"/>
+              </a:rPr>
+            </a:br>
+            <a:r>
+              <a:rPr kumimoji="0" lang="fr-FR" sz="1600" b="0" i="0" u="none" strike="noStrike" kern="1200" cap="none" spc="0" normalizeH="0" baseline="0" noProof="0" dirty="0">
+                <a:ln>
+                  <a:noFill/>
+                </a:ln>
+                <a:solidFill>
+                  <a:srgbClr val="2C2522"/>
+                </a:solidFill>
+                <a:effectLst/>
+                <a:uLnTx/>
+                <a:uFillTx/>
+                <a:latin typeface="Calibri"/>
+                <a:ea typeface="+mn-ea"/>
+                <a:cs typeface="+mn-cs"/>
+              </a:rPr>
+              <a:t>Doctrine</a:t>
+            </a:r>
+            <a:br>
+              <a:rPr kumimoji="0" lang="fr-FR" sz="1600" b="0" i="0" u="none" strike="noStrike" kern="1200" cap="none" spc="0" normalizeH="0" baseline="0" noProof="0" dirty="0">
+                <a:ln>
+                  <a:noFill/>
+                </a:ln>
+                <a:solidFill>
+                  <a:srgbClr val="2C2522"/>
+                </a:solidFill>
+                <a:effectLst/>
+                <a:uLnTx/>
+                <a:uFillTx/>
+                <a:latin typeface="Calibri"/>
+                <a:ea typeface="+mn-ea"/>
+                <a:cs typeface="+mn-cs"/>
+              </a:rPr>
+            </a:br>
+            <a:r>
+              <a:rPr kumimoji="0" lang="fr-FR" sz="1600" b="0" i="0" u="none" strike="noStrike" kern="1200" cap="none" spc="0" normalizeH="0" baseline="0" noProof="0" dirty="0">
+                <a:ln>
+                  <a:noFill/>
+                </a:ln>
+                <a:solidFill>
+                  <a:srgbClr val="2C2522"/>
+                </a:solidFill>
+                <a:effectLst/>
+                <a:uLnTx/>
+                <a:uFillTx/>
+                <a:latin typeface="Calibri"/>
+                <a:ea typeface="+mn-ea"/>
+                <a:cs typeface="+mn-cs"/>
+              </a:rPr>
+              <a:t>Repository</a:t>
+            </a:r>
+            <a:br>
+              <a:rPr kumimoji="0" lang="fr-FR" sz="1600" b="0" i="0" u="none" strike="noStrike" kern="1200" cap="none" spc="0" normalizeH="0" baseline="0" noProof="0" dirty="0">
+                <a:ln>
+                  <a:noFill/>
+                </a:ln>
+                <a:solidFill>
+                  <a:srgbClr val="2C2522"/>
+                </a:solidFill>
+                <a:effectLst/>
+                <a:uLnTx/>
+                <a:uFillTx/>
+                <a:latin typeface="Calibri"/>
+                <a:ea typeface="+mn-ea"/>
+                <a:cs typeface="+mn-cs"/>
+              </a:rPr>
+            </a:br>
+            <a:br>
+              <a:rPr kumimoji="0" lang="fr-FR" sz="1600" b="0" i="0" u="none" strike="noStrike" kern="1200" cap="none" spc="0" normalizeH="0" baseline="0" noProof="0" dirty="0">
+                <a:ln>
+                  <a:noFill/>
+                </a:ln>
+                <a:solidFill>
+                  <a:srgbClr val="2C2522"/>
+                </a:solidFill>
+                <a:effectLst/>
+                <a:uLnTx/>
+                <a:uFillTx/>
+                <a:latin typeface="Calibri"/>
+                <a:ea typeface="+mn-ea"/>
+                <a:cs typeface="+mn-cs"/>
+              </a:rPr>
+            </a:br>
+            <a:r>
+              <a:rPr kumimoji="0" lang="fr-FR" sz="1600" b="0" i="0" u="none" strike="noStrike" kern="1200" cap="none" spc="0" normalizeH="0" baseline="0" noProof="0" dirty="0">
+                <a:ln>
+                  <a:noFill/>
+                </a:ln>
+                <a:solidFill>
+                  <a:srgbClr val="2C2522"/>
+                </a:solidFill>
+                <a:effectLst/>
+                <a:uLnTx/>
+                <a:uFillTx/>
+                <a:latin typeface="Calibri"/>
+                <a:ea typeface="+mn-ea"/>
+                <a:cs typeface="+mn-cs"/>
+              </a:rPr>
+              <a:t>Product</a:t>
+            </a:r>
+            <a:br>
+              <a:rPr kumimoji="0" lang="fr-FR" sz="1600" b="0" i="0" u="none" strike="noStrike" kern="1200" cap="none" spc="0" normalizeH="0" baseline="0" noProof="0" dirty="0">
+                <a:ln>
+                  <a:noFill/>
+                </a:ln>
+                <a:solidFill>
+                  <a:srgbClr val="2C2522"/>
+                </a:solidFill>
+                <a:effectLst/>
+                <a:uLnTx/>
+                <a:uFillTx/>
+                <a:latin typeface="Calibri"/>
+                <a:ea typeface="+mn-ea"/>
+                <a:cs typeface="+mn-cs"/>
+              </a:rPr>
+            </a:br>
+            <a:r>
+              <a:rPr kumimoji="0" lang="fr-FR" sz="1600" b="0" i="0" u="none" strike="noStrike" kern="1200" cap="none" spc="0" normalizeH="0" baseline="0" noProof="0" dirty="0" err="1">
+                <a:ln>
+                  <a:noFill/>
+                </a:ln>
+                <a:solidFill>
+                  <a:srgbClr val="2C2522"/>
+                </a:solidFill>
+                <a:effectLst/>
+                <a:uLnTx/>
+                <a:uFillTx/>
+                <a:latin typeface="Calibri"/>
+                <a:ea typeface="+mn-ea"/>
+                <a:cs typeface="+mn-cs"/>
+              </a:rPr>
+              <a:t>Category</a:t>
+            </a:r>
+            <a:br>
+              <a:rPr kumimoji="0" lang="fr-FR" sz="1600" b="0" i="0" u="none" strike="noStrike" kern="1200" cap="none" spc="0" normalizeH="0" baseline="0" noProof="0" dirty="0">
+                <a:ln>
+                  <a:noFill/>
+                </a:ln>
+                <a:solidFill>
+                  <a:srgbClr val="2C2522"/>
+                </a:solidFill>
+                <a:effectLst/>
+                <a:uLnTx/>
+                <a:uFillTx/>
+                <a:latin typeface="Calibri"/>
+                <a:ea typeface="+mn-ea"/>
+                <a:cs typeface="+mn-cs"/>
+              </a:rPr>
+            </a:br>
+            <a:r>
+              <a:rPr kumimoji="0" lang="fr-FR" sz="1600" b="0" i="0" u="none" strike="noStrike" kern="1200" cap="none" spc="0" normalizeH="0" baseline="0" noProof="0" dirty="0">
+                <a:ln>
+                  <a:noFill/>
+                </a:ln>
+                <a:solidFill>
+                  <a:srgbClr val="2C2522"/>
+                </a:solidFill>
+                <a:effectLst/>
+                <a:uLnTx/>
+                <a:uFillTx/>
+                <a:latin typeface="Calibri"/>
+                <a:ea typeface="+mn-ea"/>
+                <a:cs typeface="+mn-cs"/>
+              </a:rPr>
+              <a:t>User</a:t>
+            </a:r>
+            <a:br>
+              <a:rPr kumimoji="0" lang="fr-FR" sz="1600" b="0" i="0" u="none" strike="noStrike" kern="1200" cap="none" spc="0" normalizeH="0" baseline="0" noProof="0" dirty="0">
+                <a:ln>
+                  <a:noFill/>
+                </a:ln>
+                <a:solidFill>
+                  <a:srgbClr val="2C2522"/>
+                </a:solidFill>
+                <a:effectLst/>
+                <a:uLnTx/>
+                <a:uFillTx/>
+                <a:latin typeface="Calibri"/>
+                <a:ea typeface="+mn-ea"/>
+                <a:cs typeface="+mn-cs"/>
+              </a:rPr>
+            </a:br>
+            <a:r>
+              <a:rPr kumimoji="0" lang="fr-FR" sz="1600" b="0" i="0" u="none" strike="noStrike" kern="1200" cap="none" spc="0" normalizeH="0" baseline="0" noProof="0" dirty="0" err="1">
+                <a:ln>
+                  <a:noFill/>
+                </a:ln>
+                <a:solidFill>
+                  <a:srgbClr val="2C2522"/>
+                </a:solidFill>
+                <a:effectLst/>
+                <a:uLnTx/>
+                <a:uFillTx/>
+                <a:latin typeface="Calibri"/>
+                <a:ea typeface="+mn-ea"/>
+                <a:cs typeface="+mn-cs"/>
+              </a:rPr>
+              <a:t>Review</a:t>
+            </a:r>
+            <a:br>
+              <a:rPr kumimoji="0" lang="fr-FR" sz="1600" b="0" i="0" u="none" strike="noStrike" kern="1200" cap="none" spc="0" normalizeH="0" baseline="0" noProof="0" dirty="0">
+                <a:ln>
+                  <a:noFill/>
+                </a:ln>
+                <a:solidFill>
+                  <a:srgbClr val="2C2522"/>
+                </a:solidFill>
+                <a:effectLst/>
+                <a:uLnTx/>
+                <a:uFillTx/>
+                <a:latin typeface="Calibri"/>
+                <a:ea typeface="+mn-ea"/>
+                <a:cs typeface="+mn-cs"/>
+              </a:rPr>
+            </a:br>
+            <a:r>
+              <a:rPr kumimoji="0" lang="fr-FR" sz="1600" b="0" i="0" u="none" strike="noStrike" kern="1200" cap="none" spc="0" normalizeH="0" baseline="0" noProof="0" dirty="0" err="1">
+                <a:ln>
+                  <a:noFill/>
+                </a:ln>
+                <a:solidFill>
+                  <a:srgbClr val="2C2522"/>
+                </a:solidFill>
+                <a:effectLst/>
+                <a:uLnTx/>
+                <a:uFillTx/>
+                <a:latin typeface="Calibri"/>
+                <a:ea typeface="+mn-ea"/>
+                <a:cs typeface="+mn-cs"/>
+              </a:rPr>
+              <a:t>QuoteRequest</a:t>
+            </a:r>
+            <a:endParaRPr kumimoji="0" lang="fr-FR" sz="1600" b="0" i="0" u="none" strike="noStrike" kern="1200" cap="none" spc="0" normalizeH="0" baseline="0" noProof="0" dirty="0">
+              <a:ln>
+                <a:noFill/>
+              </a:ln>
+              <a:solidFill>
+                <a:srgbClr val="2C2522"/>
+              </a:solidFill>
+              <a:effectLst/>
+              <a:uLnTx/>
+              <a:uFillTx/>
+              <a:latin typeface="Calibri"/>
+              <a:ea typeface="+mn-ea"/>
+              <a:cs typeface="+mn-cs"/>
+            </a:endParaRPr>
+          </a:p>
+          <a:p>
+            <a:pPr algn="ctr"/>
+            <a:endParaRPr lang="fr-FR" noProof="0" dirty="0"/>
+          </a:p>
+        </p:txBody>
+      </p:sp>
+      <p:sp>
+        <p:nvSpPr>
+          <p:cNvPr id="6" name="Rounded Rectangle 5"/>
+          <p:cNvSpPr/>
+          <p:nvPr/>
+        </p:nvSpPr>
+        <p:spPr>
+          <a:xfrm>
+            <a:off x="4014292" y="692469"/>
+            <a:ext cx="3383280" cy="2500811"/>
+          </a:xfrm>
+          <a:prstGeom prst="roundRect">
+            <a:avLst/>
+          </a:prstGeom>
+          <a:solidFill>
+            <a:srgbClr val="FFFFFF"/>
+          </a:solidFill>
+          <a:ln>
+            <a:solidFill>
+              <a:srgbClr val="EFEAE0"/>
+            </a:solidFill>
+          </a:ln>
+        </p:spPr>
+        <p:style>
+          <a:lnRef idx="1">
+            <a:schemeClr val="accent1"/>
+          </a:lnRef>
+          <a:fillRef idx="3">
+            <a:schemeClr val="accent1"/>
+          </a:fillRef>
+          <a:effectRef idx="2">
+            <a:schemeClr val="accent1"/>
+          </a:effectRef>
+          <a:fontRef idx="minor">
+            <a:schemeClr val="lt1"/>
+          </a:fontRef>
+        </p:style>
+        <p:txBody>
+          <a:bodyPr rtlCol="0" anchor="t"/>
+          <a:lstStyle/>
+          <a:p>
+            <a:pPr marL="0" marR="0" lvl="0" indent="0" algn="l" defTabSz="457200" rtl="0" eaLnBrk="1" fontAlgn="auto" latinLnBrk="0" hangingPunct="1">
+              <a:lnSpc>
+                <a:spcPct val="100000"/>
+              </a:lnSpc>
+              <a:spcBef>
+                <a:spcPts val="0"/>
+              </a:spcBef>
+              <a:spcAft>
+                <a:spcPts val="0"/>
+              </a:spcAft>
+              <a:buClrTx/>
+              <a:buSzTx/>
+              <a:buFontTx/>
+              <a:buNone/>
+              <a:tabLst/>
+              <a:defRPr/>
+            </a:pPr>
+            <a:r>
+              <a:rPr kumimoji="0" lang="fr-FR" b="1" i="0" u="none" strike="noStrike" kern="1200" cap="none" spc="0" normalizeH="0" baseline="0" noProof="0" dirty="0">
+                <a:ln>
+                  <a:noFill/>
+                </a:ln>
+                <a:solidFill>
+                  <a:srgbClr val="F79646">
+                    <a:lumMod val="50000"/>
+                  </a:srgbClr>
+                </a:solidFill>
+                <a:effectLst/>
+                <a:uLnTx/>
+                <a:uFillTx/>
+                <a:latin typeface="Calibri"/>
+                <a:ea typeface="+mn-ea"/>
+                <a:cs typeface="+mn-cs"/>
+              </a:rPr>
               <a:t>VIEW</a:t>
             </a:r>
             <a:endParaRPr kumimoji="0" lang="fr-FR" sz="2000" b="1" i="0" u="none" strike="noStrike" kern="1200" cap="none" spc="0" normalizeH="0" baseline="0" noProof="0" dirty="0">
@@ -7459,8 +8934,8 @@
         </p:nvSpPr>
         <p:spPr>
           <a:xfrm>
-            <a:off x="8046720" y="928189"/>
-            <a:ext cx="3383280" cy="3474720"/>
+            <a:off x="9136505" y="1856679"/>
+            <a:ext cx="2476375" cy="3139242"/>
           </a:xfrm>
           <a:prstGeom prst="roundRect">
             <a:avLst/>
@@ -7919,7 +9394,7 @@
         </p:blipFill>
         <p:spPr>
           <a:xfrm>
-            <a:off x="3078054" y="3601398"/>
+            <a:off x="2734280" y="3405813"/>
             <a:ext cx="6096851" cy="2800741"/>
           </a:xfrm>
           <a:prstGeom prst="rect">
@@ -7945,7 +9420,7 @@
 </p:sld>
 </file>
 
-<file path=ppt/slides/slide11.xml><?xml version="1.0" encoding="utf-8"?>
+<file path=ppt/slides/slide13.xml><?xml version="1.0" encoding="utf-8"?>
 <p:sld xmlns:a="http://schemas.openxmlformats.org/drawingml/2006/main" xmlns:r="http://schemas.openxmlformats.org/officeDocument/2006/relationships" xmlns:p="http://schemas.openxmlformats.org/presentationml/2006/main">
   <p:cSld>
     <p:spTree>
@@ -8500,7 +9975,7 @@
 </p:sld>
 </file>
 
-<file path=ppt/slides/slide12.xml><?xml version="1.0" encoding="utf-8"?>
+<file path=ppt/slides/slide14.xml><?xml version="1.0" encoding="utf-8"?>
 <p:sld xmlns:a="http://schemas.openxmlformats.org/drawingml/2006/main" xmlns:r="http://schemas.openxmlformats.org/officeDocument/2006/relationships" xmlns:p="http://schemas.openxmlformats.org/presentationml/2006/main">
   <p:cSld>
     <p:spTree>
@@ -8942,7 +10417,7 @@
 </p:sld>
 </file>
 
-<file path=ppt/slides/slide13.xml><?xml version="1.0" encoding="utf-8"?>
+<file path=ppt/slides/slide15.xml><?xml version="1.0" encoding="utf-8"?>
 <p:sld xmlns:a="http://schemas.openxmlformats.org/drawingml/2006/main" xmlns:r="http://schemas.openxmlformats.org/officeDocument/2006/relationships" xmlns:p="http://schemas.openxmlformats.org/presentationml/2006/main">
   <p:cSld>
     <p:spTree>
@@ -9424,7 +10899,7 @@
 </p:sld>
 </file>
 
-<file path=ppt/slides/slide14.xml><?xml version="1.0" encoding="utf-8"?>
+<file path=ppt/slides/slide16.xml><?xml version="1.0" encoding="utf-8"?>
 <p:sld xmlns:a="http://schemas.openxmlformats.org/drawingml/2006/main" xmlns:r="http://schemas.openxmlformats.org/officeDocument/2006/relationships" xmlns:p="http://schemas.openxmlformats.org/presentationml/2006/main">
   <p:cSld>
     <p:spTree>
@@ -9892,7 +11367,7 @@
 </p:sld>
 </file>
 
-<file path=ppt/slides/slide15.xml><?xml version="1.0" encoding="utf-8"?>
+<file path=ppt/slides/slide17.xml><?xml version="1.0" encoding="utf-8"?>
 <p:sld xmlns:a="http://schemas.openxmlformats.org/drawingml/2006/main" xmlns:r="http://schemas.openxmlformats.org/officeDocument/2006/relationships" xmlns:p="http://schemas.openxmlformats.org/presentationml/2006/main">
   <p:cSld>
     <p:spTree>
@@ -10463,1194 +11938,6 @@
                 </a:solidFill>
               </a:rPr>
               <a:t>8. Responsive</a:t>
-            </a:r>
-          </a:p>
-        </p:txBody>
-      </p:sp>
-    </p:spTree>
-  </p:cSld>
-  <p:clrMapOvr>
-    <a:masterClrMapping/>
-  </p:clrMapOvr>
-</p:sld>
-</file>
-
-<file path=ppt/slides/slide16.xml><?xml version="1.0" encoding="utf-8"?>
-<p:sld xmlns:a="http://schemas.openxmlformats.org/drawingml/2006/main" xmlns:r="http://schemas.openxmlformats.org/officeDocument/2006/relationships" xmlns:p="http://schemas.openxmlformats.org/presentationml/2006/main">
-  <p:cSld>
-    <p:spTree>
-      <p:nvGrpSpPr>
-        <p:cNvPr id="1" name=""/>
-        <p:cNvGrpSpPr/>
-        <p:nvPr/>
-      </p:nvGrpSpPr>
-      <p:grpSpPr>
-        <a:xfrm>
-          <a:off x="0" y="0"/>
-          <a:ext cx="0" cy="0"/>
-          <a:chOff x="0" y="0"/>
-          <a:chExt cx="0" cy="0"/>
-        </a:xfrm>
-      </p:grpSpPr>
-      <p:sp>
-        <p:nvSpPr>
-          <p:cNvPr id="3" name="TextBox 2"/>
-          <p:cNvSpPr txBox="1"/>
-          <p:nvPr/>
-        </p:nvSpPr>
-        <p:spPr>
-          <a:xfrm>
-            <a:off x="640080" y="411480"/>
-            <a:ext cx="3692678" cy="523220"/>
-          </a:xfrm>
-          <a:prstGeom prst="rect">
-            <a:avLst/>
-          </a:prstGeom>
-          <a:noFill/>
-        </p:spPr>
-        <p:txBody>
-          <a:bodyPr wrap="none">
-            <a:spAutoFit/>
-          </a:bodyPr>
-          <a:lstStyle/>
-          <a:p>
-            <a:r>
-              <a:rPr lang="fr-FR" sz="2800" b="1" noProof="0" dirty="0">
-                <a:solidFill>
-                  <a:srgbClr val="2C2522"/>
-                </a:solidFill>
-                <a:latin typeface="Aptos Display"/>
-              </a:rPr>
-              <a:t>Difficultés rencontrées</a:t>
-            </a:r>
-          </a:p>
-        </p:txBody>
-      </p:sp>
-      <p:sp>
-        <p:nvSpPr>
-          <p:cNvPr id="5" name="Rectangle 4"/>
-          <p:cNvSpPr/>
-          <p:nvPr/>
-        </p:nvSpPr>
-        <p:spPr>
-          <a:xfrm>
-            <a:off x="640080" y="6419088"/>
-            <a:ext cx="10881360" cy="18288"/>
-          </a:xfrm>
-          <a:prstGeom prst="rect">
-            <a:avLst/>
-          </a:prstGeom>
-          <a:solidFill>
-            <a:srgbClr val="EFEAE0"/>
-          </a:solidFill>
-          <a:ln>
-            <a:noFill/>
-          </a:ln>
-        </p:spPr>
-        <p:style>
-          <a:lnRef idx="1">
-            <a:schemeClr val="accent1"/>
-          </a:lnRef>
-          <a:fillRef idx="3">
-            <a:schemeClr val="accent1"/>
-          </a:fillRef>
-          <a:effectRef idx="2">
-            <a:schemeClr val="accent1"/>
-          </a:effectRef>
-          <a:fontRef idx="minor">
-            <a:schemeClr val="lt1"/>
-          </a:fontRef>
-        </p:style>
-        <p:txBody>
-          <a:bodyPr rtlCol="0" anchor="ctr"/>
-          <a:lstStyle/>
-          <a:p>
-            <a:pPr algn="ctr"/>
-            <a:endParaRPr lang="fr-FR" noProof="0" dirty="0"/>
-          </a:p>
-        </p:txBody>
-      </p:sp>
-      <p:sp>
-        <p:nvSpPr>
-          <p:cNvPr id="6" name="TextBox 5"/>
-          <p:cNvSpPr txBox="1"/>
-          <p:nvPr/>
-        </p:nvSpPr>
-        <p:spPr>
-          <a:xfrm>
-            <a:off x="10789920" y="6473952"/>
-            <a:ext cx="640080" cy="182880"/>
-          </a:xfrm>
-          <a:prstGeom prst="rect">
-            <a:avLst/>
-          </a:prstGeom>
-          <a:noFill/>
-        </p:spPr>
-        <p:txBody>
-          <a:bodyPr wrap="none">
-            <a:spAutoFit/>
-          </a:bodyPr>
-          <a:lstStyle/>
-          <a:p>
-            <a:pPr algn="r"/>
-            <a:r>
-              <a:rPr lang="fr-FR" sz="900" noProof="0" dirty="0">
-                <a:solidFill>
-                  <a:srgbClr val="69625E"/>
-                </a:solidFill>
-              </a:rPr>
-              <a:t>12</a:t>
-            </a:r>
-          </a:p>
-        </p:txBody>
-      </p:sp>
-      <p:sp>
-        <p:nvSpPr>
-          <p:cNvPr id="8" name="Rounded Rectangle 3">
-            <a:extLst>
-              <a:ext uri="{FF2B5EF4-FFF2-40B4-BE49-F238E27FC236}">
-                <a16:creationId xmlns:a16="http://schemas.microsoft.com/office/drawing/2014/main" id="{213D243F-129E-C8D4-B29B-6BF00D7E6861}"/>
-              </a:ext>
-            </a:extLst>
-          </p:cNvPr>
-          <p:cNvSpPr/>
-          <p:nvPr/>
-        </p:nvSpPr>
-        <p:spPr>
-          <a:xfrm>
-            <a:off x="1349829" y="1578854"/>
-            <a:ext cx="7010400" cy="4114800"/>
-          </a:xfrm>
-          <a:prstGeom prst="roundRect">
-            <a:avLst/>
-          </a:prstGeom>
-          <a:solidFill>
-            <a:srgbClr val="FFFFFF"/>
-          </a:solidFill>
-          <a:ln>
-            <a:solidFill>
-              <a:srgbClr val="EFEAE0"/>
-            </a:solidFill>
-          </a:ln>
-        </p:spPr>
-        <p:style>
-          <a:lnRef idx="1">
-            <a:schemeClr val="accent1"/>
-          </a:lnRef>
-          <a:fillRef idx="3">
-            <a:schemeClr val="accent1"/>
-          </a:fillRef>
-          <a:effectRef idx="2">
-            <a:schemeClr val="accent1"/>
-          </a:effectRef>
-          <a:fontRef idx="minor">
-            <a:schemeClr val="lt1"/>
-          </a:fontRef>
-        </p:style>
-        <p:txBody>
-          <a:bodyPr rtlCol="0" anchor="t"/>
-          <a:lstStyle/>
-          <a:p>
-            <a:pPr>
-              <a:spcAft>
-                <a:spcPts val="1300"/>
-              </a:spcAft>
-              <a:defRPr sz="2000">
-                <a:solidFill>
-                  <a:srgbClr val="2C2522"/>
-                </a:solidFill>
-              </a:defRPr>
-            </a:pPr>
-            <a:endParaRPr lang="fr-FR" dirty="0"/>
-          </a:p>
-          <a:p>
-            <a:pPr marL="342900" indent="-342900">
-              <a:spcAft>
-                <a:spcPts val="1300"/>
-              </a:spcAft>
-              <a:buFont typeface="Arial" panose="020B0604020202020204" pitchFamily="34" charset="0"/>
-              <a:buChar char="•"/>
-              <a:defRPr sz="2000">
-                <a:solidFill>
-                  <a:srgbClr val="2C2522"/>
-                </a:solidFill>
-              </a:defRPr>
-            </a:pPr>
-            <a:r>
-              <a:rPr lang="fr-FR" dirty="0"/>
-              <a:t>Compréhension de l'architecture Symfony avec Docker</a:t>
-            </a:r>
-          </a:p>
-          <a:p>
-            <a:pPr marL="342900" indent="-342900">
-              <a:spcAft>
-                <a:spcPts val="1300"/>
-              </a:spcAft>
-              <a:buFont typeface="Arial" panose="020B0604020202020204" pitchFamily="34" charset="0"/>
-              <a:buChar char="•"/>
-              <a:defRPr sz="2000">
-                <a:solidFill>
-                  <a:srgbClr val="2C2522"/>
-                </a:solidFill>
-              </a:defRPr>
-            </a:pPr>
-            <a:r>
-              <a:rPr lang="fr-FR" dirty="0"/>
-              <a:t>Relations entre les entités Doctrine</a:t>
-            </a:r>
-          </a:p>
-          <a:p>
-            <a:pPr marL="342900" indent="-342900">
-              <a:spcAft>
-                <a:spcPts val="1300"/>
-              </a:spcAft>
-              <a:buFont typeface="Arial" panose="020B0604020202020204" pitchFamily="34" charset="0"/>
-              <a:buChar char="•"/>
-              <a:defRPr sz="2000">
-                <a:solidFill>
-                  <a:srgbClr val="2C2522"/>
-                </a:solidFill>
-              </a:defRPr>
-            </a:pPr>
-            <a:r>
-              <a:rPr lang="fr-FR" dirty="0"/>
-              <a:t>Communication Controller ↔ Repository ↔ Twig</a:t>
-            </a:r>
-          </a:p>
-          <a:p>
-            <a:pPr marL="342900" indent="-342900">
-              <a:spcAft>
-                <a:spcPts val="1300"/>
-              </a:spcAft>
-              <a:buFont typeface="Arial" panose="020B0604020202020204" pitchFamily="34" charset="0"/>
-              <a:buChar char="•"/>
-              <a:defRPr sz="2000">
-                <a:solidFill>
-                  <a:srgbClr val="2C2522"/>
-                </a:solidFill>
-              </a:defRPr>
-            </a:pPr>
-            <a:r>
-              <a:rPr lang="fr-FR" dirty="0"/>
-              <a:t>Responsive et intégration de la maquette</a:t>
-            </a:r>
-          </a:p>
-          <a:p>
-            <a:pPr marL="342900" indent="-342900">
-              <a:spcAft>
-                <a:spcPts val="1300"/>
-              </a:spcAft>
-              <a:buFont typeface="Arial" panose="020B0604020202020204" pitchFamily="34" charset="0"/>
-              <a:buChar char="•"/>
-              <a:defRPr sz="2000">
-                <a:solidFill>
-                  <a:srgbClr val="2C2522"/>
-                </a:solidFill>
-              </a:defRPr>
-            </a:pPr>
-            <a:r>
-              <a:rPr lang="fr-FR" sz="2000" dirty="0"/>
-              <a:t>Répondre aux besoins spécifiques d'une autre personne.</a:t>
-            </a:r>
-            <a:endParaRPr lang="fr-FR" dirty="0"/>
-          </a:p>
-          <a:p>
-            <a:pPr>
-              <a:spcAft>
-                <a:spcPts val="1300"/>
-              </a:spcAft>
-              <a:defRPr sz="2000">
-                <a:solidFill>
-                  <a:srgbClr val="2C2522"/>
-                </a:solidFill>
-              </a:defRPr>
-            </a:pPr>
-            <a:endParaRPr lang="fr-FR" dirty="0"/>
-          </a:p>
-        </p:txBody>
-      </p:sp>
-    </p:spTree>
-  </p:cSld>
-  <p:clrMapOvr>
-    <a:masterClrMapping/>
-  </p:clrMapOvr>
-</p:sld>
-</file>
-
-<file path=ppt/slides/slide17.xml><?xml version="1.0" encoding="utf-8"?>
-<p:sld xmlns:a="http://schemas.openxmlformats.org/drawingml/2006/main" xmlns:r="http://schemas.openxmlformats.org/officeDocument/2006/relationships" xmlns:p="http://schemas.openxmlformats.org/presentationml/2006/main">
-  <p:cSld>
-    <p:spTree>
-      <p:nvGrpSpPr>
-        <p:cNvPr id="1" name=""/>
-        <p:cNvGrpSpPr/>
-        <p:nvPr/>
-      </p:nvGrpSpPr>
-      <p:grpSpPr>
-        <a:xfrm>
-          <a:off x="0" y="0"/>
-          <a:ext cx="0" cy="0"/>
-          <a:chOff x="0" y="0"/>
-          <a:chExt cx="0" cy="0"/>
-        </a:xfrm>
-      </p:grpSpPr>
-      <p:sp>
-        <p:nvSpPr>
-          <p:cNvPr id="3" name="TextBox 2"/>
-          <p:cNvSpPr txBox="1"/>
-          <p:nvPr/>
-        </p:nvSpPr>
-        <p:spPr>
-          <a:xfrm>
-            <a:off x="640080" y="411480"/>
-            <a:ext cx="10972800" cy="594360"/>
-          </a:xfrm>
-          <a:prstGeom prst="rect">
-            <a:avLst/>
-          </a:prstGeom>
-          <a:noFill/>
-        </p:spPr>
-        <p:txBody>
-          <a:bodyPr wrap="none">
-            <a:spAutoFit/>
-          </a:bodyPr>
-          <a:lstStyle/>
-          <a:p>
-            <a:r>
-              <a:rPr lang="fr-FR" sz="2800" b="1" noProof="0" dirty="0">
-                <a:solidFill>
-                  <a:srgbClr val="2C2522"/>
-                </a:solidFill>
-                <a:latin typeface="Aptos Display"/>
-              </a:rPr>
-              <a:t>Évolutions prévues</a:t>
-            </a:r>
-          </a:p>
-        </p:txBody>
-      </p:sp>
-      <p:sp>
-        <p:nvSpPr>
-          <p:cNvPr id="4" name="Rounded Rectangle 3"/>
-          <p:cNvSpPr/>
-          <p:nvPr/>
-        </p:nvSpPr>
-        <p:spPr>
-          <a:xfrm>
-            <a:off x="640080" y="2186578"/>
-            <a:ext cx="3520440" cy="2617651"/>
-          </a:xfrm>
-          <a:prstGeom prst="roundRect">
-            <a:avLst/>
-          </a:prstGeom>
-          <a:solidFill>
-            <a:srgbClr val="FFFFFF"/>
-          </a:solidFill>
-          <a:ln>
-            <a:solidFill>
-              <a:srgbClr val="EFEAE0"/>
-            </a:solidFill>
-          </a:ln>
-        </p:spPr>
-        <p:style>
-          <a:lnRef idx="1">
-            <a:schemeClr val="accent1"/>
-          </a:lnRef>
-          <a:fillRef idx="3">
-            <a:schemeClr val="accent1"/>
-          </a:fillRef>
-          <a:effectRef idx="2">
-            <a:schemeClr val="accent1"/>
-          </a:effectRef>
-          <a:fontRef idx="minor">
-            <a:schemeClr val="lt1"/>
-          </a:fontRef>
-        </p:style>
-        <p:txBody>
-          <a:bodyPr rtlCol="0" anchor="ctr"/>
-          <a:lstStyle/>
-          <a:p>
-            <a:pPr marL="0" marR="0" lvl="0" indent="0" algn="l" defTabSz="457200" rtl="0" eaLnBrk="1" fontAlgn="auto" latinLnBrk="0" hangingPunct="1">
-              <a:lnSpc>
-                <a:spcPct val="100000"/>
-              </a:lnSpc>
-              <a:spcBef>
-                <a:spcPts val="0"/>
-              </a:spcBef>
-              <a:spcAft>
-                <a:spcPts val="0"/>
-              </a:spcAft>
-              <a:buClrTx/>
-              <a:buSzTx/>
-              <a:buFontTx/>
-              <a:buNone/>
-              <a:tabLst/>
-              <a:defRPr/>
-            </a:pPr>
-            <a:r>
-              <a:rPr kumimoji="0" lang="fr-FR" b="1" i="0" u="none" strike="noStrike" kern="1200" cap="none" spc="0" normalizeH="0" baseline="0" noProof="0" dirty="0">
-                <a:ln>
-                  <a:noFill/>
-                </a:ln>
-                <a:solidFill>
-                  <a:srgbClr val="F79646">
-                    <a:lumMod val="50000"/>
-                  </a:srgbClr>
-                </a:solidFill>
-                <a:effectLst/>
-                <a:uLnTx/>
-                <a:uFillTx/>
-                <a:latin typeface="Calibri"/>
-                <a:ea typeface="+mn-ea"/>
-                <a:cs typeface="+mn-cs"/>
-              </a:rPr>
-              <a:t>COURT TERME</a:t>
-            </a:r>
-          </a:p>
-          <a:p>
-            <a:pPr marL="285750" marR="0" lvl="0" indent="-285750" algn="l" defTabSz="457200" rtl="0" eaLnBrk="1" fontAlgn="auto" latinLnBrk="0" hangingPunct="1">
-              <a:lnSpc>
-                <a:spcPct val="100000"/>
-              </a:lnSpc>
-              <a:spcBef>
-                <a:spcPts val="700"/>
-              </a:spcBef>
-              <a:spcAft>
-                <a:spcPts val="0"/>
-              </a:spcAft>
-              <a:buClrTx/>
-              <a:buSzTx/>
-              <a:buFont typeface="Arial" panose="020B0604020202020204" pitchFamily="34" charset="0"/>
-              <a:buChar char="•"/>
-              <a:tabLst/>
-              <a:defRPr sz="1200">
-                <a:solidFill>
-                  <a:srgbClr val="2C2522"/>
-                </a:solidFill>
-              </a:defRPr>
-            </a:pPr>
-            <a:r>
-              <a:rPr kumimoji="0" lang="fr-FR" sz="1600" b="0" i="0" u="none" strike="noStrike" kern="1200" cap="none" spc="0" normalizeH="0" baseline="0" noProof="0" dirty="0">
-                <a:ln>
-                  <a:noFill/>
-                </a:ln>
-                <a:solidFill>
-                  <a:srgbClr val="2C2522"/>
-                </a:solidFill>
-                <a:effectLst/>
-                <a:uLnTx/>
-                <a:uFillTx/>
-                <a:latin typeface="Calibri"/>
-                <a:ea typeface="+mn-ea"/>
-                <a:cs typeface="+mn-cs"/>
-              </a:rPr>
-              <a:t>Finaliser le back-office</a:t>
-            </a:r>
-          </a:p>
-          <a:p>
-            <a:pPr marL="285750" marR="0" lvl="0" indent="-285750" algn="l" defTabSz="457200" rtl="0" eaLnBrk="1" fontAlgn="auto" latinLnBrk="0" hangingPunct="1">
-              <a:lnSpc>
-                <a:spcPct val="100000"/>
-              </a:lnSpc>
-              <a:spcBef>
-                <a:spcPts val="700"/>
-              </a:spcBef>
-              <a:spcAft>
-                <a:spcPts val="0"/>
-              </a:spcAft>
-              <a:buClrTx/>
-              <a:buSzTx/>
-              <a:buFont typeface="Arial" panose="020B0604020202020204" pitchFamily="34" charset="0"/>
-              <a:buChar char="•"/>
-              <a:tabLst/>
-              <a:defRPr sz="1200">
-                <a:solidFill>
-                  <a:srgbClr val="2C2522"/>
-                </a:solidFill>
-              </a:defRPr>
-            </a:pPr>
-            <a:r>
-              <a:rPr kumimoji="0" lang="fr-FR" sz="1600" b="0" i="0" u="none" strike="noStrike" kern="1200" cap="none" spc="0" normalizeH="0" baseline="0" noProof="0" dirty="0">
-                <a:ln>
-                  <a:noFill/>
-                </a:ln>
-                <a:solidFill>
-                  <a:srgbClr val="2C2522"/>
-                </a:solidFill>
-                <a:effectLst/>
-                <a:uLnTx/>
-                <a:uFillTx/>
-                <a:latin typeface="Calibri"/>
-                <a:ea typeface="+mn-ea"/>
-                <a:cs typeface="+mn-cs"/>
-              </a:rPr>
-              <a:t>Améliorer les validations</a:t>
-            </a:r>
-          </a:p>
-          <a:p>
-            <a:pPr marL="285750" marR="0" lvl="0" indent="-285750" algn="l" defTabSz="457200" rtl="0" eaLnBrk="1" fontAlgn="auto" latinLnBrk="0" hangingPunct="1">
-              <a:lnSpc>
-                <a:spcPct val="100000"/>
-              </a:lnSpc>
-              <a:spcBef>
-                <a:spcPts val="700"/>
-              </a:spcBef>
-              <a:spcAft>
-                <a:spcPts val="0"/>
-              </a:spcAft>
-              <a:buClrTx/>
-              <a:buSzTx/>
-              <a:buFont typeface="Arial" panose="020B0604020202020204" pitchFamily="34" charset="0"/>
-              <a:buChar char="•"/>
-              <a:tabLst/>
-              <a:defRPr sz="1200">
-                <a:solidFill>
-                  <a:srgbClr val="2C2522"/>
-                </a:solidFill>
-              </a:defRPr>
-            </a:pPr>
-            <a:r>
-              <a:rPr kumimoji="0" lang="fr-FR" sz="1600" b="0" i="0" u="none" strike="noStrike" kern="1200" cap="none" spc="0" normalizeH="0" baseline="0" noProof="0" dirty="0">
-                <a:ln>
-                  <a:noFill/>
-                </a:ln>
-                <a:solidFill>
-                  <a:srgbClr val="2C2522"/>
-                </a:solidFill>
-                <a:effectLst/>
-                <a:uLnTx/>
-                <a:uFillTx/>
-                <a:latin typeface="Calibri"/>
-                <a:ea typeface="+mn-ea"/>
-                <a:cs typeface="+mn-cs"/>
-              </a:rPr>
-              <a:t>Ajouter davantage de tests</a:t>
-            </a:r>
-          </a:p>
-          <a:p>
-            <a:pPr marL="285750" marR="0" lvl="0" indent="-285750" algn="l" defTabSz="457200" rtl="0" eaLnBrk="1" fontAlgn="auto" latinLnBrk="0" hangingPunct="1">
-              <a:lnSpc>
-                <a:spcPct val="100000"/>
-              </a:lnSpc>
-              <a:spcBef>
-                <a:spcPts val="700"/>
-              </a:spcBef>
-              <a:spcAft>
-                <a:spcPts val="0"/>
-              </a:spcAft>
-              <a:buClrTx/>
-              <a:buSzTx/>
-              <a:buFont typeface="Arial" panose="020B0604020202020204" pitchFamily="34" charset="0"/>
-              <a:buChar char="•"/>
-              <a:tabLst/>
-              <a:defRPr sz="1200">
-                <a:solidFill>
-                  <a:srgbClr val="2C2522"/>
-                </a:solidFill>
-              </a:defRPr>
-            </a:pPr>
-            <a:r>
-              <a:rPr kumimoji="0" lang="fr-FR" sz="1600" b="0" i="0" u="none" strike="noStrike" kern="1200" cap="none" spc="0" normalizeH="0" baseline="0" noProof="0" dirty="0">
-                <a:ln>
-                  <a:noFill/>
-                </a:ln>
-                <a:solidFill>
-                  <a:srgbClr val="2C2522"/>
-                </a:solidFill>
-                <a:effectLst/>
-                <a:uLnTx/>
-                <a:uFillTx/>
-                <a:latin typeface="Calibri"/>
-                <a:ea typeface="+mn-ea"/>
-                <a:cs typeface="+mn-cs"/>
-              </a:rPr>
-              <a:t>Finaliser le responsive</a:t>
-            </a:r>
-          </a:p>
-        </p:txBody>
-      </p:sp>
-      <p:sp>
-        <p:nvSpPr>
-          <p:cNvPr id="6" name="Rounded Rectangle 5"/>
-          <p:cNvSpPr/>
-          <p:nvPr/>
-        </p:nvSpPr>
-        <p:spPr>
-          <a:xfrm>
-            <a:off x="4343400" y="2186578"/>
-            <a:ext cx="3520440" cy="2617651"/>
-          </a:xfrm>
-          <a:prstGeom prst="roundRect">
-            <a:avLst/>
-          </a:prstGeom>
-          <a:solidFill>
-            <a:srgbClr val="FFFFFF"/>
-          </a:solidFill>
-          <a:ln>
-            <a:solidFill>
-              <a:srgbClr val="EFEAE0"/>
-            </a:solidFill>
-          </a:ln>
-        </p:spPr>
-        <p:style>
-          <a:lnRef idx="1">
-            <a:schemeClr val="accent1"/>
-          </a:lnRef>
-          <a:fillRef idx="3">
-            <a:schemeClr val="accent1"/>
-          </a:fillRef>
-          <a:effectRef idx="2">
-            <a:schemeClr val="accent1"/>
-          </a:effectRef>
-          <a:fontRef idx="minor">
-            <a:schemeClr val="lt1"/>
-          </a:fontRef>
-        </p:style>
-        <p:txBody>
-          <a:bodyPr rtlCol="0" anchor="ctr"/>
-          <a:lstStyle/>
-          <a:p>
-            <a:pPr marL="0" marR="0" lvl="0" indent="0" algn="l" defTabSz="457200" rtl="0" eaLnBrk="1" fontAlgn="auto" latinLnBrk="0" hangingPunct="1">
-              <a:lnSpc>
-                <a:spcPct val="100000"/>
-              </a:lnSpc>
-              <a:spcBef>
-                <a:spcPts val="0"/>
-              </a:spcBef>
-              <a:spcAft>
-                <a:spcPts val="0"/>
-              </a:spcAft>
-              <a:buClrTx/>
-              <a:buSzTx/>
-              <a:buFontTx/>
-              <a:buNone/>
-              <a:tabLst/>
-              <a:defRPr/>
-            </a:pPr>
-            <a:r>
-              <a:rPr kumimoji="0" lang="fr-FR" b="1" i="0" u="none" strike="noStrike" kern="1200" cap="none" spc="0" normalizeH="0" baseline="0" noProof="0" dirty="0">
-                <a:ln>
-                  <a:noFill/>
-                </a:ln>
-                <a:solidFill>
-                  <a:srgbClr val="F79646">
-                    <a:lumMod val="50000"/>
-                  </a:srgbClr>
-                </a:solidFill>
-                <a:effectLst/>
-                <a:uLnTx/>
-                <a:uFillTx/>
-                <a:latin typeface="Calibri"/>
-                <a:ea typeface="+mn-ea"/>
-                <a:cs typeface="+mn-cs"/>
-              </a:rPr>
-              <a:t>MOYEN TERME</a:t>
-            </a:r>
-          </a:p>
-          <a:p>
-            <a:pPr marL="285750" marR="0" lvl="0" indent="-285750" algn="l" defTabSz="457200" rtl="0" eaLnBrk="1" fontAlgn="auto" latinLnBrk="0" hangingPunct="1">
-              <a:lnSpc>
-                <a:spcPct val="100000"/>
-              </a:lnSpc>
-              <a:spcBef>
-                <a:spcPts val="700"/>
-              </a:spcBef>
-              <a:spcAft>
-                <a:spcPts val="0"/>
-              </a:spcAft>
-              <a:buClrTx/>
-              <a:buSzTx/>
-              <a:buFont typeface="Arial" panose="020B0604020202020204" pitchFamily="34" charset="0"/>
-              <a:buChar char="•"/>
-              <a:tabLst/>
-              <a:defRPr sz="1200">
-                <a:solidFill>
-                  <a:srgbClr val="2C2522"/>
-                </a:solidFill>
-              </a:defRPr>
-            </a:pPr>
-            <a:r>
-              <a:rPr kumimoji="0" lang="fr-FR" sz="1600" b="0" i="0" u="none" strike="noStrike" kern="1200" cap="none" spc="0" normalizeH="0" baseline="0" noProof="0" dirty="0" err="1">
-                <a:ln>
-                  <a:noFill/>
-                </a:ln>
-                <a:solidFill>
-                  <a:srgbClr val="2C2522"/>
-                </a:solidFill>
-                <a:effectLst/>
-                <a:uLnTx/>
-                <a:uFillTx/>
-                <a:latin typeface="Calibri"/>
-                <a:ea typeface="+mn-ea"/>
-                <a:cs typeface="+mn-cs"/>
-              </a:rPr>
-              <a:t>Upload</a:t>
-            </a:r>
-            <a:r>
-              <a:rPr kumimoji="0" lang="fr-FR" sz="1600" b="0" i="0" u="none" strike="noStrike" kern="1200" cap="none" spc="0" normalizeH="0" baseline="0" noProof="0" dirty="0">
-                <a:ln>
-                  <a:noFill/>
-                </a:ln>
-                <a:solidFill>
-                  <a:srgbClr val="2C2522"/>
-                </a:solidFill>
-                <a:effectLst/>
-                <a:uLnTx/>
-                <a:uFillTx/>
-                <a:latin typeface="Calibri"/>
-                <a:ea typeface="+mn-ea"/>
-                <a:cs typeface="+mn-cs"/>
-              </a:rPr>
-              <a:t> d'images</a:t>
-            </a:r>
-          </a:p>
-          <a:p>
-            <a:pPr marL="285750" marR="0" lvl="0" indent="-285750" algn="l" defTabSz="457200" rtl="0" eaLnBrk="1" fontAlgn="auto" latinLnBrk="0" hangingPunct="1">
-              <a:lnSpc>
-                <a:spcPct val="100000"/>
-              </a:lnSpc>
-              <a:spcBef>
-                <a:spcPts val="700"/>
-              </a:spcBef>
-              <a:spcAft>
-                <a:spcPts val="0"/>
-              </a:spcAft>
-              <a:buClrTx/>
-              <a:buSzTx/>
-              <a:buFont typeface="Arial" panose="020B0604020202020204" pitchFamily="34" charset="0"/>
-              <a:buChar char="•"/>
-              <a:tabLst/>
-              <a:defRPr sz="1200">
-                <a:solidFill>
-                  <a:srgbClr val="2C2522"/>
-                </a:solidFill>
-              </a:defRPr>
-            </a:pPr>
-            <a:r>
-              <a:rPr kumimoji="0" lang="fr-FR" sz="1600" b="0" i="0" u="none" strike="noStrike" kern="1200" cap="none" spc="0" normalizeH="0" baseline="0" noProof="0" dirty="0">
-                <a:ln>
-                  <a:noFill/>
-                </a:ln>
-                <a:solidFill>
-                  <a:srgbClr val="2C2522"/>
-                </a:solidFill>
-                <a:effectLst/>
-                <a:uLnTx/>
-                <a:uFillTx/>
-                <a:latin typeface="Calibri"/>
-                <a:ea typeface="+mn-ea"/>
-                <a:cs typeface="+mn-cs"/>
-              </a:rPr>
-              <a:t>Recherche et filtres</a:t>
-            </a:r>
-          </a:p>
-          <a:p>
-            <a:pPr marL="285750" marR="0" lvl="0" indent="-285750" algn="l" defTabSz="457200" rtl="0" eaLnBrk="1" fontAlgn="auto" latinLnBrk="0" hangingPunct="1">
-              <a:lnSpc>
-                <a:spcPct val="100000"/>
-              </a:lnSpc>
-              <a:spcBef>
-                <a:spcPts val="700"/>
-              </a:spcBef>
-              <a:spcAft>
-                <a:spcPts val="0"/>
-              </a:spcAft>
-              <a:buClrTx/>
-              <a:buSzTx/>
-              <a:buFont typeface="Arial" panose="020B0604020202020204" pitchFamily="34" charset="0"/>
-              <a:buChar char="•"/>
-              <a:tabLst/>
-              <a:defRPr sz="1200">
-                <a:solidFill>
-                  <a:srgbClr val="2C2522"/>
-                </a:solidFill>
-              </a:defRPr>
-            </a:pPr>
-            <a:r>
-              <a:rPr kumimoji="0" lang="fr-FR" sz="1600" b="0" i="0" u="none" strike="noStrike" kern="1200" cap="none" spc="0" normalizeH="0" baseline="0" noProof="0" dirty="0">
-                <a:ln>
-                  <a:noFill/>
-                </a:ln>
-                <a:solidFill>
-                  <a:srgbClr val="2C2522"/>
-                </a:solidFill>
-                <a:effectLst/>
-                <a:uLnTx/>
-                <a:uFillTx/>
-                <a:latin typeface="Calibri"/>
-                <a:ea typeface="+mn-ea"/>
-                <a:cs typeface="+mn-cs"/>
-              </a:rPr>
-              <a:t>Pagination</a:t>
-            </a:r>
-            <a:endParaRPr lang="fr-FR" sz="1600" dirty="0">
-              <a:solidFill>
-                <a:srgbClr val="2C2522"/>
-              </a:solidFill>
-              <a:latin typeface="Calibri"/>
-            </a:endParaRPr>
-          </a:p>
-          <a:p>
-            <a:pPr marL="285750" marR="0" lvl="0" indent="-285750" algn="l" defTabSz="457200" rtl="0" eaLnBrk="1" fontAlgn="auto" latinLnBrk="0" hangingPunct="1">
-              <a:lnSpc>
-                <a:spcPct val="100000"/>
-              </a:lnSpc>
-              <a:spcBef>
-                <a:spcPts val="700"/>
-              </a:spcBef>
-              <a:spcAft>
-                <a:spcPts val="0"/>
-              </a:spcAft>
-              <a:buClrTx/>
-              <a:buSzTx/>
-              <a:buFont typeface="Arial" panose="020B0604020202020204" pitchFamily="34" charset="0"/>
-              <a:buChar char="•"/>
-              <a:tabLst/>
-              <a:defRPr sz="1200">
-                <a:solidFill>
-                  <a:srgbClr val="2C2522"/>
-                </a:solidFill>
-              </a:defRPr>
-            </a:pPr>
-            <a:r>
-              <a:rPr kumimoji="0" lang="fr-FR" sz="1600" b="0" i="0" u="none" strike="noStrike" kern="1200" cap="none" spc="0" normalizeH="0" baseline="0" noProof="0" dirty="0">
-                <a:ln>
-                  <a:noFill/>
-                </a:ln>
-                <a:solidFill>
-                  <a:srgbClr val="2C2522"/>
-                </a:solidFill>
-                <a:effectLst/>
-                <a:uLnTx/>
-                <a:uFillTx/>
-                <a:latin typeface="Calibri"/>
-                <a:ea typeface="+mn-ea"/>
-                <a:cs typeface="+mn-cs"/>
-              </a:rPr>
-              <a:t>Notifications email</a:t>
-            </a:r>
-          </a:p>
-        </p:txBody>
-      </p:sp>
-      <p:sp>
-        <p:nvSpPr>
-          <p:cNvPr id="8" name="Rounded Rectangle 7"/>
-          <p:cNvSpPr/>
-          <p:nvPr/>
-        </p:nvSpPr>
-        <p:spPr>
-          <a:xfrm>
-            <a:off x="8046720" y="2186578"/>
-            <a:ext cx="3520440" cy="2617651"/>
-          </a:xfrm>
-          <a:prstGeom prst="roundRect">
-            <a:avLst/>
-          </a:prstGeom>
-          <a:solidFill>
-            <a:srgbClr val="FFFFFF"/>
-          </a:solidFill>
-          <a:ln>
-            <a:solidFill>
-              <a:srgbClr val="EFEAE0"/>
-            </a:solidFill>
-          </a:ln>
-        </p:spPr>
-        <p:style>
-          <a:lnRef idx="1">
-            <a:schemeClr val="accent1"/>
-          </a:lnRef>
-          <a:fillRef idx="3">
-            <a:schemeClr val="accent1"/>
-          </a:fillRef>
-          <a:effectRef idx="2">
-            <a:schemeClr val="accent1"/>
-          </a:effectRef>
-          <a:fontRef idx="minor">
-            <a:schemeClr val="lt1"/>
-          </a:fontRef>
-        </p:style>
-        <p:txBody>
-          <a:bodyPr rtlCol="0" anchor="ctr"/>
-          <a:lstStyle/>
-          <a:p>
-            <a:pPr marL="0" marR="0" lvl="0" indent="0" algn="l" defTabSz="457200" rtl="0" eaLnBrk="1" fontAlgn="auto" latinLnBrk="0" hangingPunct="1">
-              <a:lnSpc>
-                <a:spcPct val="100000"/>
-              </a:lnSpc>
-              <a:spcBef>
-                <a:spcPts val="0"/>
-              </a:spcBef>
-              <a:spcAft>
-                <a:spcPts val="0"/>
-              </a:spcAft>
-              <a:buClrTx/>
-              <a:buSzTx/>
-              <a:buFontTx/>
-              <a:buNone/>
-              <a:tabLst/>
-              <a:defRPr/>
-            </a:pPr>
-            <a:r>
-              <a:rPr kumimoji="0" lang="fr-FR" b="1" i="0" u="none" strike="noStrike" kern="1200" cap="none" spc="0" normalizeH="0" baseline="0" noProof="0" dirty="0">
-                <a:ln>
-                  <a:noFill/>
-                </a:ln>
-                <a:solidFill>
-                  <a:srgbClr val="F79646">
-                    <a:lumMod val="50000"/>
-                  </a:srgbClr>
-                </a:solidFill>
-                <a:effectLst/>
-                <a:uLnTx/>
-                <a:uFillTx/>
-                <a:latin typeface="Calibri"/>
-                <a:ea typeface="+mn-ea"/>
-                <a:cs typeface="+mn-cs"/>
-              </a:rPr>
-              <a:t>LONG TERME</a:t>
-            </a:r>
-          </a:p>
-          <a:p>
-            <a:pPr marL="285750" marR="0" lvl="0" indent="-285750" algn="l" defTabSz="457200" rtl="0" eaLnBrk="1" fontAlgn="auto" latinLnBrk="0" hangingPunct="1">
-              <a:lnSpc>
-                <a:spcPct val="100000"/>
-              </a:lnSpc>
-              <a:spcBef>
-                <a:spcPts val="700"/>
-              </a:spcBef>
-              <a:spcAft>
-                <a:spcPts val="0"/>
-              </a:spcAft>
-              <a:buClrTx/>
-              <a:buSzTx/>
-              <a:buFont typeface="Arial" panose="020B0604020202020204" pitchFamily="34" charset="0"/>
-              <a:buChar char="•"/>
-              <a:tabLst/>
-              <a:defRPr sz="1200">
-                <a:solidFill>
-                  <a:srgbClr val="2C2522"/>
-                </a:solidFill>
-              </a:defRPr>
-            </a:pPr>
-            <a:r>
-              <a:rPr kumimoji="0" lang="fr-FR" sz="1600" b="0" i="0" u="none" strike="noStrike" kern="1200" cap="none" spc="0" normalizeH="0" baseline="0" noProof="0" dirty="0">
-                <a:ln>
-                  <a:noFill/>
-                </a:ln>
-                <a:solidFill>
-                  <a:srgbClr val="2C2522"/>
-                </a:solidFill>
-                <a:effectLst/>
-                <a:uLnTx/>
-                <a:uFillTx/>
-                <a:latin typeface="Calibri"/>
-                <a:ea typeface="+mn-ea"/>
-                <a:cs typeface="+mn-cs"/>
-              </a:rPr>
-              <a:t>Demande de devis avancée</a:t>
-            </a:r>
-          </a:p>
-          <a:p>
-            <a:pPr marL="285750" marR="0" lvl="0" indent="-285750" algn="l" defTabSz="457200" rtl="0" eaLnBrk="1" fontAlgn="auto" latinLnBrk="0" hangingPunct="1">
-              <a:lnSpc>
-                <a:spcPct val="100000"/>
-              </a:lnSpc>
-              <a:spcBef>
-                <a:spcPts val="700"/>
-              </a:spcBef>
-              <a:spcAft>
-                <a:spcPts val="0"/>
-              </a:spcAft>
-              <a:buClrTx/>
-              <a:buSzTx/>
-              <a:buFont typeface="Arial" panose="020B0604020202020204" pitchFamily="34" charset="0"/>
-              <a:buChar char="•"/>
-              <a:tabLst/>
-              <a:defRPr sz="1200">
-                <a:solidFill>
-                  <a:srgbClr val="2C2522"/>
-                </a:solidFill>
-              </a:defRPr>
-            </a:pPr>
-            <a:r>
-              <a:rPr kumimoji="0" lang="fr-FR" sz="1600" b="0" i="0" u="none" strike="noStrike" kern="1200" cap="none" spc="0" normalizeH="0" baseline="0" noProof="0" dirty="0">
-                <a:ln>
-                  <a:noFill/>
-                </a:ln>
-                <a:solidFill>
-                  <a:srgbClr val="2C2522"/>
-                </a:solidFill>
-                <a:effectLst/>
-                <a:uLnTx/>
-                <a:uFillTx/>
-                <a:latin typeface="Calibri"/>
-                <a:ea typeface="+mn-ea"/>
-                <a:cs typeface="+mn-cs"/>
-              </a:rPr>
-              <a:t>Personnalisation des produits</a:t>
-            </a:r>
-          </a:p>
-          <a:p>
-            <a:pPr marL="285750" marR="0" lvl="0" indent="-285750" algn="l" defTabSz="457200" rtl="0" eaLnBrk="1" fontAlgn="auto" latinLnBrk="0" hangingPunct="1">
-              <a:lnSpc>
-                <a:spcPct val="100000"/>
-              </a:lnSpc>
-              <a:spcBef>
-                <a:spcPts val="700"/>
-              </a:spcBef>
-              <a:spcAft>
-                <a:spcPts val="0"/>
-              </a:spcAft>
-              <a:buClrTx/>
-              <a:buSzTx/>
-              <a:buFont typeface="Arial" panose="020B0604020202020204" pitchFamily="34" charset="0"/>
-              <a:buChar char="•"/>
-              <a:tabLst/>
-              <a:defRPr sz="1200">
-                <a:solidFill>
-                  <a:srgbClr val="2C2522"/>
-                </a:solidFill>
-              </a:defRPr>
-            </a:pPr>
-            <a:r>
-              <a:rPr lang="fr-FR" sz="1600" dirty="0">
-                <a:solidFill>
-                  <a:srgbClr val="2C2522"/>
-                </a:solidFill>
-                <a:latin typeface="Calibri"/>
-              </a:rPr>
-              <a:t>Traduction du site</a:t>
-            </a:r>
-            <a:endParaRPr kumimoji="0" lang="fr-FR" sz="1600" b="0" i="0" u="none" strike="noStrike" kern="1200" cap="none" spc="0" normalizeH="0" baseline="0" noProof="0" dirty="0">
-              <a:ln>
-                <a:noFill/>
-              </a:ln>
-              <a:solidFill>
-                <a:srgbClr val="2C2522"/>
-              </a:solidFill>
-              <a:effectLst/>
-              <a:uLnTx/>
-              <a:uFillTx/>
-              <a:latin typeface="Calibri"/>
-              <a:ea typeface="+mn-ea"/>
-              <a:cs typeface="+mn-cs"/>
-            </a:endParaRPr>
-          </a:p>
-          <a:p>
-            <a:pPr marL="285750" marR="0" lvl="0" indent="-285750" algn="l" defTabSz="457200" rtl="0" eaLnBrk="1" fontAlgn="auto" latinLnBrk="0" hangingPunct="1">
-              <a:lnSpc>
-                <a:spcPct val="100000"/>
-              </a:lnSpc>
-              <a:spcBef>
-                <a:spcPts val="700"/>
-              </a:spcBef>
-              <a:spcAft>
-                <a:spcPts val="0"/>
-              </a:spcAft>
-              <a:buClrTx/>
-              <a:buSzTx/>
-              <a:buFont typeface="Arial" panose="020B0604020202020204" pitchFamily="34" charset="0"/>
-              <a:buChar char="•"/>
-              <a:tabLst/>
-              <a:defRPr sz="1200">
-                <a:solidFill>
-                  <a:srgbClr val="2C2522"/>
-                </a:solidFill>
-              </a:defRPr>
-            </a:pPr>
-            <a:r>
-              <a:rPr kumimoji="0" lang="fr-FR" sz="1600" b="0" i="0" u="none" strike="noStrike" kern="1200" cap="none" spc="0" normalizeH="0" baseline="0" noProof="0" dirty="0">
-                <a:ln>
-                  <a:noFill/>
-                </a:ln>
-                <a:solidFill>
-                  <a:srgbClr val="2C2522"/>
-                </a:solidFill>
-                <a:effectLst/>
-                <a:uLnTx/>
-                <a:uFillTx/>
-                <a:latin typeface="Calibri"/>
-                <a:ea typeface="+mn-ea"/>
-                <a:cs typeface="+mn-cs"/>
-              </a:rPr>
-              <a:t>Mise en production</a:t>
-            </a:r>
-          </a:p>
-        </p:txBody>
-      </p:sp>
-      <p:sp>
-        <p:nvSpPr>
-          <p:cNvPr id="10" name="Rectangle 9"/>
-          <p:cNvSpPr/>
-          <p:nvPr/>
-        </p:nvSpPr>
-        <p:spPr>
-          <a:xfrm>
-            <a:off x="640080" y="6419088"/>
-            <a:ext cx="10881360" cy="18288"/>
-          </a:xfrm>
-          <a:prstGeom prst="rect">
-            <a:avLst/>
-          </a:prstGeom>
-          <a:solidFill>
-            <a:srgbClr val="EFEAE0"/>
-          </a:solidFill>
-          <a:ln>
-            <a:noFill/>
-          </a:ln>
-        </p:spPr>
-        <p:style>
-          <a:lnRef idx="1">
-            <a:schemeClr val="accent1"/>
-          </a:lnRef>
-          <a:fillRef idx="3">
-            <a:schemeClr val="accent1"/>
-          </a:fillRef>
-          <a:effectRef idx="2">
-            <a:schemeClr val="accent1"/>
-          </a:effectRef>
-          <a:fontRef idx="minor">
-            <a:schemeClr val="lt1"/>
-          </a:fontRef>
-        </p:style>
-        <p:txBody>
-          <a:bodyPr rtlCol="0" anchor="ctr"/>
-          <a:lstStyle/>
-          <a:p>
-            <a:pPr algn="ctr"/>
-            <a:endParaRPr lang="fr-FR" noProof="0" dirty="0"/>
-          </a:p>
-        </p:txBody>
-      </p:sp>
-      <p:sp>
-        <p:nvSpPr>
-          <p:cNvPr id="11" name="TextBox 10"/>
-          <p:cNvSpPr txBox="1"/>
-          <p:nvPr/>
-        </p:nvSpPr>
-        <p:spPr>
-          <a:xfrm>
-            <a:off x="10789920" y="6473952"/>
-            <a:ext cx="640080" cy="182880"/>
-          </a:xfrm>
-          <a:prstGeom prst="rect">
-            <a:avLst/>
-          </a:prstGeom>
-          <a:noFill/>
-        </p:spPr>
-        <p:txBody>
-          <a:bodyPr wrap="none">
-            <a:spAutoFit/>
-          </a:bodyPr>
-          <a:lstStyle/>
-          <a:p>
-            <a:pPr algn="r"/>
-            <a:r>
-              <a:rPr lang="fr-FR" sz="900" noProof="0" dirty="0">
-                <a:solidFill>
-                  <a:srgbClr val="69625E"/>
-                </a:solidFill>
-              </a:rPr>
-              <a:t>14</a:t>
             </a:r>
           </a:p>
         </p:txBody>
@@ -11688,8 +11975,8 @@
         </p:nvSpPr>
         <p:spPr>
           <a:xfrm>
-            <a:off x="822960" y="914400"/>
-            <a:ext cx="10515600" cy="731520"/>
+            <a:off x="640080" y="411480"/>
+            <a:ext cx="3692678" cy="523220"/>
           </a:xfrm>
           <a:prstGeom prst="rect">
             <a:avLst/>
@@ -11702,355 +11989,21 @@
           </a:bodyPr>
           <a:lstStyle/>
           <a:p>
-            <a:pPr algn="ctr"/>
-            <a:r>
-              <a:rPr lang="fr-FR" sz="3600" b="1" noProof="0" dirty="0">
-                <a:solidFill>
-                  <a:srgbClr val="2C2522"/>
-                </a:solidFill>
-              </a:rPr>
-              <a:t>Conclusion</a:t>
-            </a:r>
-          </a:p>
-        </p:txBody>
-      </p:sp>
-      <p:sp>
-        <p:nvSpPr>
-          <p:cNvPr id="4" name="Rounded Rectangle 3"/>
-          <p:cNvSpPr/>
-          <p:nvPr/>
-        </p:nvSpPr>
-        <p:spPr>
-          <a:xfrm>
-            <a:off x="914400" y="2651760"/>
-            <a:ext cx="1920240" cy="914400"/>
-          </a:xfrm>
-          <a:prstGeom prst="roundRect">
-            <a:avLst/>
-          </a:prstGeom>
-          <a:solidFill>
-            <a:srgbClr val="FFFFFF"/>
-          </a:solidFill>
-          <a:ln>
-            <a:solidFill>
-              <a:srgbClr val="B89753"/>
-            </a:solidFill>
-          </a:ln>
-        </p:spPr>
-        <p:style>
-          <a:lnRef idx="1">
-            <a:schemeClr val="accent1"/>
-          </a:lnRef>
-          <a:fillRef idx="3">
-            <a:schemeClr val="accent1"/>
-          </a:fillRef>
-          <a:effectRef idx="2">
-            <a:schemeClr val="accent1"/>
-          </a:effectRef>
-          <a:fontRef idx="minor">
-            <a:schemeClr val="lt1"/>
-          </a:fontRef>
-        </p:style>
-        <p:txBody>
-          <a:bodyPr rtlCol="0" anchor="ctr"/>
-          <a:lstStyle/>
-          <a:p>
-            <a:pPr algn="ctr"/>
-            <a:r>
-              <a:rPr lang="fr-FR" sz="1400" b="1" noProof="0" dirty="0">
-                <a:solidFill>
-                  <a:srgbClr val="2C2522"/>
-                </a:solidFill>
-              </a:rPr>
-              <a:t>Conception</a:t>
-            </a:r>
-          </a:p>
-        </p:txBody>
-      </p:sp>
-      <p:sp>
-        <p:nvSpPr>
-          <p:cNvPr id="5" name="Rounded Rectangle 4"/>
-          <p:cNvSpPr/>
-          <p:nvPr/>
-        </p:nvSpPr>
-        <p:spPr>
-          <a:xfrm>
-            <a:off x="3154680" y="2651760"/>
-            <a:ext cx="1920240" cy="914400"/>
-          </a:xfrm>
-          <a:prstGeom prst="roundRect">
-            <a:avLst/>
-          </a:prstGeom>
-          <a:solidFill>
-            <a:srgbClr val="FFFFFF"/>
-          </a:solidFill>
-          <a:ln>
-            <a:solidFill>
-              <a:srgbClr val="B89753"/>
-            </a:solidFill>
-          </a:ln>
-        </p:spPr>
-        <p:style>
-          <a:lnRef idx="1">
-            <a:schemeClr val="accent1"/>
-          </a:lnRef>
-          <a:fillRef idx="3">
-            <a:schemeClr val="accent1"/>
-          </a:fillRef>
-          <a:effectRef idx="2">
-            <a:schemeClr val="accent1"/>
-          </a:effectRef>
-          <a:fontRef idx="minor">
-            <a:schemeClr val="lt1"/>
-          </a:fontRef>
-        </p:style>
-        <p:txBody>
-          <a:bodyPr rtlCol="0" anchor="ctr"/>
-          <a:lstStyle/>
-          <a:p>
-            <a:pPr algn="ctr"/>
-            <a:r>
-              <a:rPr lang="fr-FR" sz="1400" b="1" noProof="0" dirty="0">
-                <a:solidFill>
-                  <a:srgbClr val="2C2522"/>
-                </a:solidFill>
-              </a:rPr>
-              <a:t>Base de données</a:t>
-            </a:r>
-          </a:p>
-        </p:txBody>
-      </p:sp>
-      <p:sp>
-        <p:nvSpPr>
-          <p:cNvPr id="6" name="Rounded Rectangle 5"/>
-          <p:cNvSpPr/>
-          <p:nvPr/>
-        </p:nvSpPr>
-        <p:spPr>
-          <a:xfrm>
-            <a:off x="5394960" y="2651760"/>
-            <a:ext cx="1920240" cy="914400"/>
-          </a:xfrm>
-          <a:prstGeom prst="roundRect">
-            <a:avLst/>
-          </a:prstGeom>
-          <a:solidFill>
-            <a:srgbClr val="FFFFFF"/>
-          </a:solidFill>
-          <a:ln>
-            <a:solidFill>
-              <a:srgbClr val="B89753"/>
-            </a:solidFill>
-          </a:ln>
-        </p:spPr>
-        <p:style>
-          <a:lnRef idx="1">
-            <a:schemeClr val="accent1"/>
-          </a:lnRef>
-          <a:fillRef idx="3">
-            <a:schemeClr val="accent1"/>
-          </a:fillRef>
-          <a:effectRef idx="2">
-            <a:schemeClr val="accent1"/>
-          </a:effectRef>
-          <a:fontRef idx="minor">
-            <a:schemeClr val="lt1"/>
-          </a:fontRef>
-        </p:style>
-        <p:txBody>
-          <a:bodyPr rtlCol="0" anchor="ctr"/>
-          <a:lstStyle/>
-          <a:p>
-            <a:pPr algn="ctr"/>
-            <a:r>
-              <a:rPr lang="fr-FR" sz="1400" b="1" noProof="0" dirty="0">
-                <a:solidFill>
-                  <a:srgbClr val="2C2522"/>
-                </a:solidFill>
-              </a:rPr>
-              <a:t>Symfony / </a:t>
-            </a:r>
-            <a:r>
-              <a:rPr lang="fr-FR" sz="1400" b="1" noProof="0" dirty="0" err="1">
-                <a:solidFill>
-                  <a:srgbClr val="2C2522"/>
-                </a:solidFill>
-              </a:rPr>
-              <a:t>Back-end</a:t>
-            </a:r>
-            <a:endParaRPr lang="fr-FR" sz="1400" b="1" noProof="0" dirty="0">
-              <a:solidFill>
-                <a:srgbClr val="2C2522"/>
-              </a:solidFill>
-            </a:endParaRPr>
-          </a:p>
-        </p:txBody>
-      </p:sp>
-      <p:sp>
-        <p:nvSpPr>
-          <p:cNvPr id="7" name="Rounded Rectangle 6"/>
-          <p:cNvSpPr/>
-          <p:nvPr/>
-        </p:nvSpPr>
-        <p:spPr>
-          <a:xfrm>
-            <a:off x="7635240" y="2651760"/>
-            <a:ext cx="1920240" cy="914400"/>
-          </a:xfrm>
-          <a:prstGeom prst="roundRect">
-            <a:avLst/>
-          </a:prstGeom>
-          <a:solidFill>
-            <a:srgbClr val="FFFFFF"/>
-          </a:solidFill>
-          <a:ln>
-            <a:solidFill>
-              <a:srgbClr val="B89753"/>
-            </a:solidFill>
-          </a:ln>
-        </p:spPr>
-        <p:style>
-          <a:lnRef idx="1">
-            <a:schemeClr val="accent1"/>
-          </a:lnRef>
-          <a:fillRef idx="3">
-            <a:schemeClr val="accent1"/>
-          </a:fillRef>
-          <a:effectRef idx="2">
-            <a:schemeClr val="accent1"/>
-          </a:effectRef>
-          <a:fontRef idx="minor">
-            <a:schemeClr val="lt1"/>
-          </a:fontRef>
-        </p:style>
-        <p:txBody>
-          <a:bodyPr rtlCol="0" anchor="ctr"/>
-          <a:lstStyle/>
-          <a:p>
-            <a:pPr algn="ctr"/>
-            <a:r>
-              <a:rPr lang="fr-FR" sz="1400" b="1" noProof="0" dirty="0">
-                <a:solidFill>
-                  <a:srgbClr val="2C2522"/>
-                </a:solidFill>
-              </a:rPr>
-              <a:t>Twig / </a:t>
-            </a:r>
-            <a:r>
-              <a:rPr lang="fr-FR" sz="1400" b="1" noProof="0" dirty="0" err="1">
-                <a:solidFill>
-                  <a:srgbClr val="2C2522"/>
-                </a:solidFill>
-              </a:rPr>
-              <a:t>Front-end</a:t>
-            </a:r>
-            <a:endParaRPr lang="fr-FR" sz="1400" b="1" noProof="0" dirty="0">
-              <a:solidFill>
-                <a:srgbClr val="2C2522"/>
-              </a:solidFill>
-            </a:endParaRPr>
-          </a:p>
-        </p:txBody>
-      </p:sp>
-      <p:sp>
-        <p:nvSpPr>
-          <p:cNvPr id="8" name="Rounded Rectangle 7"/>
-          <p:cNvSpPr/>
-          <p:nvPr/>
-        </p:nvSpPr>
-        <p:spPr>
-          <a:xfrm>
-            <a:off x="9875520" y="2651760"/>
-            <a:ext cx="1920240" cy="914400"/>
-          </a:xfrm>
-          <a:prstGeom prst="roundRect">
-            <a:avLst/>
-          </a:prstGeom>
-          <a:solidFill>
-            <a:srgbClr val="EFEAE0"/>
-          </a:solidFill>
-          <a:ln>
-            <a:solidFill>
-              <a:srgbClr val="B89753"/>
-            </a:solidFill>
-          </a:ln>
-        </p:spPr>
-        <p:style>
-          <a:lnRef idx="1">
-            <a:schemeClr val="accent1"/>
-          </a:lnRef>
-          <a:fillRef idx="3">
-            <a:schemeClr val="accent1"/>
-          </a:fillRef>
-          <a:effectRef idx="2">
-            <a:schemeClr val="accent1"/>
-          </a:effectRef>
-          <a:fontRef idx="minor">
-            <a:schemeClr val="lt1"/>
-          </a:fontRef>
-        </p:style>
-        <p:txBody>
-          <a:bodyPr rtlCol="0" anchor="ctr"/>
-          <a:lstStyle/>
-          <a:p>
-            <a:pPr algn="ctr"/>
-            <a:r>
-              <a:rPr lang="fr-FR" sz="1400" b="1" noProof="0" dirty="0">
-                <a:solidFill>
-                  <a:srgbClr val="2C2522"/>
-                </a:solidFill>
-              </a:rPr>
-              <a:t>Application fonctionnelle</a:t>
-            </a:r>
-          </a:p>
-        </p:txBody>
-      </p:sp>
-      <p:sp>
-        <p:nvSpPr>
-          <p:cNvPr id="9" name="TextBox 8"/>
-          <p:cNvSpPr txBox="1"/>
-          <p:nvPr/>
-        </p:nvSpPr>
-        <p:spPr>
-          <a:xfrm>
-            <a:off x="3602133" y="4572000"/>
-            <a:ext cx="4957255" cy="584775"/>
-          </a:xfrm>
-          <a:prstGeom prst="rect">
-            <a:avLst/>
-          </a:prstGeom>
-          <a:noFill/>
-        </p:spPr>
-        <p:txBody>
-          <a:bodyPr wrap="none">
-            <a:spAutoFit/>
-          </a:bodyPr>
-          <a:lstStyle/>
-          <a:p>
-            <a:pPr algn="ctr"/>
-            <a:r>
-              <a:rPr lang="fr-FR" sz="3200" b="1" noProof="0" dirty="0">
-                <a:solidFill>
-                  <a:schemeClr val="accent6">
-                    <a:lumMod val="50000"/>
-                  </a:schemeClr>
-                </a:solidFill>
-              </a:rPr>
-              <a:t>Merci pour votre attention !</a:t>
-            </a:r>
-            <a:endParaRPr lang="fr-FR" sz="2400" b="1" noProof="0" dirty="0">
-              <a:solidFill>
-                <a:schemeClr val="accent6">
-                  <a:lumMod val="50000"/>
-                </a:schemeClr>
-              </a:solidFill>
-            </a:endParaRPr>
-          </a:p>
-        </p:txBody>
-      </p:sp>
-      <p:sp>
-        <p:nvSpPr>
-          <p:cNvPr id="10" name="Rectangle 9"/>
+            <a:r>
+              <a:rPr lang="fr-FR" sz="2800" b="1" noProof="0" dirty="0">
+                <a:solidFill>
+                  <a:srgbClr val="2C2522"/>
+                </a:solidFill>
+                <a:latin typeface="Aptos Display"/>
+              </a:rPr>
+              <a:t>Difficultés rencontrées</a:t>
+            </a:r>
+          </a:p>
+        </p:txBody>
+      </p:sp>
+      <p:sp>
+        <p:nvSpPr>
+          <p:cNvPr id="5" name="Rectangle 4"/>
           <p:cNvSpPr/>
           <p:nvPr/>
         </p:nvSpPr>
@@ -12094,7 +12047,7 @@
       </p:sp>
       <p:sp>
         <p:nvSpPr>
-          <p:cNvPr id="11" name="TextBox 10"/>
+          <p:cNvPr id="6" name="TextBox 5"/>
           <p:cNvSpPr txBox="1"/>
           <p:nvPr/>
         </p:nvSpPr>
@@ -12121,7 +12074,1058 @@
                   <a:srgbClr val="69625E"/>
                 </a:solidFill>
               </a:rPr>
-              <a:t>15</a:t>
+              <a:t>12</a:t>
+            </a:r>
+          </a:p>
+        </p:txBody>
+      </p:sp>
+      <p:sp>
+        <p:nvSpPr>
+          <p:cNvPr id="8" name="Rounded Rectangle 3">
+            <a:extLst>
+              <a:ext uri="{FF2B5EF4-FFF2-40B4-BE49-F238E27FC236}">
+                <a16:creationId xmlns:a16="http://schemas.microsoft.com/office/drawing/2014/main" id="{213D243F-129E-C8D4-B29B-6BF00D7E6861}"/>
+              </a:ext>
+            </a:extLst>
+          </p:cNvPr>
+          <p:cNvSpPr/>
+          <p:nvPr/>
+        </p:nvSpPr>
+        <p:spPr>
+          <a:xfrm>
+            <a:off x="1349829" y="1578854"/>
+            <a:ext cx="7010400" cy="4114800"/>
+          </a:xfrm>
+          <a:prstGeom prst="roundRect">
+            <a:avLst/>
+          </a:prstGeom>
+          <a:solidFill>
+            <a:srgbClr val="FFFFFF"/>
+          </a:solidFill>
+          <a:ln>
+            <a:solidFill>
+              <a:srgbClr val="EFEAE0"/>
+            </a:solidFill>
+          </a:ln>
+        </p:spPr>
+        <p:style>
+          <a:lnRef idx="1">
+            <a:schemeClr val="accent1"/>
+          </a:lnRef>
+          <a:fillRef idx="3">
+            <a:schemeClr val="accent1"/>
+          </a:fillRef>
+          <a:effectRef idx="2">
+            <a:schemeClr val="accent1"/>
+          </a:effectRef>
+          <a:fontRef idx="minor">
+            <a:schemeClr val="lt1"/>
+          </a:fontRef>
+        </p:style>
+        <p:txBody>
+          <a:bodyPr rtlCol="0" anchor="t"/>
+          <a:lstStyle/>
+          <a:p>
+            <a:pPr>
+              <a:spcAft>
+                <a:spcPts val="1300"/>
+              </a:spcAft>
+              <a:defRPr sz="2000">
+                <a:solidFill>
+                  <a:srgbClr val="2C2522"/>
+                </a:solidFill>
+              </a:defRPr>
+            </a:pPr>
+            <a:endParaRPr lang="fr-FR" dirty="0"/>
+          </a:p>
+          <a:p>
+            <a:pPr marL="342900" indent="-342900">
+              <a:spcAft>
+                <a:spcPts val="1300"/>
+              </a:spcAft>
+              <a:buFont typeface="Arial" panose="020B0604020202020204" pitchFamily="34" charset="0"/>
+              <a:buChar char="•"/>
+              <a:defRPr sz="2000">
+                <a:solidFill>
+                  <a:srgbClr val="2C2522"/>
+                </a:solidFill>
+              </a:defRPr>
+            </a:pPr>
+            <a:r>
+              <a:rPr lang="fr-FR" dirty="0"/>
+              <a:t>Compréhension de l'architecture Symfony avec Docker</a:t>
+            </a:r>
+          </a:p>
+          <a:p>
+            <a:pPr marL="342900" indent="-342900">
+              <a:spcAft>
+                <a:spcPts val="1300"/>
+              </a:spcAft>
+              <a:buFont typeface="Arial" panose="020B0604020202020204" pitchFamily="34" charset="0"/>
+              <a:buChar char="•"/>
+              <a:defRPr sz="2000">
+                <a:solidFill>
+                  <a:srgbClr val="2C2522"/>
+                </a:solidFill>
+              </a:defRPr>
+            </a:pPr>
+            <a:r>
+              <a:rPr lang="fr-FR" dirty="0"/>
+              <a:t>Relations entre les entités Doctrine</a:t>
+            </a:r>
+          </a:p>
+          <a:p>
+            <a:pPr marL="342900" indent="-342900">
+              <a:spcAft>
+                <a:spcPts val="1300"/>
+              </a:spcAft>
+              <a:buFont typeface="Arial" panose="020B0604020202020204" pitchFamily="34" charset="0"/>
+              <a:buChar char="•"/>
+              <a:defRPr sz="2000">
+                <a:solidFill>
+                  <a:srgbClr val="2C2522"/>
+                </a:solidFill>
+              </a:defRPr>
+            </a:pPr>
+            <a:r>
+              <a:rPr lang="fr-FR" dirty="0"/>
+              <a:t>Communication Controller ↔ Repository ↔ Twig</a:t>
+            </a:r>
+          </a:p>
+          <a:p>
+            <a:pPr marL="342900" indent="-342900">
+              <a:spcAft>
+                <a:spcPts val="1300"/>
+              </a:spcAft>
+              <a:buFont typeface="Arial" panose="020B0604020202020204" pitchFamily="34" charset="0"/>
+              <a:buChar char="•"/>
+              <a:defRPr sz="2000">
+                <a:solidFill>
+                  <a:srgbClr val="2C2522"/>
+                </a:solidFill>
+              </a:defRPr>
+            </a:pPr>
+            <a:r>
+              <a:rPr lang="fr-FR" dirty="0"/>
+              <a:t>Responsive et intégration de la maquette</a:t>
+            </a:r>
+          </a:p>
+          <a:p>
+            <a:pPr marL="342900" indent="-342900">
+              <a:spcAft>
+                <a:spcPts val="1300"/>
+              </a:spcAft>
+              <a:buFont typeface="Arial" panose="020B0604020202020204" pitchFamily="34" charset="0"/>
+              <a:buChar char="•"/>
+              <a:defRPr sz="2000">
+                <a:solidFill>
+                  <a:srgbClr val="2C2522"/>
+                </a:solidFill>
+              </a:defRPr>
+            </a:pPr>
+            <a:r>
+              <a:rPr lang="fr-FR" sz="2000" dirty="0"/>
+              <a:t>Répondre aux besoins spécifiques d'une autre personne.</a:t>
+            </a:r>
+            <a:endParaRPr lang="fr-FR" dirty="0"/>
+          </a:p>
+          <a:p>
+            <a:pPr>
+              <a:spcAft>
+                <a:spcPts val="1300"/>
+              </a:spcAft>
+              <a:defRPr sz="2000">
+                <a:solidFill>
+                  <a:srgbClr val="2C2522"/>
+                </a:solidFill>
+              </a:defRPr>
+            </a:pPr>
+            <a:endParaRPr lang="fr-FR" dirty="0"/>
+          </a:p>
+        </p:txBody>
+      </p:sp>
+    </p:spTree>
+  </p:cSld>
+  <p:clrMapOvr>
+    <a:masterClrMapping/>
+  </p:clrMapOvr>
+</p:sld>
+</file>
+
+<file path=ppt/slides/slide19.xml><?xml version="1.0" encoding="utf-8"?>
+<p:sld xmlns:a="http://schemas.openxmlformats.org/drawingml/2006/main" xmlns:r="http://schemas.openxmlformats.org/officeDocument/2006/relationships" xmlns:p="http://schemas.openxmlformats.org/presentationml/2006/main">
+  <p:cSld>
+    <p:spTree>
+      <p:nvGrpSpPr>
+        <p:cNvPr id="1" name=""/>
+        <p:cNvGrpSpPr/>
+        <p:nvPr/>
+      </p:nvGrpSpPr>
+      <p:grpSpPr>
+        <a:xfrm>
+          <a:off x="0" y="0"/>
+          <a:ext cx="0" cy="0"/>
+          <a:chOff x="0" y="0"/>
+          <a:chExt cx="0" cy="0"/>
+        </a:xfrm>
+      </p:grpSpPr>
+      <p:sp>
+        <p:nvSpPr>
+          <p:cNvPr id="3" name="TextBox 2"/>
+          <p:cNvSpPr txBox="1"/>
+          <p:nvPr/>
+        </p:nvSpPr>
+        <p:spPr>
+          <a:xfrm>
+            <a:off x="640080" y="411480"/>
+            <a:ext cx="10972800" cy="594360"/>
+          </a:xfrm>
+          <a:prstGeom prst="rect">
+            <a:avLst/>
+          </a:prstGeom>
+          <a:noFill/>
+        </p:spPr>
+        <p:txBody>
+          <a:bodyPr wrap="none">
+            <a:spAutoFit/>
+          </a:bodyPr>
+          <a:lstStyle/>
+          <a:p>
+            <a:r>
+              <a:rPr lang="fr-FR" sz="2800" b="1" noProof="0" dirty="0">
+                <a:solidFill>
+                  <a:srgbClr val="2C2522"/>
+                </a:solidFill>
+                <a:latin typeface="Aptos Display"/>
+              </a:rPr>
+              <a:t>Évolutions prévues</a:t>
+            </a:r>
+          </a:p>
+        </p:txBody>
+      </p:sp>
+      <p:sp>
+        <p:nvSpPr>
+          <p:cNvPr id="4" name="Rounded Rectangle 3"/>
+          <p:cNvSpPr/>
+          <p:nvPr/>
+        </p:nvSpPr>
+        <p:spPr>
+          <a:xfrm>
+            <a:off x="640080" y="2186578"/>
+            <a:ext cx="3520440" cy="2617651"/>
+          </a:xfrm>
+          <a:prstGeom prst="roundRect">
+            <a:avLst/>
+          </a:prstGeom>
+          <a:solidFill>
+            <a:srgbClr val="FFFFFF"/>
+          </a:solidFill>
+          <a:ln>
+            <a:solidFill>
+              <a:srgbClr val="EFEAE0"/>
+            </a:solidFill>
+          </a:ln>
+        </p:spPr>
+        <p:style>
+          <a:lnRef idx="1">
+            <a:schemeClr val="accent1"/>
+          </a:lnRef>
+          <a:fillRef idx="3">
+            <a:schemeClr val="accent1"/>
+          </a:fillRef>
+          <a:effectRef idx="2">
+            <a:schemeClr val="accent1"/>
+          </a:effectRef>
+          <a:fontRef idx="minor">
+            <a:schemeClr val="lt1"/>
+          </a:fontRef>
+        </p:style>
+        <p:txBody>
+          <a:bodyPr rtlCol="0" anchor="ctr"/>
+          <a:lstStyle/>
+          <a:p>
+            <a:pPr marL="0" marR="0" lvl="0" indent="0" algn="l" defTabSz="457200" rtl="0" eaLnBrk="1" fontAlgn="auto" latinLnBrk="0" hangingPunct="1">
+              <a:lnSpc>
+                <a:spcPct val="100000"/>
+              </a:lnSpc>
+              <a:spcBef>
+                <a:spcPts val="0"/>
+              </a:spcBef>
+              <a:spcAft>
+                <a:spcPts val="0"/>
+              </a:spcAft>
+              <a:buClrTx/>
+              <a:buSzTx/>
+              <a:buFontTx/>
+              <a:buNone/>
+              <a:tabLst/>
+              <a:defRPr/>
+            </a:pPr>
+            <a:r>
+              <a:rPr kumimoji="0" lang="fr-FR" b="1" i="0" u="none" strike="noStrike" kern="1200" cap="none" spc="0" normalizeH="0" baseline="0" noProof="0" dirty="0">
+                <a:ln>
+                  <a:noFill/>
+                </a:ln>
+                <a:solidFill>
+                  <a:srgbClr val="F79646">
+                    <a:lumMod val="50000"/>
+                  </a:srgbClr>
+                </a:solidFill>
+                <a:effectLst/>
+                <a:uLnTx/>
+                <a:uFillTx/>
+                <a:latin typeface="Calibri"/>
+                <a:ea typeface="+mn-ea"/>
+                <a:cs typeface="+mn-cs"/>
+              </a:rPr>
+              <a:t>COURT TERME</a:t>
+            </a:r>
+          </a:p>
+          <a:p>
+            <a:pPr marL="285750" marR="0" lvl="0" indent="-285750" algn="l" defTabSz="457200" rtl="0" eaLnBrk="1" fontAlgn="auto" latinLnBrk="0" hangingPunct="1">
+              <a:lnSpc>
+                <a:spcPct val="100000"/>
+              </a:lnSpc>
+              <a:spcBef>
+                <a:spcPts val="700"/>
+              </a:spcBef>
+              <a:spcAft>
+                <a:spcPts val="0"/>
+              </a:spcAft>
+              <a:buClrTx/>
+              <a:buSzTx/>
+              <a:buFont typeface="Arial" panose="020B0604020202020204" pitchFamily="34" charset="0"/>
+              <a:buChar char="•"/>
+              <a:tabLst/>
+              <a:defRPr sz="1200">
+                <a:solidFill>
+                  <a:srgbClr val="2C2522"/>
+                </a:solidFill>
+              </a:defRPr>
+            </a:pPr>
+            <a:r>
+              <a:rPr kumimoji="0" lang="fr-FR" sz="1600" b="0" i="0" u="none" strike="noStrike" kern="1200" cap="none" spc="0" normalizeH="0" baseline="0" noProof="0" dirty="0">
+                <a:ln>
+                  <a:noFill/>
+                </a:ln>
+                <a:solidFill>
+                  <a:srgbClr val="2C2522"/>
+                </a:solidFill>
+                <a:effectLst/>
+                <a:uLnTx/>
+                <a:uFillTx/>
+                <a:latin typeface="Calibri"/>
+                <a:ea typeface="+mn-ea"/>
+                <a:cs typeface="+mn-cs"/>
+              </a:rPr>
+              <a:t>Finaliser le back-office</a:t>
+            </a:r>
+          </a:p>
+          <a:p>
+            <a:pPr marL="285750" marR="0" lvl="0" indent="-285750" algn="l" defTabSz="457200" rtl="0" eaLnBrk="1" fontAlgn="auto" latinLnBrk="0" hangingPunct="1">
+              <a:lnSpc>
+                <a:spcPct val="100000"/>
+              </a:lnSpc>
+              <a:spcBef>
+                <a:spcPts val="700"/>
+              </a:spcBef>
+              <a:spcAft>
+                <a:spcPts val="0"/>
+              </a:spcAft>
+              <a:buClrTx/>
+              <a:buSzTx/>
+              <a:buFont typeface="Arial" panose="020B0604020202020204" pitchFamily="34" charset="0"/>
+              <a:buChar char="•"/>
+              <a:tabLst/>
+              <a:defRPr sz="1200">
+                <a:solidFill>
+                  <a:srgbClr val="2C2522"/>
+                </a:solidFill>
+              </a:defRPr>
+            </a:pPr>
+            <a:r>
+              <a:rPr kumimoji="0" lang="fr-FR" sz="1600" b="0" i="0" u="none" strike="noStrike" kern="1200" cap="none" spc="0" normalizeH="0" baseline="0" noProof="0" dirty="0">
+                <a:ln>
+                  <a:noFill/>
+                </a:ln>
+                <a:solidFill>
+                  <a:srgbClr val="2C2522"/>
+                </a:solidFill>
+                <a:effectLst/>
+                <a:uLnTx/>
+                <a:uFillTx/>
+                <a:latin typeface="Calibri"/>
+                <a:ea typeface="+mn-ea"/>
+                <a:cs typeface="+mn-cs"/>
+              </a:rPr>
+              <a:t>Améliorer les validations</a:t>
+            </a:r>
+          </a:p>
+          <a:p>
+            <a:pPr marL="285750" marR="0" lvl="0" indent="-285750" algn="l" defTabSz="457200" rtl="0" eaLnBrk="1" fontAlgn="auto" latinLnBrk="0" hangingPunct="1">
+              <a:lnSpc>
+                <a:spcPct val="100000"/>
+              </a:lnSpc>
+              <a:spcBef>
+                <a:spcPts val="700"/>
+              </a:spcBef>
+              <a:spcAft>
+                <a:spcPts val="0"/>
+              </a:spcAft>
+              <a:buClrTx/>
+              <a:buSzTx/>
+              <a:buFont typeface="Arial" panose="020B0604020202020204" pitchFamily="34" charset="0"/>
+              <a:buChar char="•"/>
+              <a:tabLst/>
+              <a:defRPr sz="1200">
+                <a:solidFill>
+                  <a:srgbClr val="2C2522"/>
+                </a:solidFill>
+              </a:defRPr>
+            </a:pPr>
+            <a:r>
+              <a:rPr kumimoji="0" lang="fr-FR" sz="1600" b="0" i="0" u="none" strike="noStrike" kern="1200" cap="none" spc="0" normalizeH="0" baseline="0" noProof="0" dirty="0">
+                <a:ln>
+                  <a:noFill/>
+                </a:ln>
+                <a:solidFill>
+                  <a:srgbClr val="2C2522"/>
+                </a:solidFill>
+                <a:effectLst/>
+                <a:uLnTx/>
+                <a:uFillTx/>
+                <a:latin typeface="Calibri"/>
+                <a:ea typeface="+mn-ea"/>
+                <a:cs typeface="+mn-cs"/>
+              </a:rPr>
+              <a:t>Ajouter davantage de tests</a:t>
+            </a:r>
+          </a:p>
+          <a:p>
+            <a:pPr marL="285750" marR="0" lvl="0" indent="-285750" algn="l" defTabSz="457200" rtl="0" eaLnBrk="1" fontAlgn="auto" latinLnBrk="0" hangingPunct="1">
+              <a:lnSpc>
+                <a:spcPct val="100000"/>
+              </a:lnSpc>
+              <a:spcBef>
+                <a:spcPts val="700"/>
+              </a:spcBef>
+              <a:spcAft>
+                <a:spcPts val="0"/>
+              </a:spcAft>
+              <a:buClrTx/>
+              <a:buSzTx/>
+              <a:buFont typeface="Arial" panose="020B0604020202020204" pitchFamily="34" charset="0"/>
+              <a:buChar char="•"/>
+              <a:tabLst/>
+              <a:defRPr sz="1200">
+                <a:solidFill>
+                  <a:srgbClr val="2C2522"/>
+                </a:solidFill>
+              </a:defRPr>
+            </a:pPr>
+            <a:r>
+              <a:rPr kumimoji="0" lang="fr-FR" sz="1600" b="0" i="0" u="none" strike="noStrike" kern="1200" cap="none" spc="0" normalizeH="0" baseline="0" noProof="0" dirty="0">
+                <a:ln>
+                  <a:noFill/>
+                </a:ln>
+                <a:solidFill>
+                  <a:srgbClr val="2C2522"/>
+                </a:solidFill>
+                <a:effectLst/>
+                <a:uLnTx/>
+                <a:uFillTx/>
+                <a:latin typeface="Calibri"/>
+                <a:ea typeface="+mn-ea"/>
+                <a:cs typeface="+mn-cs"/>
+              </a:rPr>
+              <a:t>Finaliser le responsive</a:t>
+            </a:r>
+          </a:p>
+        </p:txBody>
+      </p:sp>
+      <p:sp>
+        <p:nvSpPr>
+          <p:cNvPr id="6" name="Rounded Rectangle 5"/>
+          <p:cNvSpPr/>
+          <p:nvPr/>
+        </p:nvSpPr>
+        <p:spPr>
+          <a:xfrm>
+            <a:off x="4343400" y="2186578"/>
+            <a:ext cx="3520440" cy="2617651"/>
+          </a:xfrm>
+          <a:prstGeom prst="roundRect">
+            <a:avLst/>
+          </a:prstGeom>
+          <a:solidFill>
+            <a:srgbClr val="FFFFFF"/>
+          </a:solidFill>
+          <a:ln>
+            <a:solidFill>
+              <a:srgbClr val="EFEAE0"/>
+            </a:solidFill>
+          </a:ln>
+        </p:spPr>
+        <p:style>
+          <a:lnRef idx="1">
+            <a:schemeClr val="accent1"/>
+          </a:lnRef>
+          <a:fillRef idx="3">
+            <a:schemeClr val="accent1"/>
+          </a:fillRef>
+          <a:effectRef idx="2">
+            <a:schemeClr val="accent1"/>
+          </a:effectRef>
+          <a:fontRef idx="minor">
+            <a:schemeClr val="lt1"/>
+          </a:fontRef>
+        </p:style>
+        <p:txBody>
+          <a:bodyPr rtlCol="0" anchor="ctr"/>
+          <a:lstStyle/>
+          <a:p>
+            <a:pPr marL="0" marR="0" lvl="0" indent="0" algn="l" defTabSz="457200" rtl="0" eaLnBrk="1" fontAlgn="auto" latinLnBrk="0" hangingPunct="1">
+              <a:lnSpc>
+                <a:spcPct val="100000"/>
+              </a:lnSpc>
+              <a:spcBef>
+                <a:spcPts val="0"/>
+              </a:spcBef>
+              <a:spcAft>
+                <a:spcPts val="0"/>
+              </a:spcAft>
+              <a:buClrTx/>
+              <a:buSzTx/>
+              <a:buFontTx/>
+              <a:buNone/>
+              <a:tabLst/>
+              <a:defRPr/>
+            </a:pPr>
+            <a:r>
+              <a:rPr kumimoji="0" lang="fr-FR" b="1" i="0" u="none" strike="noStrike" kern="1200" cap="none" spc="0" normalizeH="0" baseline="0" noProof="0" dirty="0">
+                <a:ln>
+                  <a:noFill/>
+                </a:ln>
+                <a:solidFill>
+                  <a:srgbClr val="F79646">
+                    <a:lumMod val="50000"/>
+                  </a:srgbClr>
+                </a:solidFill>
+                <a:effectLst/>
+                <a:uLnTx/>
+                <a:uFillTx/>
+                <a:latin typeface="Calibri"/>
+                <a:ea typeface="+mn-ea"/>
+                <a:cs typeface="+mn-cs"/>
+              </a:rPr>
+              <a:t>MOYEN TERME</a:t>
+            </a:r>
+          </a:p>
+          <a:p>
+            <a:pPr marL="285750" marR="0" lvl="0" indent="-285750" algn="l" defTabSz="457200" rtl="0" eaLnBrk="1" fontAlgn="auto" latinLnBrk="0" hangingPunct="1">
+              <a:lnSpc>
+                <a:spcPct val="100000"/>
+              </a:lnSpc>
+              <a:spcBef>
+                <a:spcPts val="700"/>
+              </a:spcBef>
+              <a:spcAft>
+                <a:spcPts val="0"/>
+              </a:spcAft>
+              <a:buClrTx/>
+              <a:buSzTx/>
+              <a:buFont typeface="Arial" panose="020B0604020202020204" pitchFamily="34" charset="0"/>
+              <a:buChar char="•"/>
+              <a:tabLst/>
+              <a:defRPr sz="1200">
+                <a:solidFill>
+                  <a:srgbClr val="2C2522"/>
+                </a:solidFill>
+              </a:defRPr>
+            </a:pPr>
+            <a:r>
+              <a:rPr kumimoji="0" lang="fr-FR" sz="1600" b="0" i="0" u="none" strike="noStrike" kern="1200" cap="none" spc="0" normalizeH="0" baseline="0" noProof="0" dirty="0" err="1">
+                <a:ln>
+                  <a:noFill/>
+                </a:ln>
+                <a:solidFill>
+                  <a:srgbClr val="2C2522"/>
+                </a:solidFill>
+                <a:effectLst/>
+                <a:uLnTx/>
+                <a:uFillTx/>
+                <a:latin typeface="Calibri"/>
+                <a:ea typeface="+mn-ea"/>
+                <a:cs typeface="+mn-cs"/>
+              </a:rPr>
+              <a:t>Upload</a:t>
+            </a:r>
+            <a:r>
+              <a:rPr kumimoji="0" lang="fr-FR" sz="1600" b="0" i="0" u="none" strike="noStrike" kern="1200" cap="none" spc="0" normalizeH="0" baseline="0" noProof="0" dirty="0">
+                <a:ln>
+                  <a:noFill/>
+                </a:ln>
+                <a:solidFill>
+                  <a:srgbClr val="2C2522"/>
+                </a:solidFill>
+                <a:effectLst/>
+                <a:uLnTx/>
+                <a:uFillTx/>
+                <a:latin typeface="Calibri"/>
+                <a:ea typeface="+mn-ea"/>
+                <a:cs typeface="+mn-cs"/>
+              </a:rPr>
+              <a:t> d'images</a:t>
+            </a:r>
+          </a:p>
+          <a:p>
+            <a:pPr marL="285750" marR="0" lvl="0" indent="-285750" algn="l" defTabSz="457200" rtl="0" eaLnBrk="1" fontAlgn="auto" latinLnBrk="0" hangingPunct="1">
+              <a:lnSpc>
+                <a:spcPct val="100000"/>
+              </a:lnSpc>
+              <a:spcBef>
+                <a:spcPts val="700"/>
+              </a:spcBef>
+              <a:spcAft>
+                <a:spcPts val="0"/>
+              </a:spcAft>
+              <a:buClrTx/>
+              <a:buSzTx/>
+              <a:buFont typeface="Arial" panose="020B0604020202020204" pitchFamily="34" charset="0"/>
+              <a:buChar char="•"/>
+              <a:tabLst/>
+              <a:defRPr sz="1200">
+                <a:solidFill>
+                  <a:srgbClr val="2C2522"/>
+                </a:solidFill>
+              </a:defRPr>
+            </a:pPr>
+            <a:r>
+              <a:rPr kumimoji="0" lang="fr-FR" sz="1600" b="0" i="0" u="none" strike="noStrike" kern="1200" cap="none" spc="0" normalizeH="0" baseline="0" noProof="0" dirty="0">
+                <a:ln>
+                  <a:noFill/>
+                </a:ln>
+                <a:solidFill>
+                  <a:srgbClr val="2C2522"/>
+                </a:solidFill>
+                <a:effectLst/>
+                <a:uLnTx/>
+                <a:uFillTx/>
+                <a:latin typeface="Calibri"/>
+                <a:ea typeface="+mn-ea"/>
+                <a:cs typeface="+mn-cs"/>
+              </a:rPr>
+              <a:t>Recherche et filtres</a:t>
+            </a:r>
+          </a:p>
+          <a:p>
+            <a:pPr marL="285750" marR="0" lvl="0" indent="-285750" algn="l" defTabSz="457200" rtl="0" eaLnBrk="1" fontAlgn="auto" latinLnBrk="0" hangingPunct="1">
+              <a:lnSpc>
+                <a:spcPct val="100000"/>
+              </a:lnSpc>
+              <a:spcBef>
+                <a:spcPts val="700"/>
+              </a:spcBef>
+              <a:spcAft>
+                <a:spcPts val="0"/>
+              </a:spcAft>
+              <a:buClrTx/>
+              <a:buSzTx/>
+              <a:buFont typeface="Arial" panose="020B0604020202020204" pitchFamily="34" charset="0"/>
+              <a:buChar char="•"/>
+              <a:tabLst/>
+              <a:defRPr sz="1200">
+                <a:solidFill>
+                  <a:srgbClr val="2C2522"/>
+                </a:solidFill>
+              </a:defRPr>
+            </a:pPr>
+            <a:r>
+              <a:rPr kumimoji="0" lang="fr-FR" sz="1600" b="0" i="0" u="none" strike="noStrike" kern="1200" cap="none" spc="0" normalizeH="0" baseline="0" noProof="0" dirty="0">
+                <a:ln>
+                  <a:noFill/>
+                </a:ln>
+                <a:solidFill>
+                  <a:srgbClr val="2C2522"/>
+                </a:solidFill>
+                <a:effectLst/>
+                <a:uLnTx/>
+                <a:uFillTx/>
+                <a:latin typeface="Calibri"/>
+                <a:ea typeface="+mn-ea"/>
+                <a:cs typeface="+mn-cs"/>
+              </a:rPr>
+              <a:t>Pagination</a:t>
+            </a:r>
+            <a:endParaRPr lang="fr-FR" sz="1600" dirty="0">
+              <a:solidFill>
+                <a:srgbClr val="2C2522"/>
+              </a:solidFill>
+              <a:latin typeface="Calibri"/>
+            </a:endParaRPr>
+          </a:p>
+          <a:p>
+            <a:pPr marL="285750" marR="0" lvl="0" indent="-285750" algn="l" defTabSz="457200" rtl="0" eaLnBrk="1" fontAlgn="auto" latinLnBrk="0" hangingPunct="1">
+              <a:lnSpc>
+                <a:spcPct val="100000"/>
+              </a:lnSpc>
+              <a:spcBef>
+                <a:spcPts val="700"/>
+              </a:spcBef>
+              <a:spcAft>
+                <a:spcPts val="0"/>
+              </a:spcAft>
+              <a:buClrTx/>
+              <a:buSzTx/>
+              <a:buFont typeface="Arial" panose="020B0604020202020204" pitchFamily="34" charset="0"/>
+              <a:buChar char="•"/>
+              <a:tabLst/>
+              <a:defRPr sz="1200">
+                <a:solidFill>
+                  <a:srgbClr val="2C2522"/>
+                </a:solidFill>
+              </a:defRPr>
+            </a:pPr>
+            <a:r>
+              <a:rPr kumimoji="0" lang="fr-FR" sz="1600" b="0" i="0" u="none" strike="noStrike" kern="1200" cap="none" spc="0" normalizeH="0" baseline="0" noProof="0" dirty="0">
+                <a:ln>
+                  <a:noFill/>
+                </a:ln>
+                <a:solidFill>
+                  <a:srgbClr val="2C2522"/>
+                </a:solidFill>
+                <a:effectLst/>
+                <a:uLnTx/>
+                <a:uFillTx/>
+                <a:latin typeface="Calibri"/>
+                <a:ea typeface="+mn-ea"/>
+                <a:cs typeface="+mn-cs"/>
+              </a:rPr>
+              <a:t>Notifications email</a:t>
+            </a:r>
+          </a:p>
+        </p:txBody>
+      </p:sp>
+      <p:sp>
+        <p:nvSpPr>
+          <p:cNvPr id="8" name="Rounded Rectangle 7"/>
+          <p:cNvSpPr/>
+          <p:nvPr/>
+        </p:nvSpPr>
+        <p:spPr>
+          <a:xfrm>
+            <a:off x="8046720" y="2186578"/>
+            <a:ext cx="3520440" cy="2617651"/>
+          </a:xfrm>
+          <a:prstGeom prst="roundRect">
+            <a:avLst/>
+          </a:prstGeom>
+          <a:solidFill>
+            <a:srgbClr val="FFFFFF"/>
+          </a:solidFill>
+          <a:ln>
+            <a:solidFill>
+              <a:srgbClr val="EFEAE0"/>
+            </a:solidFill>
+          </a:ln>
+        </p:spPr>
+        <p:style>
+          <a:lnRef idx="1">
+            <a:schemeClr val="accent1"/>
+          </a:lnRef>
+          <a:fillRef idx="3">
+            <a:schemeClr val="accent1"/>
+          </a:fillRef>
+          <a:effectRef idx="2">
+            <a:schemeClr val="accent1"/>
+          </a:effectRef>
+          <a:fontRef idx="minor">
+            <a:schemeClr val="lt1"/>
+          </a:fontRef>
+        </p:style>
+        <p:txBody>
+          <a:bodyPr rtlCol="0" anchor="ctr"/>
+          <a:lstStyle/>
+          <a:p>
+            <a:pPr marL="0" marR="0" lvl="0" indent="0" algn="l" defTabSz="457200" rtl="0" eaLnBrk="1" fontAlgn="auto" latinLnBrk="0" hangingPunct="1">
+              <a:lnSpc>
+                <a:spcPct val="100000"/>
+              </a:lnSpc>
+              <a:spcBef>
+                <a:spcPts val="0"/>
+              </a:spcBef>
+              <a:spcAft>
+                <a:spcPts val="0"/>
+              </a:spcAft>
+              <a:buClrTx/>
+              <a:buSzTx/>
+              <a:buFontTx/>
+              <a:buNone/>
+              <a:tabLst/>
+              <a:defRPr/>
+            </a:pPr>
+            <a:r>
+              <a:rPr kumimoji="0" lang="fr-FR" b="1" i="0" u="none" strike="noStrike" kern="1200" cap="none" spc="0" normalizeH="0" baseline="0" noProof="0" dirty="0">
+                <a:ln>
+                  <a:noFill/>
+                </a:ln>
+                <a:solidFill>
+                  <a:srgbClr val="F79646">
+                    <a:lumMod val="50000"/>
+                  </a:srgbClr>
+                </a:solidFill>
+                <a:effectLst/>
+                <a:uLnTx/>
+                <a:uFillTx/>
+                <a:latin typeface="Calibri"/>
+                <a:ea typeface="+mn-ea"/>
+                <a:cs typeface="+mn-cs"/>
+              </a:rPr>
+              <a:t>LONG TERME</a:t>
+            </a:r>
+          </a:p>
+          <a:p>
+            <a:pPr marL="285750" marR="0" lvl="0" indent="-285750" algn="l" defTabSz="457200" rtl="0" eaLnBrk="1" fontAlgn="auto" latinLnBrk="0" hangingPunct="1">
+              <a:lnSpc>
+                <a:spcPct val="100000"/>
+              </a:lnSpc>
+              <a:spcBef>
+                <a:spcPts val="700"/>
+              </a:spcBef>
+              <a:spcAft>
+                <a:spcPts val="0"/>
+              </a:spcAft>
+              <a:buClrTx/>
+              <a:buSzTx/>
+              <a:buFont typeface="Arial" panose="020B0604020202020204" pitchFamily="34" charset="0"/>
+              <a:buChar char="•"/>
+              <a:tabLst/>
+              <a:defRPr sz="1200">
+                <a:solidFill>
+                  <a:srgbClr val="2C2522"/>
+                </a:solidFill>
+              </a:defRPr>
+            </a:pPr>
+            <a:r>
+              <a:rPr kumimoji="0" lang="fr-FR" sz="1600" b="0" i="0" u="none" strike="noStrike" kern="1200" cap="none" spc="0" normalizeH="0" baseline="0" noProof="0" dirty="0">
+                <a:ln>
+                  <a:noFill/>
+                </a:ln>
+                <a:solidFill>
+                  <a:srgbClr val="2C2522"/>
+                </a:solidFill>
+                <a:effectLst/>
+                <a:uLnTx/>
+                <a:uFillTx/>
+                <a:latin typeface="Calibri"/>
+                <a:ea typeface="+mn-ea"/>
+                <a:cs typeface="+mn-cs"/>
+              </a:rPr>
+              <a:t>Demande de devis avancée</a:t>
+            </a:r>
+          </a:p>
+          <a:p>
+            <a:pPr marL="285750" marR="0" lvl="0" indent="-285750" algn="l" defTabSz="457200" rtl="0" eaLnBrk="1" fontAlgn="auto" latinLnBrk="0" hangingPunct="1">
+              <a:lnSpc>
+                <a:spcPct val="100000"/>
+              </a:lnSpc>
+              <a:spcBef>
+                <a:spcPts val="700"/>
+              </a:spcBef>
+              <a:spcAft>
+                <a:spcPts val="0"/>
+              </a:spcAft>
+              <a:buClrTx/>
+              <a:buSzTx/>
+              <a:buFont typeface="Arial" panose="020B0604020202020204" pitchFamily="34" charset="0"/>
+              <a:buChar char="•"/>
+              <a:tabLst/>
+              <a:defRPr sz="1200">
+                <a:solidFill>
+                  <a:srgbClr val="2C2522"/>
+                </a:solidFill>
+              </a:defRPr>
+            </a:pPr>
+            <a:r>
+              <a:rPr kumimoji="0" lang="fr-FR" sz="1600" b="0" i="0" u="none" strike="noStrike" kern="1200" cap="none" spc="0" normalizeH="0" baseline="0" noProof="0" dirty="0">
+                <a:ln>
+                  <a:noFill/>
+                </a:ln>
+                <a:solidFill>
+                  <a:srgbClr val="2C2522"/>
+                </a:solidFill>
+                <a:effectLst/>
+                <a:uLnTx/>
+                <a:uFillTx/>
+                <a:latin typeface="Calibri"/>
+                <a:ea typeface="+mn-ea"/>
+                <a:cs typeface="+mn-cs"/>
+              </a:rPr>
+              <a:t>Personnalisation des produits</a:t>
+            </a:r>
+          </a:p>
+          <a:p>
+            <a:pPr marL="285750" marR="0" lvl="0" indent="-285750" algn="l" defTabSz="457200" rtl="0" eaLnBrk="1" fontAlgn="auto" latinLnBrk="0" hangingPunct="1">
+              <a:lnSpc>
+                <a:spcPct val="100000"/>
+              </a:lnSpc>
+              <a:spcBef>
+                <a:spcPts val="700"/>
+              </a:spcBef>
+              <a:spcAft>
+                <a:spcPts val="0"/>
+              </a:spcAft>
+              <a:buClrTx/>
+              <a:buSzTx/>
+              <a:buFont typeface="Arial" panose="020B0604020202020204" pitchFamily="34" charset="0"/>
+              <a:buChar char="•"/>
+              <a:tabLst/>
+              <a:defRPr sz="1200">
+                <a:solidFill>
+                  <a:srgbClr val="2C2522"/>
+                </a:solidFill>
+              </a:defRPr>
+            </a:pPr>
+            <a:r>
+              <a:rPr lang="fr-FR" sz="1600" dirty="0">
+                <a:solidFill>
+                  <a:srgbClr val="2C2522"/>
+                </a:solidFill>
+                <a:latin typeface="Calibri"/>
+              </a:rPr>
+              <a:t>Traduction du site</a:t>
+            </a:r>
+            <a:endParaRPr kumimoji="0" lang="fr-FR" sz="1600" b="0" i="0" u="none" strike="noStrike" kern="1200" cap="none" spc="0" normalizeH="0" baseline="0" noProof="0" dirty="0">
+              <a:ln>
+                <a:noFill/>
+              </a:ln>
+              <a:solidFill>
+                <a:srgbClr val="2C2522"/>
+              </a:solidFill>
+              <a:effectLst/>
+              <a:uLnTx/>
+              <a:uFillTx/>
+              <a:latin typeface="Calibri"/>
+              <a:ea typeface="+mn-ea"/>
+              <a:cs typeface="+mn-cs"/>
+            </a:endParaRPr>
+          </a:p>
+          <a:p>
+            <a:pPr marL="285750" marR="0" lvl="0" indent="-285750" algn="l" defTabSz="457200" rtl="0" eaLnBrk="1" fontAlgn="auto" latinLnBrk="0" hangingPunct="1">
+              <a:lnSpc>
+                <a:spcPct val="100000"/>
+              </a:lnSpc>
+              <a:spcBef>
+                <a:spcPts val="700"/>
+              </a:spcBef>
+              <a:spcAft>
+                <a:spcPts val="0"/>
+              </a:spcAft>
+              <a:buClrTx/>
+              <a:buSzTx/>
+              <a:buFont typeface="Arial" panose="020B0604020202020204" pitchFamily="34" charset="0"/>
+              <a:buChar char="•"/>
+              <a:tabLst/>
+              <a:defRPr sz="1200">
+                <a:solidFill>
+                  <a:srgbClr val="2C2522"/>
+                </a:solidFill>
+              </a:defRPr>
+            </a:pPr>
+            <a:r>
+              <a:rPr kumimoji="0" lang="fr-FR" sz="1600" b="0" i="0" u="none" strike="noStrike" kern="1200" cap="none" spc="0" normalizeH="0" baseline="0" noProof="0" dirty="0">
+                <a:ln>
+                  <a:noFill/>
+                </a:ln>
+                <a:solidFill>
+                  <a:srgbClr val="2C2522"/>
+                </a:solidFill>
+                <a:effectLst/>
+                <a:uLnTx/>
+                <a:uFillTx/>
+                <a:latin typeface="Calibri"/>
+                <a:ea typeface="+mn-ea"/>
+                <a:cs typeface="+mn-cs"/>
+              </a:rPr>
+              <a:t>Mise en production</a:t>
+            </a:r>
+          </a:p>
+        </p:txBody>
+      </p:sp>
+      <p:sp>
+        <p:nvSpPr>
+          <p:cNvPr id="10" name="Rectangle 9"/>
+          <p:cNvSpPr/>
+          <p:nvPr/>
+        </p:nvSpPr>
+        <p:spPr>
+          <a:xfrm>
+            <a:off x="640080" y="6419088"/>
+            <a:ext cx="10881360" cy="18288"/>
+          </a:xfrm>
+          <a:prstGeom prst="rect">
+            <a:avLst/>
+          </a:prstGeom>
+          <a:solidFill>
+            <a:srgbClr val="EFEAE0"/>
+          </a:solidFill>
+          <a:ln>
+            <a:noFill/>
+          </a:ln>
+        </p:spPr>
+        <p:style>
+          <a:lnRef idx="1">
+            <a:schemeClr val="accent1"/>
+          </a:lnRef>
+          <a:fillRef idx="3">
+            <a:schemeClr val="accent1"/>
+          </a:fillRef>
+          <a:effectRef idx="2">
+            <a:schemeClr val="accent1"/>
+          </a:effectRef>
+          <a:fontRef idx="minor">
+            <a:schemeClr val="lt1"/>
+          </a:fontRef>
+        </p:style>
+        <p:txBody>
+          <a:bodyPr rtlCol="0" anchor="ctr"/>
+          <a:lstStyle/>
+          <a:p>
+            <a:pPr algn="ctr"/>
+            <a:endParaRPr lang="fr-FR" noProof="0" dirty="0"/>
+          </a:p>
+        </p:txBody>
+      </p:sp>
+      <p:sp>
+        <p:nvSpPr>
+          <p:cNvPr id="11" name="TextBox 10"/>
+          <p:cNvSpPr txBox="1"/>
+          <p:nvPr/>
+        </p:nvSpPr>
+        <p:spPr>
+          <a:xfrm>
+            <a:off x="10789920" y="6473952"/>
+            <a:ext cx="640080" cy="182880"/>
+          </a:xfrm>
+          <a:prstGeom prst="rect">
+            <a:avLst/>
+          </a:prstGeom>
+          <a:noFill/>
+        </p:spPr>
+        <p:txBody>
+          <a:bodyPr wrap="none">
+            <a:spAutoFit/>
+          </a:bodyPr>
+          <a:lstStyle/>
+          <a:p>
+            <a:pPr algn="r"/>
+            <a:r>
+              <a:rPr lang="fr-FR" sz="900" noProof="0" dirty="0">
+                <a:solidFill>
+                  <a:srgbClr val="69625E"/>
+                </a:solidFill>
+              </a:rPr>
+              <a:t>14</a:t>
             </a:r>
           </a:p>
         </p:txBody>
@@ -12887,6 +13891,477 @@
                 </a:solidFill>
               </a:rPr>
               <a:t>2</a:t>
+            </a:r>
+          </a:p>
+        </p:txBody>
+      </p:sp>
+    </p:spTree>
+  </p:cSld>
+  <p:clrMapOvr>
+    <a:masterClrMapping/>
+  </p:clrMapOvr>
+</p:sld>
+</file>
+
+<file path=ppt/slides/slide20.xml><?xml version="1.0" encoding="utf-8"?>
+<p:sld xmlns:a="http://schemas.openxmlformats.org/drawingml/2006/main" xmlns:r="http://schemas.openxmlformats.org/officeDocument/2006/relationships" xmlns:p="http://schemas.openxmlformats.org/presentationml/2006/main">
+  <p:cSld>
+    <p:spTree>
+      <p:nvGrpSpPr>
+        <p:cNvPr id="1" name=""/>
+        <p:cNvGrpSpPr/>
+        <p:nvPr/>
+      </p:nvGrpSpPr>
+      <p:grpSpPr>
+        <a:xfrm>
+          <a:off x="0" y="0"/>
+          <a:ext cx="0" cy="0"/>
+          <a:chOff x="0" y="0"/>
+          <a:chExt cx="0" cy="0"/>
+        </a:xfrm>
+      </p:grpSpPr>
+      <p:sp>
+        <p:nvSpPr>
+          <p:cNvPr id="3" name="TextBox 2"/>
+          <p:cNvSpPr txBox="1"/>
+          <p:nvPr/>
+        </p:nvSpPr>
+        <p:spPr>
+          <a:xfrm>
+            <a:off x="822960" y="914400"/>
+            <a:ext cx="10515600" cy="731520"/>
+          </a:xfrm>
+          <a:prstGeom prst="rect">
+            <a:avLst/>
+          </a:prstGeom>
+          <a:noFill/>
+        </p:spPr>
+        <p:txBody>
+          <a:bodyPr wrap="none">
+            <a:spAutoFit/>
+          </a:bodyPr>
+          <a:lstStyle/>
+          <a:p>
+            <a:pPr algn="ctr"/>
+            <a:r>
+              <a:rPr lang="fr-FR" sz="3600" b="1" noProof="0" dirty="0">
+                <a:solidFill>
+                  <a:srgbClr val="2C2522"/>
+                </a:solidFill>
+              </a:rPr>
+              <a:t>Conclusion</a:t>
+            </a:r>
+          </a:p>
+        </p:txBody>
+      </p:sp>
+      <p:sp>
+        <p:nvSpPr>
+          <p:cNvPr id="4" name="Rounded Rectangle 3"/>
+          <p:cNvSpPr/>
+          <p:nvPr/>
+        </p:nvSpPr>
+        <p:spPr>
+          <a:xfrm>
+            <a:off x="914400" y="2651760"/>
+            <a:ext cx="1920240" cy="914400"/>
+          </a:xfrm>
+          <a:prstGeom prst="roundRect">
+            <a:avLst/>
+          </a:prstGeom>
+          <a:solidFill>
+            <a:srgbClr val="FFFFFF"/>
+          </a:solidFill>
+          <a:ln>
+            <a:solidFill>
+              <a:srgbClr val="B89753"/>
+            </a:solidFill>
+          </a:ln>
+        </p:spPr>
+        <p:style>
+          <a:lnRef idx="1">
+            <a:schemeClr val="accent1"/>
+          </a:lnRef>
+          <a:fillRef idx="3">
+            <a:schemeClr val="accent1"/>
+          </a:fillRef>
+          <a:effectRef idx="2">
+            <a:schemeClr val="accent1"/>
+          </a:effectRef>
+          <a:fontRef idx="minor">
+            <a:schemeClr val="lt1"/>
+          </a:fontRef>
+        </p:style>
+        <p:txBody>
+          <a:bodyPr rtlCol="0" anchor="ctr"/>
+          <a:lstStyle/>
+          <a:p>
+            <a:pPr algn="ctr"/>
+            <a:r>
+              <a:rPr lang="fr-FR" sz="1400" b="1" noProof="0" dirty="0">
+                <a:solidFill>
+                  <a:srgbClr val="2C2522"/>
+                </a:solidFill>
+              </a:rPr>
+              <a:t>Conception</a:t>
+            </a:r>
+          </a:p>
+        </p:txBody>
+      </p:sp>
+      <p:sp>
+        <p:nvSpPr>
+          <p:cNvPr id="5" name="Rounded Rectangle 4"/>
+          <p:cNvSpPr/>
+          <p:nvPr/>
+        </p:nvSpPr>
+        <p:spPr>
+          <a:xfrm>
+            <a:off x="3154680" y="2651760"/>
+            <a:ext cx="1920240" cy="914400"/>
+          </a:xfrm>
+          <a:prstGeom prst="roundRect">
+            <a:avLst/>
+          </a:prstGeom>
+          <a:solidFill>
+            <a:srgbClr val="FFFFFF"/>
+          </a:solidFill>
+          <a:ln>
+            <a:solidFill>
+              <a:srgbClr val="B89753"/>
+            </a:solidFill>
+          </a:ln>
+        </p:spPr>
+        <p:style>
+          <a:lnRef idx="1">
+            <a:schemeClr val="accent1"/>
+          </a:lnRef>
+          <a:fillRef idx="3">
+            <a:schemeClr val="accent1"/>
+          </a:fillRef>
+          <a:effectRef idx="2">
+            <a:schemeClr val="accent1"/>
+          </a:effectRef>
+          <a:fontRef idx="minor">
+            <a:schemeClr val="lt1"/>
+          </a:fontRef>
+        </p:style>
+        <p:txBody>
+          <a:bodyPr rtlCol="0" anchor="ctr"/>
+          <a:lstStyle/>
+          <a:p>
+            <a:pPr algn="ctr"/>
+            <a:r>
+              <a:rPr lang="fr-FR" sz="1400" b="1" noProof="0" dirty="0">
+                <a:solidFill>
+                  <a:srgbClr val="2C2522"/>
+                </a:solidFill>
+              </a:rPr>
+              <a:t>Base de données</a:t>
+            </a:r>
+          </a:p>
+        </p:txBody>
+      </p:sp>
+      <p:sp>
+        <p:nvSpPr>
+          <p:cNvPr id="6" name="Rounded Rectangle 5"/>
+          <p:cNvSpPr/>
+          <p:nvPr/>
+        </p:nvSpPr>
+        <p:spPr>
+          <a:xfrm>
+            <a:off x="5394960" y="2651760"/>
+            <a:ext cx="1920240" cy="914400"/>
+          </a:xfrm>
+          <a:prstGeom prst="roundRect">
+            <a:avLst/>
+          </a:prstGeom>
+          <a:solidFill>
+            <a:srgbClr val="FFFFFF"/>
+          </a:solidFill>
+          <a:ln>
+            <a:solidFill>
+              <a:srgbClr val="B89753"/>
+            </a:solidFill>
+          </a:ln>
+        </p:spPr>
+        <p:style>
+          <a:lnRef idx="1">
+            <a:schemeClr val="accent1"/>
+          </a:lnRef>
+          <a:fillRef idx="3">
+            <a:schemeClr val="accent1"/>
+          </a:fillRef>
+          <a:effectRef idx="2">
+            <a:schemeClr val="accent1"/>
+          </a:effectRef>
+          <a:fontRef idx="minor">
+            <a:schemeClr val="lt1"/>
+          </a:fontRef>
+        </p:style>
+        <p:txBody>
+          <a:bodyPr rtlCol="0" anchor="ctr"/>
+          <a:lstStyle/>
+          <a:p>
+            <a:pPr algn="ctr"/>
+            <a:r>
+              <a:rPr lang="fr-FR" sz="1400" b="1" noProof="0" dirty="0">
+                <a:solidFill>
+                  <a:srgbClr val="2C2522"/>
+                </a:solidFill>
+              </a:rPr>
+              <a:t>Symfony / </a:t>
+            </a:r>
+            <a:r>
+              <a:rPr lang="fr-FR" sz="1400" b="1" noProof="0" dirty="0" err="1">
+                <a:solidFill>
+                  <a:srgbClr val="2C2522"/>
+                </a:solidFill>
+              </a:rPr>
+              <a:t>Back-end</a:t>
+            </a:r>
+            <a:endParaRPr lang="fr-FR" sz="1400" b="1" noProof="0" dirty="0">
+              <a:solidFill>
+                <a:srgbClr val="2C2522"/>
+              </a:solidFill>
+            </a:endParaRPr>
+          </a:p>
+        </p:txBody>
+      </p:sp>
+      <p:sp>
+        <p:nvSpPr>
+          <p:cNvPr id="7" name="Rounded Rectangle 6"/>
+          <p:cNvSpPr/>
+          <p:nvPr/>
+        </p:nvSpPr>
+        <p:spPr>
+          <a:xfrm>
+            <a:off x="7635240" y="2651760"/>
+            <a:ext cx="1920240" cy="914400"/>
+          </a:xfrm>
+          <a:prstGeom prst="roundRect">
+            <a:avLst/>
+          </a:prstGeom>
+          <a:solidFill>
+            <a:srgbClr val="FFFFFF"/>
+          </a:solidFill>
+          <a:ln>
+            <a:solidFill>
+              <a:srgbClr val="B89753"/>
+            </a:solidFill>
+          </a:ln>
+        </p:spPr>
+        <p:style>
+          <a:lnRef idx="1">
+            <a:schemeClr val="accent1"/>
+          </a:lnRef>
+          <a:fillRef idx="3">
+            <a:schemeClr val="accent1"/>
+          </a:fillRef>
+          <a:effectRef idx="2">
+            <a:schemeClr val="accent1"/>
+          </a:effectRef>
+          <a:fontRef idx="minor">
+            <a:schemeClr val="lt1"/>
+          </a:fontRef>
+        </p:style>
+        <p:txBody>
+          <a:bodyPr rtlCol="0" anchor="ctr"/>
+          <a:lstStyle/>
+          <a:p>
+            <a:pPr algn="ctr"/>
+            <a:r>
+              <a:rPr lang="fr-FR" sz="1400" b="1" noProof="0" dirty="0">
+                <a:solidFill>
+                  <a:srgbClr val="2C2522"/>
+                </a:solidFill>
+              </a:rPr>
+              <a:t>Twig / </a:t>
+            </a:r>
+            <a:r>
+              <a:rPr lang="fr-FR" sz="1400" b="1" noProof="0" dirty="0" err="1">
+                <a:solidFill>
+                  <a:srgbClr val="2C2522"/>
+                </a:solidFill>
+              </a:rPr>
+              <a:t>Front-end</a:t>
+            </a:r>
+            <a:endParaRPr lang="fr-FR" sz="1400" b="1" noProof="0" dirty="0">
+              <a:solidFill>
+                <a:srgbClr val="2C2522"/>
+              </a:solidFill>
+            </a:endParaRPr>
+          </a:p>
+        </p:txBody>
+      </p:sp>
+      <p:sp>
+        <p:nvSpPr>
+          <p:cNvPr id="8" name="Rounded Rectangle 7"/>
+          <p:cNvSpPr/>
+          <p:nvPr/>
+        </p:nvSpPr>
+        <p:spPr>
+          <a:xfrm>
+            <a:off x="9875520" y="2651760"/>
+            <a:ext cx="1920240" cy="914400"/>
+          </a:xfrm>
+          <a:prstGeom prst="roundRect">
+            <a:avLst/>
+          </a:prstGeom>
+          <a:solidFill>
+            <a:srgbClr val="EFEAE0"/>
+          </a:solidFill>
+          <a:ln>
+            <a:solidFill>
+              <a:srgbClr val="B89753"/>
+            </a:solidFill>
+          </a:ln>
+        </p:spPr>
+        <p:style>
+          <a:lnRef idx="1">
+            <a:schemeClr val="accent1"/>
+          </a:lnRef>
+          <a:fillRef idx="3">
+            <a:schemeClr val="accent1"/>
+          </a:fillRef>
+          <a:effectRef idx="2">
+            <a:schemeClr val="accent1"/>
+          </a:effectRef>
+          <a:fontRef idx="minor">
+            <a:schemeClr val="lt1"/>
+          </a:fontRef>
+        </p:style>
+        <p:txBody>
+          <a:bodyPr rtlCol="0" anchor="ctr"/>
+          <a:lstStyle/>
+          <a:p>
+            <a:pPr algn="ctr"/>
+            <a:r>
+              <a:rPr lang="fr-FR" sz="1400" b="1" noProof="0" dirty="0">
+                <a:solidFill>
+                  <a:srgbClr val="2C2522"/>
+                </a:solidFill>
+              </a:rPr>
+              <a:t>Application fonctionnelle</a:t>
+            </a:r>
+          </a:p>
+        </p:txBody>
+      </p:sp>
+      <p:sp>
+        <p:nvSpPr>
+          <p:cNvPr id="9" name="TextBox 8"/>
+          <p:cNvSpPr txBox="1"/>
+          <p:nvPr/>
+        </p:nvSpPr>
+        <p:spPr>
+          <a:xfrm>
+            <a:off x="3602133" y="4572000"/>
+            <a:ext cx="4957255" cy="584775"/>
+          </a:xfrm>
+          <a:prstGeom prst="rect">
+            <a:avLst/>
+          </a:prstGeom>
+          <a:noFill/>
+        </p:spPr>
+        <p:txBody>
+          <a:bodyPr wrap="none">
+            <a:spAutoFit/>
+          </a:bodyPr>
+          <a:lstStyle/>
+          <a:p>
+            <a:pPr algn="ctr"/>
+            <a:r>
+              <a:rPr lang="fr-FR" sz="3200" b="1" noProof="0" dirty="0">
+                <a:solidFill>
+                  <a:schemeClr val="accent6">
+                    <a:lumMod val="50000"/>
+                  </a:schemeClr>
+                </a:solidFill>
+              </a:rPr>
+              <a:t>Merci pour votre attention !</a:t>
+            </a:r>
+            <a:endParaRPr lang="fr-FR" sz="2400" b="1" noProof="0" dirty="0">
+              <a:solidFill>
+                <a:schemeClr val="accent6">
+                  <a:lumMod val="50000"/>
+                </a:schemeClr>
+              </a:solidFill>
+            </a:endParaRPr>
+          </a:p>
+        </p:txBody>
+      </p:sp>
+      <p:sp>
+        <p:nvSpPr>
+          <p:cNvPr id="10" name="Rectangle 9"/>
+          <p:cNvSpPr/>
+          <p:nvPr/>
+        </p:nvSpPr>
+        <p:spPr>
+          <a:xfrm>
+            <a:off x="640080" y="6419088"/>
+            <a:ext cx="10881360" cy="18288"/>
+          </a:xfrm>
+          <a:prstGeom prst="rect">
+            <a:avLst/>
+          </a:prstGeom>
+          <a:solidFill>
+            <a:srgbClr val="EFEAE0"/>
+          </a:solidFill>
+          <a:ln>
+            <a:noFill/>
+          </a:ln>
+        </p:spPr>
+        <p:style>
+          <a:lnRef idx="1">
+            <a:schemeClr val="accent1"/>
+          </a:lnRef>
+          <a:fillRef idx="3">
+            <a:schemeClr val="accent1"/>
+          </a:fillRef>
+          <a:effectRef idx="2">
+            <a:schemeClr val="accent1"/>
+          </a:effectRef>
+          <a:fontRef idx="minor">
+            <a:schemeClr val="lt1"/>
+          </a:fontRef>
+        </p:style>
+        <p:txBody>
+          <a:bodyPr rtlCol="0" anchor="ctr"/>
+          <a:lstStyle/>
+          <a:p>
+            <a:pPr algn="ctr"/>
+            <a:endParaRPr lang="fr-FR" noProof="0" dirty="0"/>
+          </a:p>
+        </p:txBody>
+      </p:sp>
+      <p:sp>
+        <p:nvSpPr>
+          <p:cNvPr id="11" name="TextBox 10"/>
+          <p:cNvSpPr txBox="1"/>
+          <p:nvPr/>
+        </p:nvSpPr>
+        <p:spPr>
+          <a:xfrm>
+            <a:off x="10789920" y="6473952"/>
+            <a:ext cx="640080" cy="182880"/>
+          </a:xfrm>
+          <a:prstGeom prst="rect">
+            <a:avLst/>
+          </a:prstGeom>
+          <a:noFill/>
+        </p:spPr>
+        <p:txBody>
+          <a:bodyPr wrap="none">
+            <a:spAutoFit/>
+          </a:bodyPr>
+          <a:lstStyle/>
+          <a:p>
+            <a:pPr algn="r"/>
+            <a:r>
+              <a:rPr lang="fr-FR" sz="900" noProof="0" dirty="0">
+                <a:solidFill>
+                  <a:srgbClr val="69625E"/>
+                </a:solidFill>
+              </a:rPr>
+              <a:t>15</a:t>
             </a:r>
           </a:p>
         </p:txBody>
@@ -15871,14 +17346,92 @@
       </p:sp>
       <p:sp>
         <p:nvSpPr>
+          <p:cNvPr id="10" name="Rectangle 9"/>
+          <p:cNvSpPr/>
+          <p:nvPr/>
+        </p:nvSpPr>
+        <p:spPr>
+          <a:xfrm>
+            <a:off x="640080" y="6419088"/>
+            <a:ext cx="10881360" cy="18288"/>
+          </a:xfrm>
+          <a:prstGeom prst="rect">
+            <a:avLst/>
+          </a:prstGeom>
+          <a:solidFill>
+            <a:srgbClr val="EFEAE0"/>
+          </a:solidFill>
+          <a:ln>
+            <a:noFill/>
+          </a:ln>
+        </p:spPr>
+        <p:style>
+          <a:lnRef idx="1">
+            <a:schemeClr val="accent1"/>
+          </a:lnRef>
+          <a:fillRef idx="3">
+            <a:schemeClr val="accent1"/>
+          </a:fillRef>
+          <a:effectRef idx="2">
+            <a:schemeClr val="accent1"/>
+          </a:effectRef>
+          <a:fontRef idx="minor">
+            <a:schemeClr val="lt1"/>
+          </a:fontRef>
+        </p:style>
+        <p:txBody>
+          <a:bodyPr rtlCol="0" anchor="ctr"/>
+          <a:lstStyle/>
+          <a:p>
+            <a:pPr algn="ctr"/>
+            <a:endParaRPr lang="fr-FR" noProof="0" dirty="0"/>
+          </a:p>
+        </p:txBody>
+      </p:sp>
+      <p:sp>
+        <p:nvSpPr>
+          <p:cNvPr id="11" name="TextBox 10"/>
+          <p:cNvSpPr txBox="1"/>
+          <p:nvPr/>
+        </p:nvSpPr>
+        <p:spPr>
+          <a:xfrm>
+            <a:off x="10789920" y="6473952"/>
+            <a:ext cx="640080" cy="182880"/>
+          </a:xfrm>
+          <a:prstGeom prst="rect">
+            <a:avLst/>
+          </a:prstGeom>
+          <a:noFill/>
+        </p:spPr>
+        <p:txBody>
+          <a:bodyPr wrap="none">
+            <a:spAutoFit/>
+          </a:bodyPr>
+          <a:lstStyle/>
+          <a:p>
+            <a:pPr algn="r"/>
+            <a:r>
+              <a:rPr lang="fr-FR" sz="900" noProof="0" dirty="0">
+                <a:solidFill>
+                  <a:srgbClr val="69625E"/>
+                </a:solidFill>
+              </a:rPr>
+              <a:t>7</a:t>
+            </a:r>
+          </a:p>
+        </p:txBody>
+      </p:sp>
+      <p:sp>
+        <p:nvSpPr>
           <p:cNvPr id="4" name="Rounded Rectangle 3"/>
           <p:cNvSpPr/>
           <p:nvPr/>
         </p:nvSpPr>
         <p:spPr>
           <a:xfrm>
-            <a:off x="706846" y="1460864"/>
-            <a:ext cx="3407954" cy="4114800"/>
+            <a:off x="640080" y="960116"/>
+            <a:ext cx="3072985" cy="1786529"/>
           </a:xfrm>
           <a:prstGeom prst="roundRect">
             <a:avLst/>
@@ -16086,1398 +17639,39 @@
               </a:rPr>
               <a:t> réutilisables.</a:t>
             </a:r>
-            <a:br>
-              <a:rPr kumimoji="0" lang="fr-FR" sz="1600" b="0" i="0" u="none" strike="noStrike" kern="1200" cap="none" spc="0" normalizeH="0" baseline="0" noProof="0" dirty="0">
-                <a:ln>
-                  <a:noFill/>
-                </a:ln>
-                <a:solidFill>
-                  <a:srgbClr val="2C2522"/>
-                </a:solidFill>
-                <a:effectLst/>
-                <a:uLnTx/>
-                <a:uFillTx/>
-                <a:latin typeface="Calibri"/>
-                <a:ea typeface="+mn-ea"/>
-                <a:cs typeface="+mn-cs"/>
-              </a:rPr>
-            </a:br>
-            <a:br>
-              <a:rPr kumimoji="0" lang="fr-FR" sz="1600" b="0" i="0" u="none" strike="noStrike" kern="1200" cap="none" spc="0" normalizeH="0" baseline="0" noProof="0" dirty="0">
-                <a:ln>
-                  <a:noFill/>
-                </a:ln>
-                <a:solidFill>
-                  <a:srgbClr val="2C2522"/>
-                </a:solidFill>
-                <a:effectLst/>
-                <a:uLnTx/>
-                <a:uFillTx/>
-                <a:latin typeface="Calibri"/>
-                <a:ea typeface="+mn-ea"/>
-                <a:cs typeface="+mn-cs"/>
-              </a:rPr>
-            </a:br>
-            <a:r>
-              <a:rPr kumimoji="0" lang="fr-FR" sz="1600" b="0" i="0" u="none" strike="noStrike" kern="1200" cap="none" spc="0" normalizeH="0" baseline="0" noProof="0" dirty="0">
-                <a:ln>
-                  <a:noFill/>
-                </a:ln>
-                <a:solidFill>
-                  <a:srgbClr val="2C2522"/>
-                </a:solidFill>
-                <a:effectLst/>
-                <a:uLnTx/>
-                <a:uFillTx/>
-                <a:latin typeface="Calibri"/>
-                <a:ea typeface="+mn-ea"/>
-                <a:cs typeface="+mn-cs"/>
-              </a:rPr>
-              <a:t>Exemples :</a:t>
-            </a:r>
-          </a:p>
-          <a:p>
-            <a:pPr marL="0" marR="0" lvl="0" indent="0" algn="l" defTabSz="457200" rtl="0" eaLnBrk="1" fontAlgn="auto" latinLnBrk="0" hangingPunct="1">
-              <a:lnSpc>
-                <a:spcPct val="100000"/>
-              </a:lnSpc>
-              <a:spcBef>
-                <a:spcPts val="700"/>
-              </a:spcBef>
-              <a:spcAft>
-                <a:spcPts val="0"/>
-              </a:spcAft>
-              <a:buClrTx/>
-              <a:buSzTx/>
-              <a:buFontTx/>
-              <a:buNone/>
-              <a:tabLst/>
-              <a:defRPr sz="1200">
-                <a:solidFill>
-                  <a:srgbClr val="2C2522"/>
-                </a:solidFill>
-              </a:defRPr>
-            </a:pPr>
-            <a:br>
-              <a:rPr kumimoji="0" lang="fr-FR" sz="1600" b="0" i="0" u="none" strike="noStrike" kern="1200" cap="none" spc="0" normalizeH="0" baseline="0" noProof="0" dirty="0">
-                <a:ln>
-                  <a:noFill/>
-                </a:ln>
-                <a:solidFill>
-                  <a:srgbClr val="2C2522"/>
-                </a:solidFill>
-                <a:effectLst/>
-                <a:uLnTx/>
-                <a:uFillTx/>
-                <a:latin typeface="Calibri"/>
-                <a:ea typeface="+mn-ea"/>
-                <a:cs typeface="+mn-cs"/>
-              </a:rPr>
-            </a:br>
-            <a:r>
-              <a:rPr kumimoji="0" lang="fr-FR" sz="1600" b="0" i="0" u="none" strike="noStrike" kern="1200" cap="none" spc="0" normalizeH="0" baseline="0" noProof="0" dirty="0">
-                <a:ln>
-                  <a:noFill/>
-                </a:ln>
-                <a:solidFill>
-                  <a:srgbClr val="2C2522"/>
-                </a:solidFill>
-                <a:effectLst/>
-                <a:uLnTx/>
-                <a:uFillTx/>
-                <a:latin typeface="Calibri"/>
-                <a:ea typeface="+mn-ea"/>
-                <a:cs typeface="+mn-cs"/>
-              </a:rPr>
-              <a:t>{% for </a:t>
-            </a:r>
-            <a:r>
-              <a:rPr kumimoji="0" lang="fr-FR" sz="1600" b="0" i="0" u="none" strike="noStrike" kern="1200" cap="none" spc="0" normalizeH="0" baseline="0" noProof="0" dirty="0" err="1">
-                <a:ln>
-                  <a:noFill/>
-                </a:ln>
-                <a:solidFill>
-                  <a:srgbClr val="2C2522"/>
-                </a:solidFill>
-                <a:effectLst/>
-                <a:uLnTx/>
-                <a:uFillTx/>
-                <a:latin typeface="Calibri"/>
-                <a:ea typeface="+mn-ea"/>
-                <a:cs typeface="+mn-cs"/>
-              </a:rPr>
-              <a:t>product</a:t>
-            </a:r>
-            <a:r>
-              <a:rPr kumimoji="0" lang="fr-FR" sz="1600" b="0" i="0" u="none" strike="noStrike" kern="1200" cap="none" spc="0" normalizeH="0" baseline="0" noProof="0" dirty="0">
-                <a:ln>
-                  <a:noFill/>
-                </a:ln>
-                <a:solidFill>
-                  <a:srgbClr val="2C2522"/>
-                </a:solidFill>
-                <a:effectLst/>
-                <a:uLnTx/>
-                <a:uFillTx/>
-                <a:latin typeface="Calibri"/>
-                <a:ea typeface="+mn-ea"/>
-                <a:cs typeface="+mn-cs"/>
-              </a:rPr>
-              <a:t> in </a:t>
-            </a:r>
-            <a:r>
-              <a:rPr kumimoji="0" lang="fr-FR" sz="1600" b="0" i="0" u="none" strike="noStrike" kern="1200" cap="none" spc="0" normalizeH="0" baseline="0" noProof="0" dirty="0" err="1">
-                <a:ln>
-                  <a:noFill/>
-                </a:ln>
-                <a:solidFill>
-                  <a:srgbClr val="2C2522"/>
-                </a:solidFill>
-                <a:effectLst/>
-                <a:uLnTx/>
-                <a:uFillTx/>
-                <a:latin typeface="Calibri"/>
-                <a:ea typeface="+mn-ea"/>
-                <a:cs typeface="+mn-cs"/>
-              </a:rPr>
-              <a:t>products</a:t>
-            </a:r>
-            <a:r>
-              <a:rPr kumimoji="0" lang="fr-FR" sz="1600" b="0" i="0" u="none" strike="noStrike" kern="1200" cap="none" spc="0" normalizeH="0" baseline="0" noProof="0" dirty="0">
-                <a:ln>
-                  <a:noFill/>
-                </a:ln>
-                <a:solidFill>
-                  <a:srgbClr val="2C2522"/>
-                </a:solidFill>
-                <a:effectLst/>
-                <a:uLnTx/>
-                <a:uFillTx/>
-                <a:latin typeface="Calibri"/>
-                <a:ea typeface="+mn-ea"/>
-                <a:cs typeface="+mn-cs"/>
-              </a:rPr>
-              <a:t> %}</a:t>
-            </a:r>
-            <a:endParaRPr kumimoji="0" lang="fr-FR" sz="1600" b="0" i="0" u="none" strike="noStrike" kern="1200" cap="none" spc="0" normalizeH="0" baseline="0" dirty="0">
-              <a:ln>
-                <a:noFill/>
-              </a:ln>
-              <a:solidFill>
-                <a:srgbClr val="2C2522"/>
-              </a:solidFill>
-              <a:effectLst/>
-              <a:uLnTx/>
-              <a:uFillTx/>
-              <a:latin typeface="Calibri"/>
-              <a:ea typeface="+mn-ea"/>
-              <a:cs typeface="+mn-cs"/>
-            </a:endParaRPr>
-          </a:p>
-          <a:p>
-            <a:pPr marL="0" marR="0" lvl="0" indent="0" algn="l" defTabSz="457200" rtl="0" eaLnBrk="1" fontAlgn="auto" latinLnBrk="0" hangingPunct="1">
-              <a:lnSpc>
-                <a:spcPct val="100000"/>
-              </a:lnSpc>
-              <a:spcBef>
-                <a:spcPts val="700"/>
-              </a:spcBef>
-              <a:spcAft>
-                <a:spcPts val="0"/>
-              </a:spcAft>
-              <a:buClrTx/>
-              <a:buSzTx/>
-              <a:buFontTx/>
-              <a:buNone/>
-              <a:tabLst/>
-              <a:defRPr sz="1200">
-                <a:solidFill>
-                  <a:srgbClr val="2C2522"/>
-                </a:solidFill>
-              </a:defRPr>
-            </a:pPr>
-            <a:endParaRPr lang="fr-FR" sz="1600" noProof="0" dirty="0">
-              <a:solidFill>
-                <a:srgbClr val="2C2522"/>
-              </a:solidFill>
-              <a:latin typeface="Calibri"/>
-            </a:endParaRPr>
-          </a:p>
-          <a:p>
-            <a:pPr marL="0" marR="0" lvl="0" indent="0" algn="l" defTabSz="457200" rtl="0" eaLnBrk="1" fontAlgn="auto" latinLnBrk="0" hangingPunct="1">
-              <a:lnSpc>
-                <a:spcPct val="100000"/>
-              </a:lnSpc>
-              <a:spcBef>
-                <a:spcPts val="700"/>
-              </a:spcBef>
-              <a:spcAft>
-                <a:spcPts val="0"/>
-              </a:spcAft>
-              <a:buClrTx/>
-              <a:buSzTx/>
-              <a:buFontTx/>
-              <a:buNone/>
-              <a:tabLst/>
-              <a:defRPr sz="1200">
-                <a:solidFill>
-                  <a:srgbClr val="2C2522"/>
-                </a:solidFill>
-              </a:defRPr>
-            </a:pPr>
-            <a:r>
-              <a:rPr kumimoji="0" lang="fr-FR" sz="1600" b="0" i="0" u="none" strike="noStrike" kern="1200" cap="none" spc="0" normalizeH="0" baseline="0" noProof="0" dirty="0">
-                <a:ln>
-                  <a:noFill/>
-                </a:ln>
-                <a:solidFill>
-                  <a:srgbClr val="2C2522"/>
-                </a:solidFill>
-                <a:effectLst/>
-                <a:uLnTx/>
-                <a:uFillTx/>
-                <a:latin typeface="Calibri"/>
-                <a:ea typeface="+mn-ea"/>
-                <a:cs typeface="+mn-cs"/>
-              </a:rPr>
-              <a:t>{% if </a:t>
-            </a:r>
-            <a:r>
-              <a:rPr kumimoji="0" lang="fr-FR" sz="1600" b="0" i="0" u="none" strike="noStrike" kern="1200" cap="none" spc="0" normalizeH="0" baseline="0" noProof="0" dirty="0" err="1">
-                <a:ln>
-                  <a:noFill/>
-                </a:ln>
-                <a:solidFill>
-                  <a:srgbClr val="2C2522"/>
-                </a:solidFill>
-                <a:effectLst/>
-                <a:uLnTx/>
-                <a:uFillTx/>
-                <a:latin typeface="Calibri"/>
-                <a:ea typeface="+mn-ea"/>
-                <a:cs typeface="+mn-cs"/>
-              </a:rPr>
-              <a:t>review.product</a:t>
-            </a:r>
-            <a:r>
-              <a:rPr kumimoji="0" lang="fr-FR" sz="1600" b="0" i="0" u="none" strike="noStrike" kern="1200" cap="none" spc="0" normalizeH="0" baseline="0" noProof="0" dirty="0">
-                <a:ln>
-                  <a:noFill/>
-                </a:ln>
-                <a:solidFill>
-                  <a:srgbClr val="2C2522"/>
-                </a:solidFill>
-                <a:effectLst/>
-                <a:uLnTx/>
-                <a:uFillTx/>
-                <a:latin typeface="Calibri"/>
-                <a:ea typeface="+mn-ea"/>
-                <a:cs typeface="+mn-cs"/>
-              </a:rPr>
-              <a:t> %}</a:t>
-            </a:r>
-          </a:p>
-          <a:p>
-            <a:pPr marL="0" marR="0" lvl="0" indent="0" algn="l" defTabSz="457200" rtl="0" eaLnBrk="1" fontAlgn="auto" latinLnBrk="0" hangingPunct="1">
-              <a:lnSpc>
-                <a:spcPct val="100000"/>
-              </a:lnSpc>
-              <a:spcBef>
-                <a:spcPts val="700"/>
-              </a:spcBef>
-              <a:spcAft>
-                <a:spcPts val="0"/>
-              </a:spcAft>
-              <a:buClrTx/>
-              <a:buSzTx/>
-              <a:buFontTx/>
-              <a:buNone/>
-              <a:tabLst/>
-              <a:defRPr sz="1200">
-                <a:solidFill>
-                  <a:srgbClr val="2C2522"/>
-                </a:solidFill>
-              </a:defRPr>
-            </a:pPr>
-            <a:r>
-              <a:rPr kumimoji="0" lang="fr-FR" sz="1600" b="0" i="0" u="none" strike="noStrike" kern="1200" cap="none" spc="0" normalizeH="0" baseline="0" noProof="0" dirty="0">
-                <a:ln>
-                  <a:noFill/>
-                </a:ln>
-                <a:solidFill>
-                  <a:srgbClr val="2C2522"/>
-                </a:solidFill>
-                <a:effectLst/>
-                <a:uLnTx/>
-                <a:uFillTx/>
-                <a:latin typeface="Calibri"/>
-                <a:ea typeface="+mn-ea"/>
-                <a:cs typeface="+mn-cs"/>
-              </a:rPr>
-              <a:t>{{ </a:t>
-            </a:r>
-            <a:r>
-              <a:rPr kumimoji="0" lang="fr-FR" sz="1600" b="0" i="0" u="none" strike="noStrike" kern="1200" cap="none" spc="0" normalizeH="0" baseline="0" noProof="0" dirty="0" err="1">
-                <a:ln>
-                  <a:noFill/>
-                </a:ln>
-                <a:solidFill>
-                  <a:srgbClr val="2C2522"/>
-                </a:solidFill>
-                <a:effectLst/>
-                <a:uLnTx/>
-                <a:uFillTx/>
-                <a:latin typeface="Calibri"/>
-                <a:ea typeface="+mn-ea"/>
-                <a:cs typeface="+mn-cs"/>
-              </a:rPr>
-              <a:t>review.product.title</a:t>
-            </a:r>
-            <a:r>
-              <a:rPr kumimoji="0" lang="fr-FR" sz="1600" b="0" i="0" u="none" strike="noStrike" kern="1200" cap="none" spc="0" normalizeH="0" baseline="0" noProof="0" dirty="0">
-                <a:ln>
-                  <a:noFill/>
-                </a:ln>
-                <a:solidFill>
-                  <a:srgbClr val="2C2522"/>
-                </a:solidFill>
-                <a:effectLst/>
-                <a:uLnTx/>
-                <a:uFillTx/>
-                <a:latin typeface="Calibri"/>
-                <a:ea typeface="+mn-ea"/>
-                <a:cs typeface="+mn-cs"/>
-              </a:rPr>
-              <a:t> }} –</a:t>
-            </a:r>
-          </a:p>
-          <a:p>
-            <a:pPr marL="0" marR="0" lvl="0" indent="0" algn="l" defTabSz="457200" rtl="0" eaLnBrk="1" fontAlgn="auto" latinLnBrk="0" hangingPunct="1">
-              <a:lnSpc>
-                <a:spcPct val="100000"/>
-              </a:lnSpc>
-              <a:spcBef>
-                <a:spcPts val="700"/>
-              </a:spcBef>
-              <a:spcAft>
-                <a:spcPts val="0"/>
-              </a:spcAft>
-              <a:buClrTx/>
-              <a:buSzTx/>
-              <a:buFontTx/>
-              <a:buNone/>
-              <a:tabLst/>
-              <a:defRPr sz="1200">
-                <a:solidFill>
-                  <a:srgbClr val="2C2522"/>
-                </a:solidFill>
-              </a:defRPr>
-            </a:pPr>
-            <a:r>
-              <a:rPr kumimoji="0" lang="fr-FR" sz="1600" b="0" i="0" u="none" strike="noStrike" kern="1200" cap="none" spc="0" normalizeH="0" baseline="0" noProof="0" dirty="0">
-                <a:ln>
-                  <a:noFill/>
-                </a:ln>
-                <a:solidFill>
-                  <a:srgbClr val="2C2522"/>
-                </a:solidFill>
-                <a:effectLst/>
-                <a:uLnTx/>
-                <a:uFillTx/>
-                <a:latin typeface="Calibri"/>
-                <a:ea typeface="+mn-ea"/>
-                <a:cs typeface="+mn-cs"/>
-              </a:rPr>
-              <a:t>{% </a:t>
-            </a:r>
-            <a:r>
-              <a:rPr kumimoji="0" lang="fr-FR" sz="1600" b="0" i="0" u="none" strike="noStrike" kern="1200" cap="none" spc="0" normalizeH="0" baseline="0" noProof="0" dirty="0" err="1">
-                <a:ln>
-                  <a:noFill/>
-                </a:ln>
-                <a:solidFill>
-                  <a:srgbClr val="2C2522"/>
-                </a:solidFill>
-                <a:effectLst/>
-                <a:uLnTx/>
-                <a:uFillTx/>
-                <a:latin typeface="Calibri"/>
-                <a:ea typeface="+mn-ea"/>
-                <a:cs typeface="+mn-cs"/>
-              </a:rPr>
-              <a:t>endif</a:t>
-            </a:r>
-            <a:r>
-              <a:rPr kumimoji="0" lang="fr-FR" sz="1600" b="0" i="0" u="none" strike="noStrike" kern="1200" cap="none" spc="0" normalizeH="0" baseline="0" noProof="0" dirty="0">
-                <a:ln>
-                  <a:noFill/>
-                </a:ln>
-                <a:solidFill>
-                  <a:srgbClr val="2C2522"/>
-                </a:solidFill>
-                <a:effectLst/>
-                <a:uLnTx/>
-                <a:uFillTx/>
-                <a:latin typeface="Calibri"/>
-                <a:ea typeface="+mn-ea"/>
-                <a:cs typeface="+mn-cs"/>
-              </a:rPr>
-              <a:t> %}</a:t>
-            </a:r>
-          </a:p>
-        </p:txBody>
-      </p:sp>
-      <p:sp>
-        <p:nvSpPr>
-          <p:cNvPr id="6" name="Rounded Rectangle 5"/>
-          <p:cNvSpPr/>
+          </a:p>
+        </p:txBody>
+      </p:sp>
+      <p:pic>
+        <p:nvPicPr>
+          <p:cNvPr id="9" name="Image 8">
+            <a:extLst>
+              <a:ext uri="{FF2B5EF4-FFF2-40B4-BE49-F238E27FC236}">
+                <a16:creationId xmlns:a16="http://schemas.microsoft.com/office/drawing/2014/main" id="{BE8214C3-4717-CB88-E885-52D0426FBF02}"/>
+              </a:ext>
+            </a:extLst>
+          </p:cNvPr>
+          <p:cNvPicPr>
+            <a:picLocks noChangeAspect="1"/>
+          </p:cNvPicPr>
           <p:nvPr/>
-        </p:nvSpPr>
+        </p:nvPicPr>
+        <p:blipFill>
+          <a:blip r:embed="rId3"/>
+          <a:stretch>
+            <a:fillRect/>
+          </a:stretch>
+        </p:blipFill>
         <p:spPr>
           <a:xfrm>
-            <a:off x="4410166" y="1460864"/>
-            <a:ext cx="3407954" cy="4114800"/>
-          </a:xfrm>
-          <a:prstGeom prst="roundRect">
-            <a:avLst/>
-          </a:prstGeom>
-          <a:solidFill>
-            <a:srgbClr val="FFFFFF"/>
-          </a:solidFill>
-          <a:ln>
-            <a:solidFill>
-              <a:srgbClr val="EFEAE0"/>
-            </a:solidFill>
-          </a:ln>
-        </p:spPr>
-        <p:style>
-          <a:lnRef idx="1">
-            <a:schemeClr val="accent1"/>
-          </a:lnRef>
-          <a:fillRef idx="3">
-            <a:schemeClr val="accent1"/>
-          </a:fillRef>
-          <a:effectRef idx="2">
-            <a:schemeClr val="accent1"/>
-          </a:effectRef>
-          <a:fontRef idx="minor">
-            <a:schemeClr val="lt1"/>
-          </a:fontRef>
-        </p:style>
-        <p:txBody>
-          <a:bodyPr rtlCol="0" anchor="t"/>
-          <a:lstStyle/>
-          <a:p>
-            <a:pPr marL="0" marR="0" lvl="0" indent="0" algn="l" defTabSz="457200" rtl="0" eaLnBrk="1" fontAlgn="auto" latinLnBrk="0" hangingPunct="1">
-              <a:lnSpc>
-                <a:spcPct val="100000"/>
-              </a:lnSpc>
-              <a:spcBef>
-                <a:spcPts val="0"/>
-              </a:spcBef>
-              <a:spcAft>
-                <a:spcPts val="0"/>
-              </a:spcAft>
-              <a:buClrTx/>
-              <a:buSzTx/>
-              <a:buFontTx/>
-              <a:buNone/>
-              <a:tabLst/>
-              <a:defRPr/>
-            </a:pPr>
-            <a:r>
-              <a:rPr kumimoji="0" lang="fr-FR" b="1" i="0" u="none" strike="noStrike" kern="1200" cap="none" spc="0" normalizeH="0" baseline="0" noProof="0" dirty="0">
-                <a:ln>
-                  <a:noFill/>
-                </a:ln>
-                <a:solidFill>
-                  <a:srgbClr val="F79646">
-                    <a:lumMod val="50000"/>
-                  </a:srgbClr>
-                </a:solidFill>
-                <a:effectLst/>
-                <a:uLnTx/>
-                <a:uFillTx/>
-                <a:latin typeface="Calibri"/>
-                <a:ea typeface="+mn-ea"/>
-                <a:cs typeface="+mn-cs"/>
-              </a:rPr>
-              <a:t>CSS</a:t>
-            </a:r>
-          </a:p>
-          <a:p>
-            <a:pPr marL="0" marR="0" lvl="0" indent="0" algn="l" defTabSz="457200" rtl="0" eaLnBrk="1" fontAlgn="auto" latinLnBrk="0" hangingPunct="1">
-              <a:lnSpc>
-                <a:spcPct val="100000"/>
-              </a:lnSpc>
-              <a:spcBef>
-                <a:spcPts val="700"/>
-              </a:spcBef>
-              <a:spcAft>
-                <a:spcPts val="0"/>
-              </a:spcAft>
-              <a:buClrTx/>
-              <a:buSzTx/>
-              <a:buFontTx/>
-              <a:buNone/>
-              <a:tabLst/>
-              <a:defRPr sz="1200">
-                <a:solidFill>
-                  <a:srgbClr val="2C2522"/>
-                </a:solidFill>
-              </a:defRPr>
-            </a:pPr>
-            <a:r>
-              <a:rPr kumimoji="0" lang="fr-FR" sz="1600" b="0" i="0" u="none" strike="noStrike" kern="1200" cap="none" spc="0" normalizeH="0" baseline="0" noProof="0" dirty="0">
-                <a:ln>
-                  <a:noFill/>
-                </a:ln>
-                <a:solidFill>
-                  <a:srgbClr val="2C2522"/>
-                </a:solidFill>
-                <a:effectLst/>
-                <a:uLnTx/>
-                <a:uFillTx/>
-                <a:latin typeface="Calibri"/>
-                <a:ea typeface="+mn-ea"/>
-                <a:cs typeface="+mn-cs"/>
-              </a:rPr>
-              <a:t>Bootstrap 5.3.8</a:t>
-            </a:r>
-            <a:br>
-              <a:rPr kumimoji="0" lang="fr-FR" sz="1600" b="0" i="0" u="none" strike="noStrike" kern="1200" cap="none" spc="0" normalizeH="0" baseline="0" noProof="0" dirty="0">
-                <a:ln>
-                  <a:noFill/>
-                </a:ln>
-                <a:solidFill>
-                  <a:srgbClr val="2C2522"/>
-                </a:solidFill>
-                <a:effectLst/>
-                <a:uLnTx/>
-                <a:uFillTx/>
-                <a:latin typeface="Calibri"/>
-                <a:ea typeface="+mn-ea"/>
-                <a:cs typeface="+mn-cs"/>
-              </a:rPr>
-            </a:br>
-            <a:r>
-              <a:rPr kumimoji="0" lang="fr-FR" sz="1600" b="0" i="0" u="none" strike="noStrike" kern="1200" cap="none" spc="0" normalizeH="0" baseline="0" noProof="0" dirty="0">
-                <a:ln>
-                  <a:noFill/>
-                </a:ln>
-                <a:solidFill>
-                  <a:srgbClr val="2C2522"/>
-                </a:solidFill>
-                <a:effectLst/>
-                <a:uLnTx/>
-                <a:uFillTx/>
-                <a:latin typeface="Calibri"/>
-                <a:ea typeface="+mn-ea"/>
-                <a:cs typeface="+mn-cs"/>
-              </a:rPr>
-              <a:t>+</a:t>
-            </a:r>
-            <a:br>
-              <a:rPr kumimoji="0" lang="fr-FR" sz="1600" b="0" i="0" u="none" strike="noStrike" kern="1200" cap="none" spc="0" normalizeH="0" baseline="0" noProof="0" dirty="0">
-                <a:ln>
-                  <a:noFill/>
-                </a:ln>
-                <a:solidFill>
-                  <a:srgbClr val="2C2522"/>
-                </a:solidFill>
-                <a:effectLst/>
-                <a:uLnTx/>
-                <a:uFillTx/>
-                <a:latin typeface="Calibri"/>
-                <a:ea typeface="+mn-ea"/>
-                <a:cs typeface="+mn-cs"/>
-              </a:rPr>
-            </a:br>
-            <a:r>
-              <a:rPr kumimoji="0" lang="fr-FR" sz="1600" b="0" i="0" u="none" strike="noStrike" kern="1200" cap="none" spc="0" normalizeH="0" baseline="0" noProof="0" dirty="0">
-                <a:ln>
-                  <a:noFill/>
-                </a:ln>
-                <a:solidFill>
-                  <a:srgbClr val="2C2522"/>
-                </a:solidFill>
-                <a:effectLst/>
-                <a:uLnTx/>
-                <a:uFillTx/>
-                <a:latin typeface="Calibri"/>
-                <a:ea typeface="+mn-ea"/>
-                <a:cs typeface="+mn-cs"/>
-              </a:rPr>
-              <a:t>CSS personnalisé</a:t>
-            </a:r>
-            <a:br>
-              <a:rPr kumimoji="0" lang="fr-FR" sz="1600" b="0" i="0" u="none" strike="noStrike" kern="1200" cap="none" spc="0" normalizeH="0" baseline="0" noProof="0" dirty="0">
-                <a:ln>
-                  <a:noFill/>
-                </a:ln>
-                <a:solidFill>
-                  <a:srgbClr val="2C2522"/>
-                </a:solidFill>
-                <a:effectLst/>
-                <a:uLnTx/>
-                <a:uFillTx/>
-                <a:latin typeface="Calibri"/>
-                <a:ea typeface="+mn-ea"/>
-                <a:cs typeface="+mn-cs"/>
-              </a:rPr>
-            </a:br>
-            <a:endParaRPr kumimoji="0" lang="fr-FR" sz="1600" b="0" i="0" u="none" strike="noStrike" kern="1200" cap="none" spc="0" normalizeH="0" baseline="0" noProof="0" dirty="0">
-              <a:ln>
-                <a:noFill/>
-              </a:ln>
-              <a:solidFill>
-                <a:srgbClr val="2C2522"/>
-              </a:solidFill>
-              <a:effectLst/>
-              <a:uLnTx/>
-              <a:uFillTx/>
-              <a:latin typeface="Calibri"/>
-              <a:ea typeface="+mn-ea"/>
-              <a:cs typeface="+mn-cs"/>
-            </a:endParaRPr>
-          </a:p>
-          <a:p>
-            <a:pPr marL="0" marR="0" lvl="0" indent="0" algn="l" defTabSz="457200" rtl="0" eaLnBrk="1" fontAlgn="auto" latinLnBrk="0" hangingPunct="1">
-              <a:lnSpc>
-                <a:spcPct val="100000"/>
-              </a:lnSpc>
-              <a:spcBef>
-                <a:spcPts val="700"/>
-              </a:spcBef>
-              <a:spcAft>
-                <a:spcPts val="0"/>
-              </a:spcAft>
-              <a:buClrTx/>
-              <a:buSzTx/>
-              <a:buFontTx/>
-              <a:buNone/>
-              <a:tabLst/>
-              <a:defRPr sz="1200">
-                <a:solidFill>
-                  <a:srgbClr val="2C2522"/>
-                </a:solidFill>
-              </a:defRPr>
-            </a:pPr>
-            <a:r>
-              <a:rPr kumimoji="0" lang="fr-FR" sz="1600" b="0" i="0" u="none" strike="noStrike" kern="1200" cap="none" spc="0" normalizeH="0" baseline="0" noProof="0" dirty="0">
-                <a:ln>
-                  <a:noFill/>
-                </a:ln>
-                <a:solidFill>
-                  <a:srgbClr val="2C2522"/>
-                </a:solidFill>
-                <a:effectLst/>
-                <a:uLnTx/>
-                <a:uFillTx/>
-                <a:latin typeface="Calibri"/>
-                <a:ea typeface="+mn-ea"/>
-                <a:cs typeface="+mn-cs"/>
-              </a:rPr>
-              <a:t>Exemples de classes personnalisées :</a:t>
-            </a:r>
-          </a:p>
-          <a:p>
-            <a:pPr marL="0" marR="0" lvl="0" indent="0" algn="l" defTabSz="457200" rtl="0" eaLnBrk="1" fontAlgn="auto" latinLnBrk="0" hangingPunct="1">
-              <a:lnSpc>
-                <a:spcPct val="100000"/>
-              </a:lnSpc>
-              <a:spcBef>
-                <a:spcPts val="700"/>
-              </a:spcBef>
-              <a:spcAft>
-                <a:spcPts val="0"/>
-              </a:spcAft>
-              <a:buClrTx/>
-              <a:buSzTx/>
-              <a:buFontTx/>
-              <a:buNone/>
-              <a:tabLst/>
-              <a:defRPr sz="1200">
-                <a:solidFill>
-                  <a:srgbClr val="2C2522"/>
-                </a:solidFill>
-              </a:defRPr>
-            </a:pPr>
-            <a:br>
-              <a:rPr kumimoji="0" lang="fr-FR" sz="1600" b="0" i="0" u="none" strike="noStrike" kern="1200" cap="none" spc="0" normalizeH="0" baseline="0" noProof="0" dirty="0">
-                <a:ln>
-                  <a:noFill/>
-                </a:ln>
-                <a:solidFill>
-                  <a:srgbClr val="2C2522"/>
-                </a:solidFill>
-                <a:effectLst/>
-                <a:uLnTx/>
-                <a:uFillTx/>
-                <a:latin typeface="Calibri"/>
-                <a:ea typeface="+mn-ea"/>
-                <a:cs typeface="+mn-cs"/>
-              </a:rPr>
-            </a:br>
-            <a:r>
-              <a:rPr kumimoji="0" lang="fr-FR" sz="1600" b="0" i="0" u="none" strike="noStrike" kern="1200" cap="none" spc="0" normalizeH="0" baseline="0" noProof="0" dirty="0">
-                <a:ln>
-                  <a:noFill/>
-                </a:ln>
-                <a:solidFill>
-                  <a:srgbClr val="2C2522"/>
-                </a:solidFill>
-                <a:effectLst/>
-                <a:uLnTx/>
-                <a:uFillTx/>
-                <a:latin typeface="Calibri"/>
-                <a:ea typeface="+mn-ea"/>
-                <a:cs typeface="+mn-cs"/>
-              </a:rPr>
-              <a:t>.</a:t>
-            </a:r>
-            <a:r>
-              <a:rPr kumimoji="0" lang="fr-FR" sz="1600" b="0" i="0" u="none" strike="noStrike" kern="1200" cap="none" spc="0" normalizeH="0" baseline="0" noProof="0" dirty="0" err="1">
-                <a:ln>
-                  <a:noFill/>
-                </a:ln>
-                <a:solidFill>
-                  <a:srgbClr val="2C2522"/>
-                </a:solidFill>
-                <a:effectLst/>
-                <a:uLnTx/>
-                <a:uFillTx/>
-                <a:latin typeface="Calibri"/>
-                <a:ea typeface="+mn-ea"/>
-                <a:cs typeface="+mn-cs"/>
-              </a:rPr>
-              <a:t>hero</a:t>
-            </a:r>
-            <a:r>
-              <a:rPr kumimoji="0" lang="fr-FR" sz="1600" b="0" i="0" u="none" strike="noStrike" kern="1200" cap="none" spc="0" normalizeH="0" baseline="0" noProof="0" dirty="0">
-                <a:ln>
-                  <a:noFill/>
-                </a:ln>
-                <a:solidFill>
-                  <a:srgbClr val="2C2522"/>
-                </a:solidFill>
-                <a:effectLst/>
-                <a:uLnTx/>
-                <a:uFillTx/>
-                <a:latin typeface="Calibri"/>
-                <a:ea typeface="+mn-ea"/>
-                <a:cs typeface="+mn-cs"/>
-              </a:rPr>
-              <a:t>-section</a:t>
-            </a:r>
-            <a:br>
-              <a:rPr kumimoji="0" lang="fr-FR" sz="1600" b="0" i="0" u="none" strike="noStrike" kern="1200" cap="none" spc="0" normalizeH="0" baseline="0" noProof="0" dirty="0">
-                <a:ln>
-                  <a:noFill/>
-                </a:ln>
-                <a:solidFill>
-                  <a:srgbClr val="2C2522"/>
-                </a:solidFill>
-                <a:effectLst/>
-                <a:uLnTx/>
-                <a:uFillTx/>
-                <a:latin typeface="Calibri"/>
-                <a:ea typeface="+mn-ea"/>
-                <a:cs typeface="+mn-cs"/>
-              </a:rPr>
-            </a:br>
-            <a:r>
-              <a:rPr kumimoji="0" lang="fr-FR" sz="1600" b="0" i="0" u="none" strike="noStrike" kern="1200" cap="none" spc="0" normalizeH="0" baseline="0" noProof="0" dirty="0">
-                <a:ln>
-                  <a:noFill/>
-                </a:ln>
-                <a:solidFill>
-                  <a:srgbClr val="2C2522"/>
-                </a:solidFill>
-                <a:effectLst/>
-                <a:uLnTx/>
-                <a:uFillTx/>
-                <a:latin typeface="Calibri"/>
-                <a:ea typeface="+mn-ea"/>
-                <a:cs typeface="+mn-cs"/>
-              </a:rPr>
-              <a:t>.</a:t>
-            </a:r>
-            <a:r>
-              <a:rPr kumimoji="0" lang="fr-FR" sz="1600" b="0" i="0" u="none" strike="noStrike" kern="1200" cap="none" spc="0" normalizeH="0" baseline="0" noProof="0" dirty="0" err="1">
-                <a:ln>
-                  <a:noFill/>
-                </a:ln>
-                <a:solidFill>
-                  <a:srgbClr val="2C2522"/>
-                </a:solidFill>
-                <a:effectLst/>
-                <a:uLnTx/>
-                <a:uFillTx/>
-                <a:latin typeface="Calibri"/>
-                <a:ea typeface="+mn-ea"/>
-                <a:cs typeface="+mn-cs"/>
-              </a:rPr>
-              <a:t>hero-title</a:t>
-            </a:r>
-            <a:br>
-              <a:rPr kumimoji="0" lang="fr-FR" sz="1600" b="0" i="0" u="none" strike="noStrike" kern="1200" cap="none" spc="0" normalizeH="0" baseline="0" noProof="0" dirty="0">
-                <a:ln>
-                  <a:noFill/>
-                </a:ln>
-                <a:solidFill>
-                  <a:srgbClr val="2C2522"/>
-                </a:solidFill>
-                <a:effectLst/>
-                <a:uLnTx/>
-                <a:uFillTx/>
-                <a:latin typeface="Calibri"/>
-                <a:ea typeface="+mn-ea"/>
-                <a:cs typeface="+mn-cs"/>
-              </a:rPr>
-            </a:br>
-            <a:r>
-              <a:rPr kumimoji="0" lang="fr-FR" sz="1600" b="0" i="0" u="none" strike="noStrike" kern="1200" cap="none" spc="0" normalizeH="0" baseline="0" noProof="0" dirty="0">
-                <a:ln>
-                  <a:noFill/>
-                </a:ln>
-                <a:solidFill>
-                  <a:srgbClr val="2C2522"/>
-                </a:solidFill>
-                <a:effectLst/>
-                <a:uLnTx/>
-                <a:uFillTx/>
-                <a:latin typeface="Calibri"/>
-                <a:ea typeface="+mn-ea"/>
-                <a:cs typeface="+mn-cs"/>
-              </a:rPr>
-              <a:t>.</a:t>
-            </a:r>
-            <a:r>
-              <a:rPr kumimoji="0" lang="fr-FR" sz="1600" b="0" i="0" u="none" strike="noStrike" kern="1200" cap="none" spc="0" normalizeH="0" baseline="0" noProof="0" dirty="0" err="1">
-                <a:ln>
-                  <a:noFill/>
-                </a:ln>
-                <a:solidFill>
-                  <a:srgbClr val="2C2522"/>
-                </a:solidFill>
-                <a:effectLst/>
-                <a:uLnTx/>
-                <a:uFillTx/>
-                <a:latin typeface="Calibri"/>
-                <a:ea typeface="+mn-ea"/>
-                <a:cs typeface="+mn-cs"/>
-              </a:rPr>
-              <a:t>hero-subtitle</a:t>
-            </a:r>
-            <a:br>
-              <a:rPr kumimoji="0" lang="fr-FR" sz="1600" b="0" i="0" u="none" strike="noStrike" kern="1200" cap="none" spc="0" normalizeH="0" baseline="0" noProof="0" dirty="0">
-                <a:ln>
-                  <a:noFill/>
-                </a:ln>
-                <a:solidFill>
-                  <a:srgbClr val="2C2522"/>
-                </a:solidFill>
-                <a:effectLst/>
-                <a:uLnTx/>
-                <a:uFillTx/>
-                <a:latin typeface="Calibri"/>
-                <a:ea typeface="+mn-ea"/>
-                <a:cs typeface="+mn-cs"/>
-              </a:rPr>
-            </a:br>
-            <a:r>
-              <a:rPr kumimoji="0" lang="fr-FR" sz="1600" b="0" i="0" u="none" strike="noStrike" kern="1200" cap="none" spc="0" normalizeH="0" baseline="0" noProof="0" dirty="0">
-                <a:ln>
-                  <a:noFill/>
-                </a:ln>
-                <a:solidFill>
-                  <a:srgbClr val="2C2522"/>
-                </a:solidFill>
-                <a:effectLst/>
-                <a:uLnTx/>
-                <a:uFillTx/>
-                <a:latin typeface="Calibri"/>
-                <a:ea typeface="+mn-ea"/>
-                <a:cs typeface="+mn-cs"/>
-              </a:rPr>
-              <a:t>.service-</a:t>
-            </a:r>
-            <a:r>
-              <a:rPr kumimoji="0" lang="fr-FR" sz="1600" b="0" i="0" u="none" strike="noStrike" kern="1200" cap="none" spc="0" normalizeH="0" baseline="0" noProof="0" dirty="0" err="1">
-                <a:ln>
-                  <a:noFill/>
-                </a:ln>
-                <a:solidFill>
-                  <a:srgbClr val="2C2522"/>
-                </a:solidFill>
-                <a:effectLst/>
-                <a:uLnTx/>
-                <a:uFillTx/>
-                <a:latin typeface="Calibri"/>
-                <a:ea typeface="+mn-ea"/>
-                <a:cs typeface="+mn-cs"/>
-              </a:rPr>
-              <a:t>card</a:t>
-            </a:r>
-            <a:br>
-              <a:rPr kumimoji="0" lang="fr-FR" sz="1600" b="0" i="0" u="none" strike="noStrike" kern="1200" cap="none" spc="0" normalizeH="0" baseline="0" noProof="0" dirty="0">
-                <a:ln>
-                  <a:noFill/>
-                </a:ln>
-                <a:solidFill>
-                  <a:srgbClr val="2C2522"/>
-                </a:solidFill>
-                <a:effectLst/>
-                <a:uLnTx/>
-                <a:uFillTx/>
-                <a:latin typeface="Calibri"/>
-                <a:ea typeface="+mn-ea"/>
-                <a:cs typeface="+mn-cs"/>
-              </a:rPr>
-            </a:br>
-            <a:r>
-              <a:rPr kumimoji="0" lang="fr-FR" sz="1600" b="0" i="0" u="none" strike="noStrike" kern="1200" cap="none" spc="0" normalizeH="0" baseline="0" noProof="0" dirty="0">
-                <a:ln>
-                  <a:noFill/>
-                </a:ln>
-                <a:solidFill>
-                  <a:srgbClr val="2C2522"/>
-                </a:solidFill>
-                <a:effectLst/>
-                <a:uLnTx/>
-                <a:uFillTx/>
-                <a:latin typeface="Calibri"/>
-                <a:ea typeface="+mn-ea"/>
-                <a:cs typeface="+mn-cs"/>
-              </a:rPr>
-              <a:t>.</a:t>
-            </a:r>
-            <a:r>
-              <a:rPr kumimoji="0" lang="fr-FR" sz="1600" b="0" i="0" u="none" strike="noStrike" kern="1200" cap="none" spc="0" normalizeH="0" baseline="0" noProof="0" dirty="0" err="1">
-                <a:ln>
-                  <a:noFill/>
-                </a:ln>
-                <a:solidFill>
-                  <a:srgbClr val="2C2522"/>
-                </a:solidFill>
-                <a:effectLst/>
-                <a:uLnTx/>
-                <a:uFillTx/>
-                <a:latin typeface="Calibri"/>
-                <a:ea typeface="+mn-ea"/>
-                <a:cs typeface="+mn-cs"/>
-              </a:rPr>
-              <a:t>feature</a:t>
-            </a:r>
-            <a:r>
-              <a:rPr kumimoji="0" lang="fr-FR" sz="1600" b="0" i="0" u="none" strike="noStrike" kern="1200" cap="none" spc="0" normalizeH="0" baseline="0" noProof="0" dirty="0">
-                <a:ln>
-                  <a:noFill/>
-                </a:ln>
-                <a:solidFill>
-                  <a:srgbClr val="2C2522"/>
-                </a:solidFill>
-                <a:effectLst/>
-                <a:uLnTx/>
-                <a:uFillTx/>
-                <a:latin typeface="Calibri"/>
-                <a:ea typeface="+mn-ea"/>
-                <a:cs typeface="+mn-cs"/>
-              </a:rPr>
-              <a:t>-bar</a:t>
-            </a:r>
-            <a:br>
-              <a:rPr kumimoji="0" lang="fr-FR" sz="1600" b="0" i="0" u="none" strike="noStrike" kern="1200" cap="none" spc="0" normalizeH="0" baseline="0" noProof="0" dirty="0">
-                <a:ln>
-                  <a:noFill/>
-                </a:ln>
-                <a:solidFill>
-                  <a:srgbClr val="2C2522"/>
-                </a:solidFill>
-                <a:effectLst/>
-                <a:uLnTx/>
-                <a:uFillTx/>
-                <a:latin typeface="Calibri"/>
-                <a:ea typeface="+mn-ea"/>
-                <a:cs typeface="+mn-cs"/>
-              </a:rPr>
-            </a:br>
-            <a:r>
-              <a:rPr kumimoji="0" lang="fr-FR" sz="1600" b="0" i="0" u="none" strike="noStrike" kern="1200" cap="none" spc="0" normalizeH="0" baseline="0" noProof="0" dirty="0">
-                <a:ln>
-                  <a:noFill/>
-                </a:ln>
-                <a:solidFill>
-                  <a:srgbClr val="2C2522"/>
-                </a:solidFill>
-                <a:effectLst/>
-                <a:uLnTx/>
-                <a:uFillTx/>
-                <a:latin typeface="Calibri"/>
-                <a:ea typeface="+mn-ea"/>
-                <a:cs typeface="+mn-cs"/>
-              </a:rPr>
-              <a:t>.</a:t>
-            </a:r>
-            <a:r>
-              <a:rPr kumimoji="0" lang="fr-FR" sz="1600" b="0" i="0" u="none" strike="noStrike" kern="1200" cap="none" spc="0" normalizeH="0" baseline="0" noProof="0" dirty="0" err="1">
-                <a:ln>
-                  <a:noFill/>
-                </a:ln>
-                <a:solidFill>
-                  <a:srgbClr val="2C2522"/>
-                </a:solidFill>
-                <a:effectLst/>
-                <a:uLnTx/>
-                <a:uFillTx/>
-                <a:latin typeface="Calibri"/>
-                <a:ea typeface="+mn-ea"/>
-                <a:cs typeface="+mn-cs"/>
-              </a:rPr>
-              <a:t>btn</a:t>
-            </a:r>
-            <a:r>
-              <a:rPr kumimoji="0" lang="fr-FR" sz="1600" b="0" i="0" u="none" strike="noStrike" kern="1200" cap="none" spc="0" normalizeH="0" baseline="0" noProof="0" dirty="0">
-                <a:ln>
-                  <a:noFill/>
-                </a:ln>
-                <a:solidFill>
-                  <a:srgbClr val="2C2522"/>
-                </a:solidFill>
-                <a:effectLst/>
-                <a:uLnTx/>
-                <a:uFillTx/>
-                <a:latin typeface="Calibri"/>
-                <a:ea typeface="+mn-ea"/>
-                <a:cs typeface="+mn-cs"/>
-              </a:rPr>
-              <a:t>-gold</a:t>
-            </a:r>
-          </a:p>
-          <a:p>
-            <a:pPr algn="ctr"/>
-            <a:endParaRPr lang="fr-FR" noProof="0" dirty="0"/>
-          </a:p>
-        </p:txBody>
-      </p:sp>
-      <p:sp>
-        <p:nvSpPr>
-          <p:cNvPr id="8" name="Rounded Rectangle 7"/>
-          <p:cNvSpPr/>
-          <p:nvPr/>
-        </p:nvSpPr>
-        <p:spPr>
-          <a:xfrm>
-            <a:off x="8113486" y="1460864"/>
-            <a:ext cx="3407954" cy="4114800"/>
-          </a:xfrm>
-          <a:prstGeom prst="roundRect">
-            <a:avLst/>
-          </a:prstGeom>
-          <a:solidFill>
-            <a:srgbClr val="FFFFFF"/>
-          </a:solidFill>
-          <a:ln>
-            <a:solidFill>
-              <a:srgbClr val="EFEAE0"/>
-            </a:solidFill>
-          </a:ln>
-        </p:spPr>
-        <p:style>
-          <a:lnRef idx="1">
-            <a:schemeClr val="accent1"/>
-          </a:lnRef>
-          <a:fillRef idx="3">
-            <a:schemeClr val="accent1"/>
-          </a:fillRef>
-          <a:effectRef idx="2">
-            <a:schemeClr val="accent1"/>
-          </a:effectRef>
-          <a:fontRef idx="minor">
-            <a:schemeClr val="lt1"/>
-          </a:fontRef>
-        </p:style>
-        <p:txBody>
-          <a:bodyPr rtlCol="0" anchor="t"/>
-          <a:lstStyle/>
-          <a:p>
-            <a:pPr marL="0" marR="0" lvl="0" indent="0" algn="l" defTabSz="457200" rtl="0" eaLnBrk="1" fontAlgn="auto" latinLnBrk="0" hangingPunct="1">
-              <a:lnSpc>
-                <a:spcPct val="100000"/>
-              </a:lnSpc>
-              <a:spcBef>
-                <a:spcPts val="0"/>
-              </a:spcBef>
-              <a:spcAft>
-                <a:spcPts val="0"/>
-              </a:spcAft>
-              <a:buClrTx/>
-              <a:buSzTx/>
-              <a:buFontTx/>
-              <a:buNone/>
-              <a:tabLst/>
-              <a:defRPr/>
-            </a:pPr>
-            <a:r>
-              <a:rPr kumimoji="0" lang="fr-FR" b="1" i="0" u="none" strike="noStrike" kern="1200" cap="none" spc="0" normalizeH="0" baseline="0" noProof="0" dirty="0">
-                <a:ln>
-                  <a:noFill/>
-                </a:ln>
-                <a:solidFill>
-                  <a:srgbClr val="F79646">
-                    <a:lumMod val="50000"/>
-                  </a:srgbClr>
-                </a:solidFill>
-                <a:effectLst/>
-                <a:uLnTx/>
-                <a:uFillTx/>
-                <a:latin typeface="Calibri"/>
-                <a:ea typeface="+mn-ea"/>
-                <a:cs typeface="+mn-cs"/>
-              </a:rPr>
-              <a:t>JAVASCRIPT</a:t>
-            </a:r>
-          </a:p>
-          <a:p>
-            <a:pPr marL="0" marR="0" lvl="0" indent="0" algn="l" defTabSz="457200" rtl="0" eaLnBrk="1" fontAlgn="auto" latinLnBrk="0" hangingPunct="1">
-              <a:lnSpc>
-                <a:spcPct val="100000"/>
-              </a:lnSpc>
-              <a:spcBef>
-                <a:spcPts val="700"/>
-              </a:spcBef>
-              <a:spcAft>
-                <a:spcPts val="0"/>
-              </a:spcAft>
-              <a:buClrTx/>
-              <a:buSzTx/>
-              <a:buFontTx/>
-              <a:buNone/>
-              <a:tabLst/>
-              <a:defRPr sz="1200">
-                <a:solidFill>
-                  <a:srgbClr val="2C2522"/>
-                </a:solidFill>
-              </a:defRPr>
-            </a:pPr>
-            <a:r>
-              <a:rPr kumimoji="0" lang="fr-FR" sz="1600" b="0" i="0" u="none" strike="noStrike" kern="1200" cap="none" spc="0" normalizeH="0" baseline="0" noProof="0" dirty="0">
-                <a:ln>
-                  <a:noFill/>
-                </a:ln>
-                <a:solidFill>
-                  <a:srgbClr val="2C2522"/>
-                </a:solidFill>
-                <a:effectLst/>
-                <a:uLnTx/>
-                <a:uFillTx/>
-                <a:latin typeface="Calibri"/>
-                <a:ea typeface="+mn-ea"/>
-                <a:cs typeface="+mn-cs"/>
-              </a:rPr>
-              <a:t>JavaScript léger</a:t>
-            </a:r>
-            <a:br>
-              <a:rPr kumimoji="0" lang="fr-FR" sz="1600" b="0" i="0" u="none" strike="noStrike" kern="1200" cap="none" spc="0" normalizeH="0" baseline="0" noProof="0" dirty="0">
-                <a:ln>
-                  <a:noFill/>
-                </a:ln>
-                <a:solidFill>
-                  <a:srgbClr val="2C2522"/>
-                </a:solidFill>
-                <a:effectLst/>
-                <a:uLnTx/>
-                <a:uFillTx/>
-                <a:latin typeface="Calibri"/>
-                <a:ea typeface="+mn-ea"/>
-                <a:cs typeface="+mn-cs"/>
-              </a:rPr>
-            </a:br>
-            <a:br>
-              <a:rPr kumimoji="0" lang="fr-FR" sz="1600" b="0" i="0" u="none" strike="noStrike" kern="1200" cap="none" spc="0" normalizeH="0" baseline="0" noProof="0" dirty="0">
-                <a:ln>
-                  <a:noFill/>
-                </a:ln>
-                <a:solidFill>
-                  <a:srgbClr val="2C2522"/>
-                </a:solidFill>
-                <a:effectLst/>
-                <a:uLnTx/>
-                <a:uFillTx/>
-                <a:latin typeface="Calibri"/>
-                <a:ea typeface="+mn-ea"/>
-                <a:cs typeface="+mn-cs"/>
-              </a:rPr>
-            </a:br>
-            <a:r>
-              <a:rPr kumimoji="0" lang="fr-FR" sz="1600" b="0" i="0" u="none" strike="noStrike" kern="1200" cap="none" spc="0" normalizeH="0" baseline="0" noProof="0" dirty="0">
-                <a:ln>
-                  <a:noFill/>
-                </a:ln>
-                <a:solidFill>
-                  <a:srgbClr val="2C2522"/>
-                </a:solidFill>
-                <a:effectLst/>
-                <a:uLnTx/>
-                <a:uFillTx/>
-                <a:latin typeface="Calibri"/>
-                <a:ea typeface="+mn-ea"/>
-                <a:cs typeface="+mn-cs"/>
-              </a:rPr>
-              <a:t>Bootstrap pour les interactions courantes.</a:t>
-            </a:r>
-            <a:br>
-              <a:rPr kumimoji="0" lang="fr-FR" sz="1600" b="0" i="0" u="none" strike="noStrike" kern="1200" cap="none" spc="0" normalizeH="0" baseline="0" noProof="0" dirty="0">
-                <a:ln>
-                  <a:noFill/>
-                </a:ln>
-                <a:solidFill>
-                  <a:srgbClr val="2C2522"/>
-                </a:solidFill>
-                <a:effectLst/>
-                <a:uLnTx/>
-                <a:uFillTx/>
-                <a:latin typeface="Calibri"/>
-                <a:ea typeface="+mn-ea"/>
-                <a:cs typeface="+mn-cs"/>
-              </a:rPr>
-            </a:br>
-            <a:br>
-              <a:rPr kumimoji="0" lang="fr-FR" sz="1600" b="0" i="0" u="none" strike="noStrike" kern="1200" cap="none" spc="0" normalizeH="0" baseline="0" noProof="0" dirty="0">
-                <a:ln>
-                  <a:noFill/>
-                </a:ln>
-                <a:solidFill>
-                  <a:srgbClr val="2C2522"/>
-                </a:solidFill>
-                <a:effectLst/>
-                <a:uLnTx/>
-                <a:uFillTx/>
-                <a:latin typeface="Calibri"/>
-                <a:ea typeface="+mn-ea"/>
-                <a:cs typeface="+mn-cs"/>
-              </a:rPr>
-            </a:br>
-            <a:r>
-              <a:rPr kumimoji="0" lang="fr-FR" sz="1600" b="0" i="0" u="none" strike="noStrike" kern="1200" cap="none" spc="0" normalizeH="0" baseline="0" noProof="0" dirty="0" err="1">
-                <a:ln>
-                  <a:noFill/>
-                </a:ln>
-                <a:solidFill>
-                  <a:srgbClr val="2C2522"/>
-                </a:solidFill>
-                <a:effectLst/>
-                <a:uLnTx/>
-                <a:uFillTx/>
-                <a:latin typeface="Calibri"/>
-                <a:ea typeface="+mn-ea"/>
-                <a:cs typeface="+mn-cs"/>
-              </a:rPr>
-              <a:t>Webpack</a:t>
-            </a:r>
-            <a:r>
-              <a:rPr kumimoji="0" lang="fr-FR" sz="1600" b="0" i="0" u="none" strike="noStrike" kern="1200" cap="none" spc="0" normalizeH="0" baseline="0" noProof="0" dirty="0">
-                <a:ln>
-                  <a:noFill/>
-                </a:ln>
-                <a:solidFill>
-                  <a:srgbClr val="2C2522"/>
-                </a:solidFill>
-                <a:effectLst/>
-                <a:uLnTx/>
-                <a:uFillTx/>
-                <a:latin typeface="Calibri"/>
-                <a:ea typeface="+mn-ea"/>
-                <a:cs typeface="+mn-cs"/>
-              </a:rPr>
-              <a:t> Encore pour compiler et gérer les assets.</a:t>
-            </a:r>
-          </a:p>
-          <a:p>
-            <a:pPr algn="ctr"/>
-            <a:endParaRPr lang="fr-FR" noProof="0" dirty="0"/>
-          </a:p>
-        </p:txBody>
-      </p:sp>
-      <p:sp>
-        <p:nvSpPr>
-          <p:cNvPr id="10" name="Rectangle 9"/>
-          <p:cNvSpPr/>
-          <p:nvPr/>
-        </p:nvSpPr>
-        <p:spPr>
-          <a:xfrm>
-            <a:off x="640080" y="6419088"/>
-            <a:ext cx="10881360" cy="18288"/>
+            <a:off x="4015084" y="323041"/>
+            <a:ext cx="6774836" cy="6041182"/>
           </a:xfrm>
           <a:prstGeom prst="rect">
             <a:avLst/>
           </a:prstGeom>
-          <a:solidFill>
-            <a:srgbClr val="EFEAE0"/>
-          </a:solidFill>
-          <a:ln>
-            <a:noFill/>
-          </a:ln>
         </p:spPr>
-        <p:style>
-          <a:lnRef idx="1">
-            <a:schemeClr val="accent1"/>
-          </a:lnRef>
-          <a:fillRef idx="3">
-            <a:schemeClr val="accent1"/>
-          </a:fillRef>
-          <a:effectRef idx="2">
-            <a:schemeClr val="accent1"/>
-          </a:effectRef>
-          <a:fontRef idx="minor">
-            <a:schemeClr val="lt1"/>
-          </a:fontRef>
-        </p:style>
-        <p:txBody>
-          <a:bodyPr rtlCol="0" anchor="ctr"/>
-          <a:lstStyle/>
-          <a:p>
-            <a:pPr algn="ctr"/>
-            <a:endParaRPr lang="fr-FR" noProof="0" dirty="0"/>
-          </a:p>
-        </p:txBody>
-      </p:sp>
-      <p:sp>
-        <p:nvSpPr>
-          <p:cNvPr id="11" name="TextBox 10"/>
-          <p:cNvSpPr txBox="1"/>
-          <p:nvPr/>
-        </p:nvSpPr>
-        <p:spPr>
-          <a:xfrm>
-            <a:off x="10789920" y="6473952"/>
-            <a:ext cx="640080" cy="182880"/>
-          </a:xfrm>
-          <a:prstGeom prst="rect">
-            <a:avLst/>
-          </a:prstGeom>
-          <a:noFill/>
-        </p:spPr>
-        <p:txBody>
-          <a:bodyPr wrap="none">
-            <a:spAutoFit/>
-          </a:bodyPr>
-          <a:lstStyle/>
-          <a:p>
-            <a:pPr algn="r"/>
-            <a:r>
-              <a:rPr lang="fr-FR" sz="900" noProof="0" dirty="0">
-                <a:solidFill>
-                  <a:srgbClr val="69625E"/>
-                </a:solidFill>
-              </a:rPr>
-              <a:t>7</a:t>
-            </a:r>
-          </a:p>
-        </p:txBody>
-      </p:sp>
+      </p:pic>
     </p:spTree>
   </p:cSld>
   <p:clrMapOvr>
